--- a/presentaciones/Sesion-3-Publicar.pptx
+++ b/presentaciones/Sesion-3-Publicar.pptx
@@ -32,6 +32,8 @@
     <p:sldId id="280" r:id="rId31"/>
     <p:sldId id="281" r:id="rId32"/>
     <p:sldId id="282" r:id="rId33"/>
+    <p:sldId id="283" r:id="rId34"/>
+    <p:sldId id="284" r:id="rId35"/>
   </p:sldIdLst>
   <p:sldSz cx="12191695" cy="6858000" type="screen4x3"/>
   <p:notesSz cx="6858000" cy="9144000"/>
@@ -3347,7 +3349,7 @@
             <a:avLst/>
           </a:prstGeom>
           <a:solidFill>
-            <a:srgbClr val="0A0A0A"/>
+            <a:srgbClr val="F2E94E"/>
           </a:solidFill>
           <a:ln>
             <a:noFill/>
@@ -3384,8 +3386,8 @@
         </p:nvSpPr>
         <p:spPr>
           <a:xfrm>
-            <a:off x="777240" y="2103120"/>
-            <a:ext cx="10637215" cy="2926080"/>
+            <a:off x="777240" y="1920240"/>
+            <a:ext cx="10637215" cy="3108960"/>
           </a:xfrm>
           <a:prstGeom prst="rect">
             <a:avLst/>
@@ -3406,17 +3408,39 @@
                 <a:spcPts val="0"/>
               </a:spcBef>
               <a:spcAft>
+                <a:spcPts val="1400"/>
+              </a:spcAft>
+            </a:pPr>
+            <a:r>
+              <a:rPr sz="1200" b="0" i="0" spc="600">
+                <a:solidFill>
+                  <a:srgbClr val="6A6418"/>
+                </a:solidFill>
+                <a:latin typeface="Menlo"/>
+              </a:rPr>
+              <a:t>PRÁCTICA · LO HACÉIS VOSOTRAS</a:t>
+            </a:r>
+          </a:p>
+          <a:p>
+            <a:pPr>
+              <a:lnSpc>
+                <a:spcPct val="125000"/>
+              </a:lnSpc>
+              <a:spcBef>
+                <a:spcPts val="0"/>
+              </a:spcBef>
+              <a:spcAft>
                 <a:spcPts val="2000"/>
               </a:spcAft>
             </a:pPr>
             <a:r>
               <a:rPr sz="1100" b="0" i="0" spc="300">
                 <a:solidFill>
-                  <a:srgbClr val="8A8A8A"/>
+                  <a:srgbClr val="6A6418"/>
                 </a:solidFill>
                 <a:latin typeface="Menlo"/>
               </a:rPr>
-              <a:t>00:30 · 30 MINUTOS</a:t>
+              <a:t>00:30 · 15 MINUTOS</a:t>
             </a:r>
           </a:p>
           <a:p>
@@ -3434,11 +3458,11 @@
             <a:r>
               <a:rPr sz="4000" b="0" i="0">
                 <a:solidFill>
-                  <a:srgbClr val="FFFFFF"/>
+                  <a:srgbClr val="0A0A0A"/>
                 </a:solidFill>
                 <a:latin typeface="Inknut Antiqua"/>
               </a:rPr>
-              <a:t>publicar bien</a:t>
+              <a:t>checklist antes de publicar</a:t>
             </a:r>
           </a:p>
           <a:p>
@@ -3456,11 +3480,11 @@
             <a:r>
               <a:rPr sz="1700" b="0" i="0">
                 <a:solidFill>
-                  <a:srgbClr val="BBBBBB"/>
+                  <a:srgbClr val="33300A"/>
                 </a:solidFill>
                 <a:latin typeface="Iowan Old Style"/>
               </a:rPr>
-              <a:t>En la sesión 1 lo hicimos a ciegas. Ahora, entendiendo, y repasando antes.</a:t>
+              <a:t>Cinco minutos repasando la carpeta, persona a persona. Ahorran media hora de depuración después.</a:t>
             </a:r>
           </a:p>
         </p:txBody>
@@ -3498,7 +3522,7 @@
             <a:avLst/>
           </a:prstGeom>
           <a:solidFill>
-            <a:srgbClr val="FAFAFA"/>
+            <a:srgbClr val="FDFBE9"/>
           </a:solidFill>
           <a:ln>
             <a:noFill/>
@@ -3529,14 +3553,58 @@
       </p:sp>
       <p:sp>
         <p:nvSpPr>
-          <p:cNvPr id="3" name="TextBox 2"/>
+          <p:cNvPr id="3" name="Rectangle 2"/>
+          <p:cNvSpPr/>
+          <p:nvPr/>
+        </p:nvSpPr>
+        <p:spPr>
+          <a:xfrm>
+            <a:off x="0" y="0"/>
+            <a:ext cx="54864" cy="6858000"/>
+          </a:xfrm>
+          <a:prstGeom prst="rect">
+            <a:avLst/>
+          </a:prstGeom>
+          <a:solidFill>
+            <a:srgbClr val="E8DD58"/>
+          </a:solidFill>
+          <a:ln>
+            <a:noFill/>
+          </a:ln>
+          <a:effectLst/>
+        </p:spPr>
+        <p:style>
+          <a:lnRef idx="1">
+            <a:schemeClr val="accent1"/>
+          </a:lnRef>
+          <a:fillRef idx="3">
+            <a:schemeClr val="accent1"/>
+          </a:fillRef>
+          <a:effectRef idx="2">
+            <a:schemeClr val="accent1"/>
+          </a:effectRef>
+          <a:fontRef idx="minor">
+            <a:schemeClr val="lt1"/>
+          </a:fontRef>
+        </p:style>
+        <p:txBody>
+          <a:bodyPr rtlCol="0" anchor="ctr"/>
+          <a:lstStyle/>
+          <a:p>
+            <a:pPr algn="ctr"/>
+          </a:p>
+        </p:txBody>
+      </p:sp>
+      <p:sp>
+        <p:nvSpPr>
+          <p:cNvPr id="4" name="TextBox 3"/>
           <p:cNvSpPr txBox="1"/>
           <p:nvPr/>
         </p:nvSpPr>
         <p:spPr>
           <a:xfrm>
-            <a:off x="777240" y="777240"/>
-            <a:ext cx="10637215" cy="274320"/>
+            <a:off x="777240" y="310896"/>
+            <a:ext cx="10637215" cy="219456"/>
           </a:xfrm>
           <a:prstGeom prst="rect">
             <a:avLst/>
@@ -3561,6 +3629,51 @@
               </a:spcAft>
             </a:pPr>
             <a:r>
+              <a:rPr sz="950" b="0" i="0" spc="800">
+                <a:solidFill>
+                  <a:srgbClr val="8A7C14"/>
+                </a:solidFill>
+                <a:latin typeface="Menlo"/>
+              </a:rPr>
+              <a:t>PRÁCTICA</a:t>
+            </a:r>
+          </a:p>
+        </p:txBody>
+      </p:sp>
+      <p:sp>
+        <p:nvSpPr>
+          <p:cNvPr id="5" name="TextBox 4"/>
+          <p:cNvSpPr txBox="1"/>
+          <p:nvPr/>
+        </p:nvSpPr>
+        <p:spPr>
+          <a:xfrm>
+            <a:off x="777240" y="777240"/>
+            <a:ext cx="10637215" cy="274320"/>
+          </a:xfrm>
+          <a:prstGeom prst="rect">
+            <a:avLst/>
+          </a:prstGeom>
+          <a:noFill/>
+        </p:spPr>
+        <p:txBody>
+          <a:bodyPr wrap="square" lIns="0" rIns="0" tIns="0" bIns="0">
+            <a:spAutoFit/>
+          </a:bodyPr>
+          <a:lstStyle/>
+          <a:p>
+            <a:pPr>
+              <a:lnSpc>
+                <a:spcPct val="125000"/>
+              </a:lnSpc>
+              <a:spcBef>
+                <a:spcPts val="0"/>
+              </a:spcBef>
+              <a:spcAft>
+                <a:spcPts val="600"/>
+              </a:spcAft>
+            </a:pPr>
+            <a:r>
               <a:rPr sz="1000" b="0" i="0" spc="300">
                 <a:solidFill>
                   <a:srgbClr val="8A8A8A"/>
@@ -3574,7 +3687,7 @@
       </p:sp>
       <p:sp>
         <p:nvSpPr>
-          <p:cNvPr id="4" name="Rectangle 3"/>
+          <p:cNvPr id="6" name="Rectangle 5"/>
           <p:cNvSpPr/>
           <p:nvPr/>
         </p:nvSpPr>
@@ -3618,7 +3731,7 @@
       </p:sp>
       <p:sp>
         <p:nvSpPr>
-          <p:cNvPr id="5" name="TextBox 4"/>
+          <p:cNvPr id="7" name="TextBox 6"/>
           <p:cNvSpPr txBox="1"/>
           <p:nvPr/>
         </p:nvSpPr>
@@ -3663,7 +3776,7 @@
       </p:sp>
       <p:sp>
         <p:nvSpPr>
-          <p:cNvPr id="6" name="TextBox 5"/>
+          <p:cNvPr id="8" name="TextBox 7"/>
           <p:cNvSpPr txBox="1"/>
           <p:nvPr/>
         </p:nvSpPr>
@@ -4113,7 +4226,7 @@
             <a:avLst/>
           </a:prstGeom>
           <a:solidFill>
-            <a:srgbClr val="FFFFFF"/>
+            <a:srgbClr val="F2E94E"/>
           </a:solidFill>
           <a:ln>
             <a:noFill/>
@@ -4150,8 +4263,8 @@
         </p:nvSpPr>
         <p:spPr>
           <a:xfrm>
-            <a:off x="777240" y="777240"/>
-            <a:ext cx="10637215" cy="274320"/>
+            <a:off x="777240" y="1920240"/>
+            <a:ext cx="10637215" cy="3108960"/>
           </a:xfrm>
           <a:prstGeom prst="rect">
             <a:avLst/>
@@ -4172,393 +4285,83 @@
                 <a:spcPts val="0"/>
               </a:spcBef>
               <a:spcAft>
+                <a:spcPts val="1400"/>
+              </a:spcAft>
+            </a:pPr>
+            <a:r>
+              <a:rPr sz="1200" b="0" i="0" spc="600">
+                <a:solidFill>
+                  <a:srgbClr val="6A6418"/>
+                </a:solidFill>
+                <a:latin typeface="Menlo"/>
+              </a:rPr>
+              <a:t>PRÁCTICA · LO HACÉIS VOSOTRAS</a:t>
+            </a:r>
+          </a:p>
+          <a:p>
+            <a:pPr>
+              <a:lnSpc>
+                <a:spcPct val="125000"/>
+              </a:lnSpc>
+              <a:spcBef>
+                <a:spcPts val="0"/>
+              </a:spcBef>
+              <a:spcAft>
+                <a:spcPts val="2000"/>
+              </a:spcAft>
+            </a:pPr>
+            <a:r>
+              <a:rPr sz="1100" b="0" i="0" spc="300">
+                <a:solidFill>
+                  <a:srgbClr val="6A6418"/>
+                </a:solidFill>
+                <a:latin typeface="Menlo"/>
+              </a:rPr>
+              <a:t>00:45 · 30 MINUTOS</a:t>
+            </a:r>
+          </a:p>
+          <a:p>
+            <a:pPr>
+              <a:lnSpc>
+                <a:spcPct val="110000"/>
+              </a:lnSpc>
+              <a:spcBef>
+                <a:spcPts val="0"/>
+              </a:spcBef>
+              <a:spcAft>
+                <a:spcPts val="1800"/>
+              </a:spcAft>
+            </a:pPr>
+            <a:r>
+              <a:rPr sz="4000" b="0" i="0">
+                <a:solidFill>
+                  <a:srgbClr val="0A0A0A"/>
+                </a:solidFill>
+                <a:latin typeface="Inknut Antiqua"/>
+              </a:rPr>
+              <a:t>ejercicio 6 · subir y publicar</a:t>
+            </a:r>
+          </a:p>
+          <a:p>
+            <a:pPr>
+              <a:lnSpc>
+                <a:spcPct val="140000"/>
+              </a:lnSpc>
+              <a:spcBef>
+                <a:spcPts val="0"/>
+              </a:spcBef>
+              <a:spcAft>
                 <a:spcPts val="600"/>
               </a:spcAft>
             </a:pPr>
             <a:r>
-              <a:rPr sz="1000" b="0" i="0" spc="300">
-                <a:solidFill>
-                  <a:srgbClr val="8A8A8A"/>
-                </a:solidFill>
-                <a:latin typeface="Menlo"/>
-              </a:rPr>
-              <a:t>EJERCICIO 6   ·   30 MIN · PASO A PASO</a:t>
-            </a:r>
-          </a:p>
-        </p:txBody>
-      </p:sp>
-      <p:sp>
-        <p:nvSpPr>
-          <p:cNvPr id="4" name="Rectangle 3"/>
-          <p:cNvSpPr/>
-          <p:nvPr/>
-        </p:nvSpPr>
-        <p:spPr>
-          <a:xfrm>
-            <a:off x="777240" y="1161288"/>
-            <a:ext cx="10637215" cy="9525"/>
-          </a:xfrm>
-          <a:prstGeom prst="rect">
-            <a:avLst/>
-          </a:prstGeom>
-          <a:solidFill>
-            <a:srgbClr val="D8D8D8"/>
-          </a:solidFill>
-          <a:ln>
-            <a:noFill/>
-          </a:ln>
-          <a:effectLst/>
-        </p:spPr>
-        <p:style>
-          <a:lnRef idx="1">
-            <a:schemeClr val="accent1"/>
-          </a:lnRef>
-          <a:fillRef idx="3">
-            <a:schemeClr val="accent1"/>
-          </a:fillRef>
-          <a:effectRef idx="2">
-            <a:schemeClr val="accent1"/>
-          </a:effectRef>
-          <a:fontRef idx="minor">
-            <a:schemeClr val="lt1"/>
-          </a:fontRef>
-        </p:style>
-        <p:txBody>
-          <a:bodyPr rtlCol="0" anchor="ctr"/>
-          <a:lstStyle/>
-          <a:p>
-            <a:pPr algn="ctr"/>
-          </a:p>
-        </p:txBody>
-      </p:sp>
-      <p:sp>
-        <p:nvSpPr>
-          <p:cNvPr id="5" name="TextBox 4"/>
-          <p:cNvSpPr txBox="1"/>
-          <p:nvPr/>
-        </p:nvSpPr>
-        <p:spPr>
-          <a:xfrm>
-            <a:off x="777240" y="1417320"/>
-            <a:ext cx="10637215" cy="822960"/>
-          </a:xfrm>
-          <a:prstGeom prst="rect">
-            <a:avLst/>
-          </a:prstGeom>
-          <a:noFill/>
-        </p:spPr>
-        <p:txBody>
-          <a:bodyPr wrap="square" lIns="0" rIns="0" tIns="0" bIns="0">
-            <a:spAutoFit/>
-          </a:bodyPr>
-          <a:lstStyle/>
-          <a:p>
-            <a:pPr>
-              <a:lnSpc>
-                <a:spcPct val="112000"/>
-              </a:lnSpc>
-              <a:spcBef>
-                <a:spcPts val="0"/>
-              </a:spcBef>
-              <a:spcAft>
-                <a:spcPts val="600"/>
-              </a:spcAft>
-            </a:pPr>
-            <a:r>
-              <a:rPr sz="2700" b="0" i="0">
-                <a:solidFill>
-                  <a:srgbClr val="0A0A0A"/>
-                </a:solidFill>
-                <a:latin typeface="Inknut Antiqua"/>
-              </a:rPr>
-              <a:t>subir y publicar</a:t>
-            </a:r>
-          </a:p>
-        </p:txBody>
-      </p:sp>
-      <p:sp>
-        <p:nvSpPr>
-          <p:cNvPr id="6" name="TextBox 5"/>
-          <p:cNvSpPr txBox="1"/>
-          <p:nvPr/>
-        </p:nvSpPr>
-        <p:spPr>
-          <a:xfrm>
-            <a:off x="777240" y="2057400"/>
-            <a:ext cx="10637215" cy="4251960"/>
-          </a:xfrm>
-          <a:prstGeom prst="rect">
-            <a:avLst/>
-          </a:prstGeom>
-          <a:noFill/>
-        </p:spPr>
-        <p:txBody>
-          <a:bodyPr wrap="square" lIns="0" rIns="0" tIns="0" bIns="0">
-            <a:spAutoFit/>
-          </a:bodyPr>
-          <a:lstStyle/>
-          <a:p>
-            <a:pPr>
-              <a:lnSpc>
-                <a:spcPct val="140000"/>
-              </a:lnSpc>
-              <a:spcBef>
-                <a:spcPts val="0"/>
-              </a:spcBef>
-              <a:spcAft>
-                <a:spcPts val="500"/>
-              </a:spcAft>
-            </a:pPr>
-            <a:r>
-              <a:rPr sz="1450" b="0" i="0">
-                <a:solidFill>
-                  <a:srgbClr val="444444"/>
+              <a:rPr sz="1700" b="0" i="0">
+                <a:solidFill>
+                  <a:srgbClr val="33300A"/>
                 </a:solidFill>
                 <a:latin typeface="Iowan Old Style"/>
               </a:rPr>
-              <a:t>·  github.com → New repository.</a:t>
-            </a:r>
-          </a:p>
-          <a:p>
-            <a:pPr>
-              <a:lnSpc>
-                <a:spcPct val="140000"/>
-              </a:lnSpc>
-              <a:spcBef>
-                <a:spcPts val="0"/>
-              </a:spcBef>
-              <a:spcAft>
-                <a:spcPts val="500"/>
-              </a:spcAft>
-            </a:pPr>
-            <a:r>
-              <a:rPr sz="1450" b="0" i="0">
-                <a:solidFill>
-                  <a:srgbClr val="444444"/>
-                </a:solidFill>
-                <a:latin typeface="Iowan Old Style"/>
-              </a:rPr>
-              <a:t>·  Nombre mi-web, marcar Public, Create.</a:t>
-            </a:r>
-          </a:p>
-          <a:p>
-            <a:pPr>
-              <a:lnSpc>
-                <a:spcPct val="140000"/>
-              </a:lnSpc>
-              <a:spcBef>
-                <a:spcPts val="0"/>
-              </a:spcBef>
-              <a:spcAft>
-                <a:spcPts val="500"/>
-              </a:spcAft>
-            </a:pPr>
-            <a:r>
-              <a:rPr sz="1450" b="0" i="0">
-                <a:solidFill>
-                  <a:srgbClr val="444444"/>
-                </a:solidFill>
-                <a:latin typeface="Iowan Old Style"/>
-              </a:rPr>
-              <a:t>·  uploading an existing file.</a:t>
-            </a:r>
-          </a:p>
-          <a:p>
-            <a:pPr>
-              <a:lnSpc>
-                <a:spcPct val="140000"/>
-              </a:lnSpc>
-              <a:spcBef>
-                <a:spcPts val="0"/>
-              </a:spcBef>
-              <a:spcAft>
-                <a:spcPts val="500"/>
-              </a:spcAft>
-            </a:pPr>
-            <a:r>
-              <a:rPr sz="1450" b="0" i="0">
-                <a:solidFill>
-                  <a:srgbClr val="444444"/>
-                </a:solidFill>
-                <a:latin typeface="Iowan Old Style"/>
-              </a:rPr>
-              <a:t>·  Arrastrar el contenido de la carpeta, no la carpeta.</a:t>
-            </a:r>
-          </a:p>
-          <a:p>
-            <a:pPr>
-              <a:lnSpc>
-                <a:spcPct val="140000"/>
-              </a:lnSpc>
-              <a:spcBef>
-                <a:spcPts val="0"/>
-              </a:spcBef>
-              <a:spcAft>
-                <a:spcPts val="500"/>
-              </a:spcAft>
-            </a:pPr>
-            <a:r>
-              <a:rPr sz="1450" b="0" i="0">
-                <a:solidFill>
-                  <a:srgbClr val="444444"/>
-                </a:solidFill>
-                <a:latin typeface="Iowan Old Style"/>
-              </a:rPr>
-              <a:t>·  Commit changes.</a:t>
-            </a:r>
-          </a:p>
-          <a:p>
-            <a:pPr>
-              <a:lnSpc>
-                <a:spcPct val="140000"/>
-              </a:lnSpc>
-              <a:spcBef>
-                <a:spcPts val="0"/>
-              </a:spcBef>
-              <a:spcAft>
-                <a:spcPts val="500"/>
-              </a:spcAft>
-            </a:pPr>
-            <a:r>
-              <a:rPr sz="1450" b="0" i="0">
-                <a:solidFill>
-                  <a:srgbClr val="444444"/>
-                </a:solidFill>
-                <a:latin typeface="Iowan Old Style"/>
-              </a:rPr>
-              <a:t>·  Settings → Pages.</a:t>
-            </a:r>
-          </a:p>
-          <a:p>
-            <a:pPr>
-              <a:lnSpc>
-                <a:spcPct val="140000"/>
-              </a:lnSpc>
-              <a:spcBef>
-                <a:spcPts val="0"/>
-              </a:spcBef>
-              <a:spcAft>
-                <a:spcPts val="500"/>
-              </a:spcAft>
-            </a:pPr>
-            <a:r>
-              <a:rPr sz="1450" b="0" i="0">
-                <a:solidFill>
-                  <a:srgbClr val="444444"/>
-                </a:solidFill>
-                <a:latin typeface="Iowan Old Style"/>
-              </a:rPr>
-              <a:t>·  Branch: main → Save.</a:t>
-            </a:r>
-          </a:p>
-          <a:p>
-            <a:pPr>
-              <a:lnSpc>
-                <a:spcPct val="140000"/>
-              </a:lnSpc>
-              <a:spcBef>
-                <a:spcPts val="0"/>
-              </a:spcBef>
-              <a:spcAft>
-                <a:spcPts val="500"/>
-              </a:spcAft>
-            </a:pPr>
-            <a:r>
-              <a:rPr sz="1450" b="0" i="0">
-                <a:solidFill>
-                  <a:srgbClr val="444444"/>
-                </a:solidFill>
-                <a:latin typeface="Iowan Old Style"/>
-              </a:rPr>
-              <a:t>·  Esperar un minuto y recargar.</a:t>
-            </a:r>
-          </a:p>
-          <a:p>
-            <a:pPr>
-              <a:lnSpc>
-                <a:spcPct val="125000"/>
-              </a:lnSpc>
-              <a:spcBef>
-                <a:spcPts val="1000"/>
-              </a:spcBef>
-              <a:spcAft>
-                <a:spcPts val="300"/>
-              </a:spcAft>
-            </a:pPr>
-            <a:r>
-              <a:rPr sz="1000" b="0" i="0" spc="300">
-                <a:solidFill>
-                  <a:srgbClr val="8A8A8A"/>
-                </a:solidFill>
-                <a:latin typeface="Menlo"/>
-              </a:rPr>
-              <a:t>SI SALE UN 404</a:t>
-            </a:r>
-          </a:p>
-          <a:p>
-            <a:pPr>
-              <a:lnSpc>
-                <a:spcPct val="140000"/>
-              </a:lnSpc>
-              <a:spcBef>
-                <a:spcPts val="0"/>
-              </a:spcBef>
-              <a:spcAft>
-                <a:spcPts val="800"/>
-              </a:spcAft>
-            </a:pPr>
-            <a:r>
-              <a:rPr sz="1400" b="0" i="0">
-                <a:solidFill>
-                  <a:srgbClr val="444444"/>
-                </a:solidFill>
-                <a:latin typeface="Iowan Old Style"/>
-              </a:rPr>
-              <a:t>Entra en tu repositorio: ¿ves index.html nada más abrirlo? Si lo que ves es una carpeta, subiste la carpeta contenedora. Bórralo y vuelve a subir solo el contenido.</a:t>
-            </a:r>
-          </a:p>
-          <a:p>
-            <a:pPr>
-              <a:lnSpc>
-                <a:spcPct val="125000"/>
-              </a:lnSpc>
-              <a:spcBef>
-                <a:spcPts val="1000"/>
-              </a:spcBef>
-              <a:spcAft>
-                <a:spcPts val="300"/>
-              </a:spcAft>
-            </a:pPr>
-            <a:r>
-              <a:rPr sz="1000" b="0" i="0" spc="300">
-                <a:solidFill>
-                  <a:srgbClr val="887000"/>
-                </a:solidFill>
-                <a:latin typeface="Menlo"/>
-              </a:rPr>
-              <a:t>APUNTA AQUÍ TU DIRECCIÓN</a:t>
-            </a:r>
-          </a:p>
-          <a:p>
-            <a:pPr>
-              <a:lnSpc>
-                <a:spcPct val="140000"/>
-              </a:lnSpc>
-              <a:spcBef>
-                <a:spcPts val="0"/>
-              </a:spcBef>
-              <a:spcAft>
-                <a:spcPts val="800"/>
-              </a:spcAft>
-            </a:pPr>
-            <a:r>
-              <a:rPr sz="1400" b="1" i="0">
-                <a:solidFill>
-                  <a:srgbClr val="0A0A0A"/>
-                </a:solidFill>
-                <a:latin typeface="Iowan Old Style"/>
-              </a:rPr>
-              <a:t>tunombre.github.io / _______________ En papel. Ahora. Y ábrela en el móvil: es donde se ve para qué servía la media query de la sesión pasada.</a:t>
+              <a:t>Ahora entendiendo cada paso. Nadie pasa al siguiente bloque sin su dirección funcionando.</a:t>
             </a:r>
           </a:p>
         </p:txBody>
@@ -4596,7 +4399,7 @@
             <a:avLst/>
           </a:prstGeom>
           <a:solidFill>
-            <a:srgbClr val="0A0A0A"/>
+            <a:srgbClr val="FDFBE9"/>
           </a:solidFill>
           <a:ln>
             <a:noFill/>
@@ -4627,14 +4430,58 @@
       </p:sp>
       <p:sp>
         <p:nvSpPr>
-          <p:cNvPr id="3" name="TextBox 2"/>
+          <p:cNvPr id="3" name="Rectangle 2"/>
+          <p:cNvSpPr/>
+          <p:nvPr/>
+        </p:nvSpPr>
+        <p:spPr>
+          <a:xfrm>
+            <a:off x="0" y="0"/>
+            <a:ext cx="54864" cy="6858000"/>
+          </a:xfrm>
+          <a:prstGeom prst="rect">
+            <a:avLst/>
+          </a:prstGeom>
+          <a:solidFill>
+            <a:srgbClr val="E8DD58"/>
+          </a:solidFill>
+          <a:ln>
+            <a:noFill/>
+          </a:ln>
+          <a:effectLst/>
+        </p:spPr>
+        <p:style>
+          <a:lnRef idx="1">
+            <a:schemeClr val="accent1"/>
+          </a:lnRef>
+          <a:fillRef idx="3">
+            <a:schemeClr val="accent1"/>
+          </a:fillRef>
+          <a:effectRef idx="2">
+            <a:schemeClr val="accent1"/>
+          </a:effectRef>
+          <a:fontRef idx="minor">
+            <a:schemeClr val="lt1"/>
+          </a:fontRef>
+        </p:style>
+        <p:txBody>
+          <a:bodyPr rtlCol="0" anchor="ctr"/>
+          <a:lstStyle/>
+          <a:p>
+            <a:pPr algn="ctr"/>
+          </a:p>
+        </p:txBody>
+      </p:sp>
+      <p:sp>
+        <p:nvSpPr>
+          <p:cNvPr id="4" name="TextBox 3"/>
           <p:cNvSpPr txBox="1"/>
           <p:nvPr/>
         </p:nvSpPr>
         <p:spPr>
           <a:xfrm>
-            <a:off x="777240" y="2103120"/>
-            <a:ext cx="10637215" cy="2926080"/>
+            <a:off x="777240" y="310896"/>
+            <a:ext cx="10637215" cy="219456"/>
           </a:xfrm>
           <a:prstGeom prst="rect">
             <a:avLst/>
@@ -4655,41 +4502,176 @@
                 <a:spcPts val="0"/>
               </a:spcBef>
               <a:spcAft>
-                <a:spcPts val="2000"/>
-              </a:spcAft>
-            </a:pPr>
-            <a:r>
-              <a:rPr sz="1100" b="0" i="0" spc="300">
+                <a:spcPts val="600"/>
+              </a:spcAft>
+            </a:pPr>
+            <a:r>
+              <a:rPr sz="950" b="0" i="0" spc="800">
+                <a:solidFill>
+                  <a:srgbClr val="8A7C14"/>
+                </a:solidFill>
+                <a:latin typeface="Menlo"/>
+              </a:rPr>
+              <a:t>PRÁCTICA</a:t>
+            </a:r>
+          </a:p>
+        </p:txBody>
+      </p:sp>
+      <p:sp>
+        <p:nvSpPr>
+          <p:cNvPr id="5" name="TextBox 4"/>
+          <p:cNvSpPr txBox="1"/>
+          <p:nvPr/>
+        </p:nvSpPr>
+        <p:spPr>
+          <a:xfrm>
+            <a:off x="777240" y="777240"/>
+            <a:ext cx="10637215" cy="274320"/>
+          </a:xfrm>
+          <a:prstGeom prst="rect">
+            <a:avLst/>
+          </a:prstGeom>
+          <a:noFill/>
+        </p:spPr>
+        <p:txBody>
+          <a:bodyPr wrap="square" lIns="0" rIns="0" tIns="0" bIns="0">
+            <a:spAutoFit/>
+          </a:bodyPr>
+          <a:lstStyle/>
+          <a:p>
+            <a:pPr>
+              <a:lnSpc>
+                <a:spcPct val="125000"/>
+              </a:lnSpc>
+              <a:spcBef>
+                <a:spcPts val="0"/>
+              </a:spcBef>
+              <a:spcAft>
+                <a:spcPts val="600"/>
+              </a:spcAft>
+            </a:pPr>
+            <a:r>
+              <a:rPr sz="1000" b="0" i="0" spc="300">
                 <a:solidFill>
                   <a:srgbClr val="8A8A8A"/>
                 </a:solidFill>
                 <a:latin typeface="Menlo"/>
               </a:rPr>
-              <a:t>01:00 · 20 MINUTOS</a:t>
-            </a:r>
-          </a:p>
-          <a:p>
-            <a:pPr>
-              <a:lnSpc>
-                <a:spcPct val="110000"/>
-              </a:lnSpc>
-              <a:spcBef>
-                <a:spcPts val="0"/>
-              </a:spcBef>
-              <a:spcAft>
-                <a:spcPts val="1800"/>
-              </a:spcAft>
-            </a:pPr>
-            <a:r>
-              <a:rPr sz="4000" b="0" i="0">
-                <a:solidFill>
-                  <a:srgbClr val="FFFFFF"/>
+              <a:t>EJERCICIO 6   ·   30 MIN · PASO A PASO</a:t>
+            </a:r>
+          </a:p>
+        </p:txBody>
+      </p:sp>
+      <p:sp>
+        <p:nvSpPr>
+          <p:cNvPr id="6" name="Rectangle 5"/>
+          <p:cNvSpPr/>
+          <p:nvPr/>
+        </p:nvSpPr>
+        <p:spPr>
+          <a:xfrm>
+            <a:off x="777240" y="1161288"/>
+            <a:ext cx="10637215" cy="9525"/>
+          </a:xfrm>
+          <a:prstGeom prst="rect">
+            <a:avLst/>
+          </a:prstGeom>
+          <a:solidFill>
+            <a:srgbClr val="D8D8D8"/>
+          </a:solidFill>
+          <a:ln>
+            <a:noFill/>
+          </a:ln>
+          <a:effectLst/>
+        </p:spPr>
+        <p:style>
+          <a:lnRef idx="1">
+            <a:schemeClr val="accent1"/>
+          </a:lnRef>
+          <a:fillRef idx="3">
+            <a:schemeClr val="accent1"/>
+          </a:fillRef>
+          <a:effectRef idx="2">
+            <a:schemeClr val="accent1"/>
+          </a:effectRef>
+          <a:fontRef idx="minor">
+            <a:schemeClr val="lt1"/>
+          </a:fontRef>
+        </p:style>
+        <p:txBody>
+          <a:bodyPr rtlCol="0" anchor="ctr"/>
+          <a:lstStyle/>
+          <a:p>
+            <a:pPr algn="ctr"/>
+          </a:p>
+        </p:txBody>
+      </p:sp>
+      <p:sp>
+        <p:nvSpPr>
+          <p:cNvPr id="7" name="TextBox 6"/>
+          <p:cNvSpPr txBox="1"/>
+          <p:nvPr/>
+        </p:nvSpPr>
+        <p:spPr>
+          <a:xfrm>
+            <a:off x="777240" y="1417320"/>
+            <a:ext cx="10637215" cy="822960"/>
+          </a:xfrm>
+          <a:prstGeom prst="rect">
+            <a:avLst/>
+          </a:prstGeom>
+          <a:noFill/>
+        </p:spPr>
+        <p:txBody>
+          <a:bodyPr wrap="square" lIns="0" rIns="0" tIns="0" bIns="0">
+            <a:spAutoFit/>
+          </a:bodyPr>
+          <a:lstStyle/>
+          <a:p>
+            <a:pPr>
+              <a:lnSpc>
+                <a:spcPct val="112000"/>
+              </a:lnSpc>
+              <a:spcBef>
+                <a:spcPts val="0"/>
+              </a:spcBef>
+              <a:spcAft>
+                <a:spcPts val="600"/>
+              </a:spcAft>
+            </a:pPr>
+            <a:r>
+              <a:rPr sz="2700" b="0" i="0">
+                <a:solidFill>
+                  <a:srgbClr val="0A0A0A"/>
                 </a:solidFill>
                 <a:latin typeface="Inknut Antiqua"/>
               </a:rPr>
-              <a:t>un dominio propio</a:t>
-            </a:r>
-          </a:p>
+              <a:t>subir y publicar</a:t>
+            </a:r>
+          </a:p>
+        </p:txBody>
+      </p:sp>
+      <p:sp>
+        <p:nvSpPr>
+          <p:cNvPr id="8" name="TextBox 7"/>
+          <p:cNvSpPr txBox="1"/>
+          <p:nvPr/>
+        </p:nvSpPr>
+        <p:spPr>
+          <a:xfrm>
+            <a:off x="777240" y="2057400"/>
+            <a:ext cx="10637215" cy="4251960"/>
+          </a:xfrm>
+          <a:prstGeom prst="rect">
+            <a:avLst/>
+          </a:prstGeom>
+          <a:noFill/>
+        </p:spPr>
+        <p:txBody>
+          <a:bodyPr wrap="square" lIns="0" rIns="0" tIns="0" bIns="0">
+            <a:spAutoFit/>
+          </a:bodyPr>
+          <a:lstStyle/>
           <a:p>
             <a:pPr>
               <a:lnSpc>
@@ -4699,17 +4681,259 @@
                 <a:spcPts val="0"/>
               </a:spcBef>
               <a:spcAft>
-                <a:spcPts val="600"/>
-              </a:spcAft>
-            </a:pPr>
-            <a:r>
-              <a:rPr sz="1700" b="0" i="0">
-                <a:solidFill>
-                  <a:srgbClr val="BBBBBB"/>
+                <a:spcPts val="500"/>
+              </a:spcAft>
+            </a:pPr>
+            <a:r>
+              <a:rPr sz="1450" b="0" i="0">
+                <a:solidFill>
+                  <a:srgbClr val="444444"/>
                 </a:solidFill>
                 <a:latin typeface="Iowan Old Style"/>
               </a:rPr>
-              <a:t>Opcional, cuesta unos 12 € al año, y hay una regla que ya sabes.</a:t>
+              <a:t>·  github.com → New repository.</a:t>
+            </a:r>
+          </a:p>
+          <a:p>
+            <a:pPr>
+              <a:lnSpc>
+                <a:spcPct val="140000"/>
+              </a:lnSpc>
+              <a:spcBef>
+                <a:spcPts val="0"/>
+              </a:spcBef>
+              <a:spcAft>
+                <a:spcPts val="500"/>
+              </a:spcAft>
+            </a:pPr>
+            <a:r>
+              <a:rPr sz="1450" b="0" i="0">
+                <a:solidFill>
+                  <a:srgbClr val="444444"/>
+                </a:solidFill>
+                <a:latin typeface="Iowan Old Style"/>
+              </a:rPr>
+              <a:t>·  Nombre mi-web, marcar Public, Create.</a:t>
+            </a:r>
+          </a:p>
+          <a:p>
+            <a:pPr>
+              <a:lnSpc>
+                <a:spcPct val="140000"/>
+              </a:lnSpc>
+              <a:spcBef>
+                <a:spcPts val="0"/>
+              </a:spcBef>
+              <a:spcAft>
+                <a:spcPts val="500"/>
+              </a:spcAft>
+            </a:pPr>
+            <a:r>
+              <a:rPr sz="1450" b="0" i="0">
+                <a:solidFill>
+                  <a:srgbClr val="444444"/>
+                </a:solidFill>
+                <a:latin typeface="Iowan Old Style"/>
+              </a:rPr>
+              <a:t>·  uploading an existing file.</a:t>
+            </a:r>
+          </a:p>
+          <a:p>
+            <a:pPr>
+              <a:lnSpc>
+                <a:spcPct val="140000"/>
+              </a:lnSpc>
+              <a:spcBef>
+                <a:spcPts val="0"/>
+              </a:spcBef>
+              <a:spcAft>
+                <a:spcPts val="500"/>
+              </a:spcAft>
+            </a:pPr>
+            <a:r>
+              <a:rPr sz="1450" b="0" i="0">
+                <a:solidFill>
+                  <a:srgbClr val="444444"/>
+                </a:solidFill>
+                <a:latin typeface="Iowan Old Style"/>
+              </a:rPr>
+              <a:t>·  Arrastrar el contenido de la carpeta, no la carpeta.</a:t>
+            </a:r>
+          </a:p>
+          <a:p>
+            <a:pPr>
+              <a:lnSpc>
+                <a:spcPct val="140000"/>
+              </a:lnSpc>
+              <a:spcBef>
+                <a:spcPts val="0"/>
+              </a:spcBef>
+              <a:spcAft>
+                <a:spcPts val="500"/>
+              </a:spcAft>
+            </a:pPr>
+            <a:r>
+              <a:rPr sz="1450" b="0" i="0">
+                <a:solidFill>
+                  <a:srgbClr val="444444"/>
+                </a:solidFill>
+                <a:latin typeface="Iowan Old Style"/>
+              </a:rPr>
+              <a:t>·  Commit changes.</a:t>
+            </a:r>
+          </a:p>
+          <a:p>
+            <a:pPr>
+              <a:lnSpc>
+                <a:spcPct val="140000"/>
+              </a:lnSpc>
+              <a:spcBef>
+                <a:spcPts val="0"/>
+              </a:spcBef>
+              <a:spcAft>
+                <a:spcPts val="500"/>
+              </a:spcAft>
+            </a:pPr>
+            <a:r>
+              <a:rPr sz="1450" b="0" i="0">
+                <a:solidFill>
+                  <a:srgbClr val="444444"/>
+                </a:solidFill>
+                <a:latin typeface="Iowan Old Style"/>
+              </a:rPr>
+              <a:t>·  Settings → Pages.</a:t>
+            </a:r>
+          </a:p>
+          <a:p>
+            <a:pPr>
+              <a:lnSpc>
+                <a:spcPct val="140000"/>
+              </a:lnSpc>
+              <a:spcBef>
+                <a:spcPts val="0"/>
+              </a:spcBef>
+              <a:spcAft>
+                <a:spcPts val="500"/>
+              </a:spcAft>
+            </a:pPr>
+            <a:r>
+              <a:rPr sz="1450" b="0" i="0">
+                <a:solidFill>
+                  <a:srgbClr val="444444"/>
+                </a:solidFill>
+                <a:latin typeface="Iowan Old Style"/>
+              </a:rPr>
+              <a:t>·  Branch: main → Save.</a:t>
+            </a:r>
+          </a:p>
+          <a:p>
+            <a:pPr>
+              <a:lnSpc>
+                <a:spcPct val="140000"/>
+              </a:lnSpc>
+              <a:spcBef>
+                <a:spcPts val="0"/>
+              </a:spcBef>
+              <a:spcAft>
+                <a:spcPts val="500"/>
+              </a:spcAft>
+            </a:pPr>
+            <a:r>
+              <a:rPr sz="1450" b="0" i="0">
+                <a:solidFill>
+                  <a:srgbClr val="444444"/>
+                </a:solidFill>
+                <a:latin typeface="Iowan Old Style"/>
+              </a:rPr>
+              <a:t>·  Esperar un minuto y recargar.</a:t>
+            </a:r>
+          </a:p>
+          <a:p>
+            <a:pPr>
+              <a:lnSpc>
+                <a:spcPct val="125000"/>
+              </a:lnSpc>
+              <a:spcBef>
+                <a:spcPts val="1000"/>
+              </a:spcBef>
+              <a:spcAft>
+                <a:spcPts val="300"/>
+              </a:spcAft>
+            </a:pPr>
+            <a:r>
+              <a:rPr sz="1000" b="0" i="0" spc="300">
+                <a:solidFill>
+                  <a:srgbClr val="8A8A8A"/>
+                </a:solidFill>
+                <a:latin typeface="Menlo"/>
+              </a:rPr>
+              <a:t>SI SALE UN 404</a:t>
+            </a:r>
+          </a:p>
+          <a:p>
+            <a:pPr>
+              <a:lnSpc>
+                <a:spcPct val="140000"/>
+              </a:lnSpc>
+              <a:spcBef>
+                <a:spcPts val="0"/>
+              </a:spcBef>
+              <a:spcAft>
+                <a:spcPts val="800"/>
+              </a:spcAft>
+            </a:pPr>
+            <a:r>
+              <a:rPr sz="1400" b="0" i="0">
+                <a:solidFill>
+                  <a:srgbClr val="444444"/>
+                </a:solidFill>
+                <a:latin typeface="Iowan Old Style"/>
+              </a:rPr>
+              <a:t>Entra en tu repositorio: ¿ves index.html nada más abrirlo? Si lo que ves es una carpeta, subiste la carpeta contenedora. Bórralo y vuelve a subir solo el contenido.</a:t>
+            </a:r>
+          </a:p>
+          <a:p>
+            <a:pPr>
+              <a:lnSpc>
+                <a:spcPct val="125000"/>
+              </a:lnSpc>
+              <a:spcBef>
+                <a:spcPts val="1000"/>
+              </a:spcBef>
+              <a:spcAft>
+                <a:spcPts val="300"/>
+              </a:spcAft>
+            </a:pPr>
+            <a:r>
+              <a:rPr sz="1000" b="0" i="0" spc="300">
+                <a:solidFill>
+                  <a:srgbClr val="887000"/>
+                </a:solidFill>
+                <a:latin typeface="Menlo"/>
+              </a:rPr>
+              <a:t>APUNTA AQUÍ TU DIRECCIÓN</a:t>
+            </a:r>
+          </a:p>
+          <a:p>
+            <a:pPr>
+              <a:lnSpc>
+                <a:spcPct val="140000"/>
+              </a:lnSpc>
+              <a:spcBef>
+                <a:spcPts val="0"/>
+              </a:spcBef>
+              <a:spcAft>
+                <a:spcPts val="800"/>
+              </a:spcAft>
+            </a:pPr>
+            <a:r>
+              <a:rPr sz="1400" b="1" i="0">
+                <a:solidFill>
+                  <a:srgbClr val="0A0A0A"/>
+                </a:solidFill>
+                <a:latin typeface="Iowan Old Style"/>
+              </a:rPr>
+              <a:t>tunombre.github.io / _______________ En papel. Ahora. Y ábrela en el móvil: es donde se ve para qué servía la media query de la sesión pasada.</a:t>
             </a:r>
           </a:p>
         </p:txBody>
@@ -4747,7 +4971,7 @@
             <a:avLst/>
           </a:prstGeom>
           <a:solidFill>
-            <a:srgbClr val="FFFFFF"/>
+            <a:srgbClr val="0A0A0A"/>
           </a:solidFill>
           <a:ln>
             <a:noFill/>
@@ -4784,8 +5008,8 @@
         </p:nvSpPr>
         <p:spPr>
           <a:xfrm>
-            <a:off x="777240" y="777240"/>
-            <a:ext cx="10637215" cy="274320"/>
+            <a:off x="777240" y="1920240"/>
+            <a:ext cx="10637215" cy="3108960"/>
           </a:xfrm>
           <a:prstGeom prst="rect">
             <a:avLst/>
@@ -4806,261 +5030,83 @@
                 <a:spcPts val="0"/>
               </a:spcBef>
               <a:spcAft>
+                <a:spcPts val="1400"/>
+              </a:spcAft>
+            </a:pPr>
+            <a:r>
+              <a:rPr sz="1200" b="0" i="0" spc="600">
+                <a:solidFill>
+                  <a:srgbClr val="8A8A8A"/>
+                </a:solidFill>
+                <a:latin typeface="Menlo"/>
+              </a:rPr>
+              <a:t>TEORÍA · LO EXPLICO YO</a:t>
+            </a:r>
+          </a:p>
+          <a:p>
+            <a:pPr>
+              <a:lnSpc>
+                <a:spcPct val="125000"/>
+              </a:lnSpc>
+              <a:spcBef>
+                <a:spcPts val="0"/>
+              </a:spcBef>
+              <a:spcAft>
+                <a:spcPts val="2000"/>
+              </a:spcAft>
+            </a:pPr>
+            <a:r>
+              <a:rPr sz="1100" b="0" i="0" spc="300">
+                <a:solidFill>
+                  <a:srgbClr val="8A8A8A"/>
+                </a:solidFill>
+                <a:latin typeface="Menlo"/>
+              </a:rPr>
+              <a:t>01:00 · 20 MINUTOS</a:t>
+            </a:r>
+          </a:p>
+          <a:p>
+            <a:pPr>
+              <a:lnSpc>
+                <a:spcPct val="110000"/>
+              </a:lnSpc>
+              <a:spcBef>
+                <a:spcPts val="0"/>
+              </a:spcBef>
+              <a:spcAft>
+                <a:spcPts val="1800"/>
+              </a:spcAft>
+            </a:pPr>
+            <a:r>
+              <a:rPr sz="4000" b="0" i="0">
+                <a:solidFill>
+                  <a:srgbClr val="FFFFFF"/>
+                </a:solidFill>
+                <a:latin typeface="Inknut Antiqua"/>
+              </a:rPr>
+              <a:t>un dominio propio</a:t>
+            </a:r>
+          </a:p>
+          <a:p>
+            <a:pPr>
+              <a:lnSpc>
+                <a:spcPct val="140000"/>
+              </a:lnSpc>
+              <a:spcBef>
+                <a:spcPts val="0"/>
+              </a:spcBef>
+              <a:spcAft>
                 <a:spcPts val="600"/>
               </a:spcAft>
             </a:pPr>
             <a:r>
-              <a:rPr sz="1000" b="0" i="0" spc="300">
-                <a:solidFill>
-                  <a:srgbClr val="8A8A8A"/>
-                </a:solidFill>
-                <a:latin typeface="Menlo"/>
-              </a:rPr>
-              <a:t>01:00</a:t>
-            </a:r>
-          </a:p>
-        </p:txBody>
-      </p:sp>
-      <p:sp>
-        <p:nvSpPr>
-          <p:cNvPr id="4" name="Rectangle 3"/>
-          <p:cNvSpPr/>
-          <p:nvPr/>
-        </p:nvSpPr>
-        <p:spPr>
-          <a:xfrm>
-            <a:off x="777240" y="1161288"/>
-            <a:ext cx="10637215" cy="9525"/>
-          </a:xfrm>
-          <a:prstGeom prst="rect">
-            <a:avLst/>
-          </a:prstGeom>
-          <a:solidFill>
-            <a:srgbClr val="D8D8D8"/>
-          </a:solidFill>
-          <a:ln>
-            <a:noFill/>
-          </a:ln>
-          <a:effectLst/>
-        </p:spPr>
-        <p:style>
-          <a:lnRef idx="1">
-            <a:schemeClr val="accent1"/>
-          </a:lnRef>
-          <a:fillRef idx="3">
-            <a:schemeClr val="accent1"/>
-          </a:fillRef>
-          <a:effectRef idx="2">
-            <a:schemeClr val="accent1"/>
-          </a:effectRef>
-          <a:fontRef idx="minor">
-            <a:schemeClr val="lt1"/>
-          </a:fontRef>
-        </p:style>
-        <p:txBody>
-          <a:bodyPr rtlCol="0" anchor="ctr"/>
-          <a:lstStyle/>
-          <a:p>
-            <a:pPr algn="ctr"/>
-          </a:p>
-        </p:txBody>
-      </p:sp>
-      <p:sp>
-        <p:nvSpPr>
-          <p:cNvPr id="5" name="TextBox 4"/>
-          <p:cNvSpPr txBox="1"/>
-          <p:nvPr/>
-        </p:nvSpPr>
-        <p:spPr>
-          <a:xfrm>
-            <a:off x="777240" y="1417320"/>
-            <a:ext cx="10637215" cy="822960"/>
-          </a:xfrm>
-          <a:prstGeom prst="rect">
-            <a:avLst/>
-          </a:prstGeom>
-          <a:noFill/>
-        </p:spPr>
-        <p:txBody>
-          <a:bodyPr wrap="square" lIns="0" rIns="0" tIns="0" bIns="0">
-            <a:spAutoFit/>
-          </a:bodyPr>
-          <a:lstStyle/>
-          <a:p>
-            <a:pPr>
-              <a:lnSpc>
-                <a:spcPct val="112000"/>
-              </a:lnSpc>
-              <a:spcBef>
-                <a:spcPts val="0"/>
-              </a:spcBef>
-              <a:spcAft>
-                <a:spcPts val="600"/>
-              </a:spcAft>
-            </a:pPr>
-            <a:r>
-              <a:rPr sz="2700" b="0" i="0">
-                <a:solidFill>
-                  <a:srgbClr val="0A0A0A"/>
-                </a:solidFill>
-                <a:latin typeface="Inknut Antiqua"/>
-              </a:rPr>
-              <a:t>si quieres tunombre.com</a:t>
-            </a:r>
-          </a:p>
-        </p:txBody>
-      </p:sp>
-      <p:sp>
-        <p:nvSpPr>
-          <p:cNvPr id="6" name="TextBox 5"/>
-          <p:cNvSpPr txBox="1"/>
-          <p:nvPr/>
-        </p:nvSpPr>
-        <p:spPr>
-          <a:xfrm>
-            <a:off x="777240" y="2057400"/>
-            <a:ext cx="10637215" cy="4251960"/>
-          </a:xfrm>
-          <a:prstGeom prst="rect">
-            <a:avLst/>
-          </a:prstGeom>
-          <a:noFill/>
-        </p:spPr>
-        <p:txBody>
-          <a:bodyPr wrap="square" lIns="0" rIns="0" tIns="0" bIns="0">
-            <a:spAutoFit/>
-          </a:bodyPr>
-          <a:lstStyle/>
-          <a:p>
-            <a:pPr>
-              <a:lnSpc>
-                <a:spcPct val="140000"/>
-              </a:lnSpc>
-              <a:spcBef>
-                <a:spcPts val="0"/>
-              </a:spcBef>
-              <a:spcAft>
-                <a:spcPts val="500"/>
-              </a:spcAft>
-            </a:pPr>
-            <a:r>
-              <a:rPr sz="1450" b="0" i="0">
-                <a:solidFill>
-                  <a:srgbClr val="444444"/>
+              <a:rPr sz="1700" b="0" i="0">
+                <a:solidFill>
+                  <a:srgbClr val="BBBBBB"/>
                 </a:solidFill>
                 <a:latin typeface="Iowan Old Style"/>
               </a:rPr>
-              <a:t>·  Se compra aparte: entre 10 y 15 € al año en Porkbun, Namecheap o Gandi.</a:t>
-            </a:r>
-          </a:p>
-          <a:p>
-            <a:pPr>
-              <a:lnSpc>
-                <a:spcPct val="140000"/>
-              </a:lnSpc>
-              <a:spcBef>
-                <a:spcPts val="0"/>
-              </a:spcBef>
-              <a:spcAft>
-                <a:spcPts val="500"/>
-              </a:spcAft>
-            </a:pPr>
-            <a:r>
-              <a:rPr sz="1450" b="0" i="0">
-                <a:solidFill>
-                  <a:srgbClr val="444444"/>
-                </a:solidFill>
-                <a:latin typeface="Iowan Old Style"/>
-              </a:rPr>
-              <a:t>·  Se conecta desde los ajustes del dominio, apuntándolo a GitHub.</a:t>
-            </a:r>
-          </a:p>
-          <a:p>
-            <a:pPr>
-              <a:lnSpc>
-                <a:spcPct val="140000"/>
-              </a:lnSpc>
-              <a:spcBef>
-                <a:spcPts val="0"/>
-              </a:spcBef>
-              <a:spcAft>
-                <a:spcPts val="500"/>
-              </a:spcAft>
-            </a:pPr>
-            <a:r>
-              <a:rPr sz="1450" b="0" i="0">
-                <a:solidFill>
-                  <a:srgbClr val="444444"/>
-                </a:solidFill>
-                <a:latin typeface="Iowan Old Style"/>
-              </a:rPr>
-              <a:t>·  Evita los que regalan el primer año y multiplican el precio del segundo.</a:t>
-            </a:r>
-          </a:p>
-          <a:p>
-            <a:pPr>
-              <a:lnSpc>
-                <a:spcPct val="140000"/>
-              </a:lnSpc>
-              <a:spcBef>
-                <a:spcPts val="0"/>
-              </a:spcBef>
-              <a:spcAft>
-                <a:spcPts val="500"/>
-              </a:spcAft>
-            </a:pPr>
-            <a:r>
-              <a:rPr sz="1450" b="0" i="0">
-                <a:solidFill>
-                  <a:srgbClr val="444444"/>
-                </a:solidFill>
-                <a:latin typeface="Iowan Old Style"/>
-              </a:rPr>
-              <a:t>·  La dirección de GitHub sigue funcionando igual, y es gratis para siempre.</a:t>
-            </a:r>
-          </a:p>
-          <a:p>
-            <a:pPr>
-              <a:lnSpc>
-                <a:spcPct val="125000"/>
-              </a:lnSpc>
-              <a:spcBef>
-                <a:spcPts val="1000"/>
-              </a:spcBef>
-              <a:spcAft>
-                <a:spcPts val="300"/>
-              </a:spcAft>
-            </a:pPr>
-            <a:r>
-              <a:rPr sz="1000" b="0" i="0" spc="300">
-                <a:solidFill>
-                  <a:srgbClr val="8A8A8A"/>
-                </a:solidFill>
-                <a:latin typeface="Menlo"/>
-              </a:rPr>
-              <a:t>HOY NO COMPRAMOS NADA</a:t>
-            </a:r>
-          </a:p>
-          <a:p>
-            <a:pPr>
-              <a:lnSpc>
-                <a:spcPct val="140000"/>
-              </a:lnSpc>
-              <a:spcBef>
-                <a:spcPts val="0"/>
-              </a:spcBef>
-              <a:spcAft>
-                <a:spcPts val="800"/>
-              </a:spcAft>
-            </a:pPr>
-            <a:r>
-              <a:rPr sz="1400" b="0" i="0">
-                <a:solidFill>
-                  <a:srgbClr val="444444"/>
-                </a:solidFill>
-                <a:latin typeface="Iowan Old Style"/>
-              </a:rPr>
-              <a:t>Nadie mete su tarjeta con catorce personas mirando. Esto se hace en casa, con calma.</a:t>
+              <a:t>Opcional, cuesta unos 12 € al año, y hay una regla que ya sabes.</a:t>
             </a:r>
           </a:p>
         </p:txBody>
@@ -5098,7 +5144,7 @@
             <a:avLst/>
           </a:prstGeom>
           <a:solidFill>
-            <a:srgbClr val="0A0A0A"/>
+            <a:srgbClr val="FFFFFF"/>
           </a:solidFill>
           <a:ln>
             <a:noFill/>
@@ -5135,8 +5181,8 @@
         </p:nvSpPr>
         <p:spPr>
           <a:xfrm>
-            <a:off x="777240" y="2103120"/>
-            <a:ext cx="10637215" cy="2926080"/>
+            <a:off x="777240" y="310896"/>
+            <a:ext cx="10637215" cy="219456"/>
           </a:xfrm>
           <a:prstGeom prst="rect">
             <a:avLst/>
@@ -5157,41 +5203,176 @@
                 <a:spcPts val="0"/>
               </a:spcBef>
               <a:spcAft>
-                <a:spcPts val="2000"/>
-              </a:spcAft>
-            </a:pPr>
-            <a:r>
-              <a:rPr sz="1100" b="0" i="0" spc="300">
+                <a:spcPts val="600"/>
+              </a:spcAft>
+            </a:pPr>
+            <a:r>
+              <a:rPr sz="950" b="0" i="0" spc="800">
                 <a:solidFill>
                   <a:srgbClr val="8A8A8A"/>
                 </a:solidFill>
                 <a:latin typeface="Menlo"/>
               </a:rPr>
-              <a:t>01:20 · 15 MINUTOS</a:t>
-            </a:r>
-          </a:p>
-          <a:p>
-            <a:pPr>
-              <a:lnSpc>
-                <a:spcPct val="110000"/>
-              </a:lnSpc>
-              <a:spcBef>
-                <a:spcPts val="0"/>
-              </a:spcBef>
-              <a:spcAft>
-                <a:spcPts val="1800"/>
-              </a:spcAft>
-            </a:pPr>
-            <a:r>
-              <a:rPr sz="4000" b="0" i="0">
-                <a:solidFill>
-                  <a:srgbClr val="FFFFFF"/>
+              <a:t>TEORÍA</a:t>
+            </a:r>
+          </a:p>
+        </p:txBody>
+      </p:sp>
+      <p:sp>
+        <p:nvSpPr>
+          <p:cNvPr id="4" name="TextBox 3"/>
+          <p:cNvSpPr txBox="1"/>
+          <p:nvPr/>
+        </p:nvSpPr>
+        <p:spPr>
+          <a:xfrm>
+            <a:off x="777240" y="777240"/>
+            <a:ext cx="10637215" cy="274320"/>
+          </a:xfrm>
+          <a:prstGeom prst="rect">
+            <a:avLst/>
+          </a:prstGeom>
+          <a:noFill/>
+        </p:spPr>
+        <p:txBody>
+          <a:bodyPr wrap="square" lIns="0" rIns="0" tIns="0" bIns="0">
+            <a:spAutoFit/>
+          </a:bodyPr>
+          <a:lstStyle/>
+          <a:p>
+            <a:pPr>
+              <a:lnSpc>
+                <a:spcPct val="125000"/>
+              </a:lnSpc>
+              <a:spcBef>
+                <a:spcPts val="0"/>
+              </a:spcBef>
+              <a:spcAft>
+                <a:spcPts val="600"/>
+              </a:spcAft>
+            </a:pPr>
+            <a:r>
+              <a:rPr sz="1000" b="0" i="0" spc="300">
+                <a:solidFill>
+                  <a:srgbClr val="8A8A8A"/>
+                </a:solidFill>
+                <a:latin typeface="Menlo"/>
+              </a:rPr>
+              <a:t>01:00</a:t>
+            </a:r>
+          </a:p>
+        </p:txBody>
+      </p:sp>
+      <p:sp>
+        <p:nvSpPr>
+          <p:cNvPr id="5" name="Rectangle 4"/>
+          <p:cNvSpPr/>
+          <p:nvPr/>
+        </p:nvSpPr>
+        <p:spPr>
+          <a:xfrm>
+            <a:off x="777240" y="1161288"/>
+            <a:ext cx="10637215" cy="9525"/>
+          </a:xfrm>
+          <a:prstGeom prst="rect">
+            <a:avLst/>
+          </a:prstGeom>
+          <a:solidFill>
+            <a:srgbClr val="D8D8D8"/>
+          </a:solidFill>
+          <a:ln>
+            <a:noFill/>
+          </a:ln>
+          <a:effectLst/>
+        </p:spPr>
+        <p:style>
+          <a:lnRef idx="1">
+            <a:schemeClr val="accent1"/>
+          </a:lnRef>
+          <a:fillRef idx="3">
+            <a:schemeClr val="accent1"/>
+          </a:fillRef>
+          <a:effectRef idx="2">
+            <a:schemeClr val="accent1"/>
+          </a:effectRef>
+          <a:fontRef idx="minor">
+            <a:schemeClr val="lt1"/>
+          </a:fontRef>
+        </p:style>
+        <p:txBody>
+          <a:bodyPr rtlCol="0" anchor="ctr"/>
+          <a:lstStyle/>
+          <a:p>
+            <a:pPr algn="ctr"/>
+          </a:p>
+        </p:txBody>
+      </p:sp>
+      <p:sp>
+        <p:nvSpPr>
+          <p:cNvPr id="6" name="TextBox 5"/>
+          <p:cNvSpPr txBox="1"/>
+          <p:nvPr/>
+        </p:nvSpPr>
+        <p:spPr>
+          <a:xfrm>
+            <a:off x="777240" y="1417320"/>
+            <a:ext cx="10637215" cy="822960"/>
+          </a:xfrm>
+          <a:prstGeom prst="rect">
+            <a:avLst/>
+          </a:prstGeom>
+          <a:noFill/>
+        </p:spPr>
+        <p:txBody>
+          <a:bodyPr wrap="square" lIns="0" rIns="0" tIns="0" bIns="0">
+            <a:spAutoFit/>
+          </a:bodyPr>
+          <a:lstStyle/>
+          <a:p>
+            <a:pPr>
+              <a:lnSpc>
+                <a:spcPct val="112000"/>
+              </a:lnSpc>
+              <a:spcBef>
+                <a:spcPts val="0"/>
+              </a:spcBef>
+              <a:spcAft>
+                <a:spcPts val="600"/>
+              </a:spcAft>
+            </a:pPr>
+            <a:r>
+              <a:rPr sz="2700" b="0" i="0">
+                <a:solidFill>
+                  <a:srgbClr val="0A0A0A"/>
                 </a:solidFill>
                 <a:latin typeface="Inknut Antiqua"/>
               </a:rPr>
-              <a:t>pausa</a:t>
-            </a:r>
-          </a:p>
+              <a:t>si quieres tunombre.com</a:t>
+            </a:r>
+          </a:p>
+        </p:txBody>
+      </p:sp>
+      <p:sp>
+        <p:nvSpPr>
+          <p:cNvPr id="7" name="TextBox 6"/>
+          <p:cNvSpPr txBox="1"/>
+          <p:nvPr/>
+        </p:nvSpPr>
+        <p:spPr>
+          <a:xfrm>
+            <a:off x="777240" y="2057400"/>
+            <a:ext cx="10637215" cy="4251960"/>
+          </a:xfrm>
+          <a:prstGeom prst="rect">
+            <a:avLst/>
+          </a:prstGeom>
+          <a:noFill/>
+        </p:spPr>
+        <p:txBody>
+          <a:bodyPr wrap="square" lIns="0" rIns="0" tIns="0" bIns="0">
+            <a:spAutoFit/>
+          </a:bodyPr>
+          <a:lstStyle/>
           <a:p>
             <a:pPr>
               <a:lnSpc>
@@ -5201,17 +5382,127 @@
                 <a:spcPts val="0"/>
               </a:spcBef>
               <a:spcAft>
-                <a:spcPts val="600"/>
-              </a:spcAft>
-            </a:pPr>
-            <a:r>
-              <a:rPr sz="1700" b="0" i="0">
-                <a:solidFill>
-                  <a:srgbClr val="BBBBBB"/>
+                <a:spcPts val="500"/>
+              </a:spcAft>
+            </a:pPr>
+            <a:r>
+              <a:rPr sz="1450" b="0" i="0">
+                <a:solidFill>
+                  <a:srgbClr val="444444"/>
                 </a:solidFill>
                 <a:latin typeface="Iowan Old Style"/>
               </a:rPr>
-              <a:t>Después viene la parte importante del día.</a:t>
+              <a:t>·  Se compra aparte: entre 10 y 15 € al año en Porkbun, Namecheap o Gandi.</a:t>
+            </a:r>
+          </a:p>
+          <a:p>
+            <a:pPr>
+              <a:lnSpc>
+                <a:spcPct val="140000"/>
+              </a:lnSpc>
+              <a:spcBef>
+                <a:spcPts val="0"/>
+              </a:spcBef>
+              <a:spcAft>
+                <a:spcPts val="500"/>
+              </a:spcAft>
+            </a:pPr>
+            <a:r>
+              <a:rPr sz="1450" b="0" i="0">
+                <a:solidFill>
+                  <a:srgbClr val="444444"/>
+                </a:solidFill>
+                <a:latin typeface="Iowan Old Style"/>
+              </a:rPr>
+              <a:t>·  Se conecta desde los ajustes del dominio, apuntándolo a GitHub.</a:t>
+            </a:r>
+          </a:p>
+          <a:p>
+            <a:pPr>
+              <a:lnSpc>
+                <a:spcPct val="140000"/>
+              </a:lnSpc>
+              <a:spcBef>
+                <a:spcPts val="0"/>
+              </a:spcBef>
+              <a:spcAft>
+                <a:spcPts val="500"/>
+              </a:spcAft>
+            </a:pPr>
+            <a:r>
+              <a:rPr sz="1450" b="0" i="0">
+                <a:solidFill>
+                  <a:srgbClr val="444444"/>
+                </a:solidFill>
+                <a:latin typeface="Iowan Old Style"/>
+              </a:rPr>
+              <a:t>·  Evita los que regalan el primer año y multiplican el precio del segundo.</a:t>
+            </a:r>
+          </a:p>
+          <a:p>
+            <a:pPr>
+              <a:lnSpc>
+                <a:spcPct val="140000"/>
+              </a:lnSpc>
+              <a:spcBef>
+                <a:spcPts val="0"/>
+              </a:spcBef>
+              <a:spcAft>
+                <a:spcPts val="500"/>
+              </a:spcAft>
+            </a:pPr>
+            <a:r>
+              <a:rPr sz="1450" b="0" i="0">
+                <a:solidFill>
+                  <a:srgbClr val="444444"/>
+                </a:solidFill>
+                <a:latin typeface="Iowan Old Style"/>
+              </a:rPr>
+              <a:t>·  La dirección de GitHub sigue funcionando igual, y es gratis para siempre.</a:t>
+            </a:r>
+          </a:p>
+          <a:p>
+            <a:pPr>
+              <a:lnSpc>
+                <a:spcPct val="125000"/>
+              </a:lnSpc>
+              <a:spcBef>
+                <a:spcPts val="1000"/>
+              </a:spcBef>
+              <a:spcAft>
+                <a:spcPts val="300"/>
+              </a:spcAft>
+            </a:pPr>
+            <a:r>
+              <a:rPr sz="1000" b="0" i="0" spc="300">
+                <a:solidFill>
+                  <a:srgbClr val="8A8A8A"/>
+                </a:solidFill>
+                <a:latin typeface="Menlo"/>
+              </a:rPr>
+              <a:t>HOY NO COMPRAMOS NADA</a:t>
+            </a:r>
+          </a:p>
+          <a:p>
+            <a:pPr>
+              <a:lnSpc>
+                <a:spcPct val="140000"/>
+              </a:lnSpc>
+              <a:spcBef>
+                <a:spcPts val="0"/>
+              </a:spcBef>
+              <a:spcAft>
+                <a:spcPts val="800"/>
+              </a:spcAft>
+            </a:pPr>
+            <a:r>
+              <a:rPr sz="1400" b="0" i="0">
+                <a:solidFill>
+                  <a:srgbClr val="444444"/>
+                </a:solidFill>
+                <a:latin typeface="Iowan Old Style"/>
+              </a:rPr>
+              <a:t>Nadie mete su tarjeta con catorce personas mirando. Esto se hace en casa, con calma.</a:t>
             </a:r>
           </a:p>
         </p:txBody>
@@ -5286,8 +5577,8 @@
         </p:nvSpPr>
         <p:spPr>
           <a:xfrm>
-            <a:off x="777240" y="2103120"/>
-            <a:ext cx="10637215" cy="2926080"/>
+            <a:off x="777240" y="1920240"/>
+            <a:ext cx="10637215" cy="3108960"/>
           </a:xfrm>
           <a:prstGeom prst="rect">
             <a:avLst/>
@@ -5318,7 +5609,7 @@
                 </a:solidFill>
                 <a:latin typeface="Menlo"/>
               </a:rPr>
-              <a:t>01:35 · 40 MINUTOS</a:t>
+              <a:t>01:20 · 15 MINUTOS</a:t>
             </a:r>
           </a:p>
           <a:p>
@@ -5340,7 +5631,7 @@
                 </a:solidFill>
                 <a:latin typeface="Inknut Antiqua"/>
               </a:rPr>
-              <a:t>actualizar tu web</a:t>
+              <a:t>pausa</a:t>
             </a:r>
           </a:p>
           <a:p>
@@ -5362,7 +5653,7 @@
                 </a:solidFill>
                 <a:latin typeface="Iowan Old Style"/>
               </a:rPr>
-              <a:t>El ciclo que hace que la web sea tuya de verdad. Lo hace cada una, entera, sola.</a:t>
+              <a:t>Después viene la parte importante del día.</a:t>
             </a:r>
           </a:p>
         </p:txBody>
@@ -5400,7 +5691,7 @@
             <a:avLst/>
           </a:prstGeom>
           <a:solidFill>
-            <a:srgbClr val="FFFFFF"/>
+            <a:srgbClr val="0A0A0A"/>
           </a:solidFill>
           <a:ln>
             <a:noFill/>
@@ -5437,8 +5728,8 @@
         </p:nvSpPr>
         <p:spPr>
           <a:xfrm>
-            <a:off x="777240" y="777240"/>
-            <a:ext cx="10637215" cy="274320"/>
+            <a:off x="777240" y="1920240"/>
+            <a:ext cx="10637215" cy="3108960"/>
           </a:xfrm>
           <a:prstGeom prst="rect">
             <a:avLst/>
@@ -5459,195 +5750,83 @@
                 <a:spcPts val="0"/>
               </a:spcBef>
               <a:spcAft>
+                <a:spcPts val="1400"/>
+              </a:spcAft>
+            </a:pPr>
+            <a:r>
+              <a:rPr sz="1200" b="0" i="0" spc="600">
+                <a:solidFill>
+                  <a:srgbClr val="8A8A8A"/>
+                </a:solidFill>
+                <a:latin typeface="Menlo"/>
+              </a:rPr>
+              <a:t>TEORÍA · LO EXPLICO YO</a:t>
+            </a:r>
+          </a:p>
+          <a:p>
+            <a:pPr>
+              <a:lnSpc>
+                <a:spcPct val="125000"/>
+              </a:lnSpc>
+              <a:spcBef>
+                <a:spcPts val="0"/>
+              </a:spcBef>
+              <a:spcAft>
+                <a:spcPts val="2000"/>
+              </a:spcAft>
+            </a:pPr>
+            <a:r>
+              <a:rPr sz="1100" b="0" i="0" spc="300">
+                <a:solidFill>
+                  <a:srgbClr val="8A8A8A"/>
+                </a:solidFill>
+                <a:latin typeface="Menlo"/>
+              </a:rPr>
+              <a:t>01:35 · 40 MINUTOS</a:t>
+            </a:r>
+          </a:p>
+          <a:p>
+            <a:pPr>
+              <a:lnSpc>
+                <a:spcPct val="110000"/>
+              </a:lnSpc>
+              <a:spcBef>
+                <a:spcPts val="0"/>
+              </a:spcBef>
+              <a:spcAft>
+                <a:spcPts val="1800"/>
+              </a:spcAft>
+            </a:pPr>
+            <a:r>
+              <a:rPr sz="4000" b="0" i="0">
+                <a:solidFill>
+                  <a:srgbClr val="FFFFFF"/>
+                </a:solidFill>
+                <a:latin typeface="Inknut Antiqua"/>
+              </a:rPr>
+              <a:t>actualizar tu web</a:t>
+            </a:r>
+          </a:p>
+          <a:p>
+            <a:pPr>
+              <a:lnSpc>
+                <a:spcPct val="140000"/>
+              </a:lnSpc>
+              <a:spcBef>
+                <a:spcPts val="0"/>
+              </a:spcBef>
+              <a:spcAft>
                 <a:spcPts val="600"/>
               </a:spcAft>
             </a:pPr>
             <a:r>
-              <a:rPr sz="1000" b="0" i="0" spc="300">
-                <a:solidFill>
-                  <a:srgbClr val="8A8A8A"/>
-                </a:solidFill>
-                <a:latin typeface="Menlo"/>
-              </a:rPr>
-              <a:t>01:35</a:t>
-            </a:r>
-          </a:p>
-        </p:txBody>
-      </p:sp>
-      <p:sp>
-        <p:nvSpPr>
-          <p:cNvPr id="4" name="Rectangle 3"/>
-          <p:cNvSpPr/>
-          <p:nvPr/>
-        </p:nvSpPr>
-        <p:spPr>
-          <a:xfrm>
-            <a:off x="777240" y="1161288"/>
-            <a:ext cx="10637215" cy="9525"/>
-          </a:xfrm>
-          <a:prstGeom prst="rect">
-            <a:avLst/>
-          </a:prstGeom>
-          <a:solidFill>
-            <a:srgbClr val="D8D8D8"/>
-          </a:solidFill>
-          <a:ln>
-            <a:noFill/>
-          </a:ln>
-          <a:effectLst/>
-        </p:spPr>
-        <p:style>
-          <a:lnRef idx="1">
-            <a:schemeClr val="accent1"/>
-          </a:lnRef>
-          <a:fillRef idx="3">
-            <a:schemeClr val="accent1"/>
-          </a:fillRef>
-          <a:effectRef idx="2">
-            <a:schemeClr val="accent1"/>
-          </a:effectRef>
-          <a:fontRef idx="minor">
-            <a:schemeClr val="lt1"/>
-          </a:fontRef>
-        </p:style>
-        <p:txBody>
-          <a:bodyPr rtlCol="0" anchor="ctr"/>
-          <a:lstStyle/>
-          <a:p>
-            <a:pPr algn="ctr"/>
-          </a:p>
-        </p:txBody>
-      </p:sp>
-      <p:sp>
-        <p:nvSpPr>
-          <p:cNvPr id="5" name="TextBox 4"/>
-          <p:cNvSpPr txBox="1"/>
-          <p:nvPr/>
-        </p:nvSpPr>
-        <p:spPr>
-          <a:xfrm>
-            <a:off x="777240" y="1417320"/>
-            <a:ext cx="10637215" cy="822960"/>
-          </a:xfrm>
-          <a:prstGeom prst="rect">
-            <a:avLst/>
-          </a:prstGeom>
-          <a:noFill/>
-        </p:spPr>
-        <p:txBody>
-          <a:bodyPr wrap="square" lIns="0" rIns="0" tIns="0" bIns="0">
-            <a:spAutoFit/>
-          </a:bodyPr>
-          <a:lstStyle/>
-          <a:p>
-            <a:pPr>
-              <a:lnSpc>
-                <a:spcPct val="112000"/>
-              </a:lnSpc>
-              <a:spcBef>
-                <a:spcPts val="0"/>
-              </a:spcBef>
-              <a:spcAft>
-                <a:spcPts val="600"/>
-              </a:spcAft>
-            </a:pPr>
-            <a:r>
-              <a:rPr sz="2700" b="0" i="0">
-                <a:solidFill>
-                  <a:srgbClr val="0A0A0A"/>
-                </a:solidFill>
-                <a:latin typeface="Inknut Antiqua"/>
-              </a:rPr>
-              <a:t>el ciclo, siempre igual</a:t>
-            </a:r>
-          </a:p>
-        </p:txBody>
-      </p:sp>
-      <p:sp>
-        <p:nvSpPr>
-          <p:cNvPr id="6" name="TextBox 5"/>
-          <p:cNvSpPr txBox="1"/>
-          <p:nvPr/>
-        </p:nvSpPr>
-        <p:spPr>
-          <a:xfrm>
-            <a:off x="777240" y="2057400"/>
-            <a:ext cx="10637215" cy="4251960"/>
-          </a:xfrm>
-          <a:prstGeom prst="rect">
-            <a:avLst/>
-          </a:prstGeom>
-          <a:noFill/>
-        </p:spPr>
-        <p:txBody>
-          <a:bodyPr wrap="square" lIns="0" rIns="0" tIns="0" bIns="0">
-            <a:spAutoFit/>
-          </a:bodyPr>
-          <a:lstStyle/>
-          <a:p>
-            <a:pPr>
-              <a:lnSpc>
-                <a:spcPct val="142000"/>
-              </a:lnSpc>
-              <a:spcBef>
-                <a:spcPts val="0"/>
-              </a:spcBef>
-              <a:spcAft>
-                <a:spcPts val="900"/>
-              </a:spcAft>
-            </a:pPr>
-            <a:r>
-              <a:rPr sz="1500" b="0" i="0">
-                <a:solidFill>
-                  <a:srgbClr val="444444"/>
+              <a:rPr sz="1700" b="0" i="0">
+                <a:solidFill>
+                  <a:srgbClr val="BBBBBB"/>
                 </a:solidFill>
                 <a:latin typeface="Iowan Old Style"/>
               </a:rPr>
-              <a:t>Subir un archivo cambiado: Add file → Upload files → arrastras el nuevo encima del viejo → Commit changes.</a:t>
-            </a:r>
-          </a:p>
-          <a:p>
-            <a:pPr>
-              <a:lnSpc>
-                <a:spcPct val="125000"/>
-              </a:lnSpc>
-              <a:spcBef>
-                <a:spcPts val="1000"/>
-              </a:spcBef>
-              <a:spcAft>
-                <a:spcPts val="300"/>
-              </a:spcAft>
-            </a:pPr>
-            <a:r>
-              <a:rPr sz="1000" b="0" i="0" spc="300">
-                <a:solidFill>
-                  <a:srgbClr val="887000"/>
-                </a:solidFill>
-                <a:latin typeface="Menlo"/>
-              </a:rPr>
-              <a:t>LAS DOS COSTUMBRES</a:t>
-            </a:r>
-          </a:p>
-          <a:p>
-            <a:pPr>
-              <a:lnSpc>
-                <a:spcPct val="140000"/>
-              </a:lnSpc>
-              <a:spcBef>
-                <a:spcPts val="0"/>
-              </a:spcBef>
-              <a:spcAft>
-                <a:spcPts val="800"/>
-              </a:spcAft>
-            </a:pPr>
-            <a:r>
-              <a:rPr sz="1400" b="1" i="0">
-                <a:solidFill>
-                  <a:srgbClr val="0A0A0A"/>
-                </a:solidFill>
-                <a:latin typeface="Iowan Old Style"/>
-              </a:rPr>
-              <a:t>Comprueba en local antes de subir. Siempre. Así lo que se rompe se rompe en tu ordenador y no delante de todo el mundo. Copia de la carpeta antes de cambios grandes, con la fecha en el nombre. Es la manera más simple de poder volver atrás.</a:t>
+              <a:t>El ciclo que hace que la web sea tuya de verdad. Lo hace cada una, entera, sola.</a:t>
             </a:r>
           </a:p>
         </p:txBody>
@@ -5722,8 +5901,8 @@
         </p:nvSpPr>
         <p:spPr>
           <a:xfrm>
-            <a:off x="777240" y="777240"/>
-            <a:ext cx="10637215" cy="274320"/>
+            <a:off x="777240" y="310896"/>
+            <a:ext cx="10637215" cy="219456"/>
           </a:xfrm>
           <a:prstGeom prst="rect">
             <a:avLst/>
@@ -5748,13 +5927,13 @@
               </a:spcAft>
             </a:pPr>
             <a:r>
-              <a:rPr sz="1000" b="0" i="0" spc="300">
+              <a:rPr sz="950" b="0" i="0" spc="800">
                 <a:solidFill>
                   <a:srgbClr val="8A8A8A"/>
                 </a:solidFill>
                 <a:latin typeface="Menlo"/>
               </a:rPr>
-              <a:t>01:35</a:t>
+              <a:t>TEORÍA</a:t>
             </a:r>
           </a:p>
         </p:txBody>
@@ -5767,8 +5946,8 @@
         </p:nvSpPr>
         <p:spPr>
           <a:xfrm>
-            <a:off x="777240" y="1188720"/>
-            <a:ext cx="10637215" cy="548640"/>
+            <a:off x="777240" y="777240"/>
+            <a:ext cx="10637215" cy="274320"/>
           </a:xfrm>
           <a:prstGeom prst="rect">
             <a:avLst/>
@@ -5793,13 +5972,13 @@
               </a:spcAft>
             </a:pPr>
             <a:r>
-              <a:rPr sz="2400" b="0" i="0">
-                <a:solidFill>
-                  <a:srgbClr val="0A0A0A"/>
-                </a:solidFill>
-                <a:latin typeface="Inknut Antiqua"/>
-              </a:rPr>
-              <a:t>el ciclo, siempre igual</a:t>
+              <a:rPr sz="1000" b="0" i="0" spc="300">
+                <a:solidFill>
+                  <a:srgbClr val="8A8A8A"/>
+                </a:solidFill>
+                <a:latin typeface="Menlo"/>
+              </a:rPr>
+              <a:t>01:35</a:t>
             </a:r>
           </a:p>
         </p:txBody>
@@ -5812,19 +5991,17 @@
         </p:nvSpPr>
         <p:spPr>
           <a:xfrm>
-            <a:off x="777240" y="1874520"/>
-            <a:ext cx="10637215" cy="1051560"/>
+            <a:off x="777240" y="1161288"/>
+            <a:ext cx="10637215" cy="9525"/>
           </a:xfrm>
           <a:prstGeom prst="rect">
             <a:avLst/>
           </a:prstGeom>
           <a:solidFill>
-            <a:srgbClr val="F6F6F3"/>
+            <a:srgbClr val="D8D8D8"/>
           </a:solidFill>
-          <a:ln w="9525">
-            <a:solidFill>
-              <a:srgbClr val="D8D8D8"/>
-            </a:solidFill>
+          <a:ln>
+            <a:noFill/>
           </a:ln>
           <a:effectLst/>
         </p:spPr>
@@ -5858,8 +6035,8 @@
         </p:nvSpPr>
         <p:spPr>
           <a:xfrm>
-            <a:off x="1033272" y="2075688"/>
-            <a:ext cx="10125151" cy="649224"/>
+            <a:off x="777240" y="1417320"/>
+            <a:ext cx="10637215" cy="822960"/>
           </a:xfrm>
           <a:prstGeom prst="rect">
             <a:avLst/>
@@ -5874,45 +6051,112 @@
           <a:p>
             <a:pPr>
               <a:lnSpc>
-                <a:spcPct val="132000"/>
-              </a:lnSpc>
-              <a:spcBef>
-                <a:spcPts val="0"/>
-              </a:spcBef>
-              <a:spcAft>
-                <a:spcPts val="0"/>
-              </a:spcAft>
-            </a:pPr>
-            <a:r>
-              <a:rPr sz="1600" b="0" i="0">
+                <a:spcPct val="112000"/>
+              </a:lnSpc>
+              <a:spcBef>
+                <a:spcPts val="0"/>
+              </a:spcBef>
+              <a:spcAft>
+                <a:spcPts val="600"/>
+              </a:spcAft>
+            </a:pPr>
+            <a:r>
+              <a:rPr sz="2700" b="0" i="0">
                 <a:solidFill>
                   <a:srgbClr val="0A0A0A"/>
                 </a:solidFill>
+                <a:latin typeface="Inknut Antiqua"/>
+              </a:rPr>
+              <a:t>el ciclo, siempre igual</a:t>
+            </a:r>
+          </a:p>
+        </p:txBody>
+      </p:sp>
+      <p:sp>
+        <p:nvSpPr>
+          <p:cNvPr id="7" name="TextBox 6"/>
+          <p:cNvSpPr txBox="1"/>
+          <p:nvPr/>
+        </p:nvSpPr>
+        <p:spPr>
+          <a:xfrm>
+            <a:off x="777240" y="2057400"/>
+            <a:ext cx="10637215" cy="4251960"/>
+          </a:xfrm>
+          <a:prstGeom prst="rect">
+            <a:avLst/>
+          </a:prstGeom>
+          <a:noFill/>
+        </p:spPr>
+        <p:txBody>
+          <a:bodyPr wrap="square" lIns="0" rIns="0" tIns="0" bIns="0">
+            <a:spAutoFit/>
+          </a:bodyPr>
+          <a:lstStyle/>
+          <a:p>
+            <a:pPr>
+              <a:lnSpc>
+                <a:spcPct val="142000"/>
+              </a:lnSpc>
+              <a:spcBef>
+                <a:spcPts val="0"/>
+              </a:spcBef>
+              <a:spcAft>
+                <a:spcPts val="900"/>
+              </a:spcAft>
+            </a:pPr>
+            <a:r>
+              <a:rPr sz="1500" b="0" i="0">
+                <a:solidFill>
+                  <a:srgbClr val="444444"/>
+                </a:solidFill>
+                <a:latin typeface="Iowan Old Style"/>
+              </a:rPr>
+              <a:t>Subir un archivo cambiado: Add file → Upload files → arrastras el nuevo encima del viejo → Commit changes.</a:t>
+            </a:r>
+          </a:p>
+          <a:p>
+            <a:pPr>
+              <a:lnSpc>
+                <a:spcPct val="125000"/>
+              </a:lnSpc>
+              <a:spcBef>
+                <a:spcPts val="1000"/>
+              </a:spcBef>
+              <a:spcAft>
+                <a:spcPts val="300"/>
+              </a:spcAft>
+            </a:pPr>
+            <a:r>
+              <a:rPr sz="1000" b="0" i="0" spc="300">
+                <a:solidFill>
+                  <a:srgbClr val="887000"/>
+                </a:solidFill>
                 <a:latin typeface="Menlo"/>
               </a:rPr>
-              <a:t>1  Editas          2  Guardas y miras     3  Subes           4  Un minuto</a:t>
-            </a:r>
-          </a:p>
-          <a:p>
-            <a:pPr>
-              <a:lnSpc>
-                <a:spcPct val="132000"/>
-              </a:lnSpc>
-              <a:spcBef>
-                <a:spcPts val="0"/>
-              </a:spcBef>
-              <a:spcAft>
-                <a:spcPts val="0"/>
-              </a:spcAft>
-            </a:pPr>
-            <a:r>
-              <a:rPr sz="1600" b="0" i="0">
+              <a:t>LAS DOS COSTUMBRES</a:t>
+            </a:r>
+          </a:p>
+          <a:p>
+            <a:pPr>
+              <a:lnSpc>
+                <a:spcPct val="140000"/>
+              </a:lnSpc>
+              <a:spcBef>
+                <a:spcPts val="0"/>
+              </a:spcBef>
+              <a:spcAft>
+                <a:spcPts val="800"/>
+              </a:spcAft>
+            </a:pPr>
+            <a:r>
+              <a:rPr sz="1400" b="1" i="0">
                 <a:solidFill>
                   <a:srgbClr val="0A0A0A"/>
                 </a:solidFill>
-                <a:latin typeface="Menlo"/>
-              </a:rPr>
-              <a:t>   en VS Code   →     en local         →     a GitHub     →     y está online</a:t>
+                <a:latin typeface="Iowan Old Style"/>
+              </a:rPr>
+              <a:t>Comprueba en local antes de subir. Siempre. Así lo que se rompe se rompe en tu ordenador y no delante de todo el mundo. Copia de la carpeta antes de cambios grandes, con la fecha en el nombre. Es la manera más simple de poder volver atrás.</a:t>
             </a:r>
           </a:p>
         </p:txBody>
@@ -5950,7 +6194,7 @@
             <a:avLst/>
           </a:prstGeom>
           <a:solidFill>
-            <a:srgbClr val="FAFAFA"/>
+            <a:srgbClr val="FFFFFF"/>
           </a:solidFill>
           <a:ln>
             <a:noFill/>
@@ -6019,30 +6263,77 @@
                 </a:solidFill>
                 <a:latin typeface="Menlo"/>
               </a:rPr>
-              <a:t>EJERCICIO 7   ·   30 MIN · EL MÁS IMPORTANTE DEL TALLER</a:t>
-            </a:r>
-          </a:p>
-        </p:txBody>
-      </p:sp>
-      <p:sp>
-        <p:nvSpPr>
-          <p:cNvPr id="4" name="Rectangle 3"/>
+              <a:t>01:35</a:t>
+            </a:r>
+          </a:p>
+        </p:txBody>
+      </p:sp>
+      <p:sp>
+        <p:nvSpPr>
+          <p:cNvPr id="4" name="TextBox 3"/>
+          <p:cNvSpPr txBox="1"/>
+          <p:nvPr/>
+        </p:nvSpPr>
+        <p:spPr>
+          <a:xfrm>
+            <a:off x="777240" y="1188720"/>
+            <a:ext cx="10637215" cy="548640"/>
+          </a:xfrm>
+          <a:prstGeom prst="rect">
+            <a:avLst/>
+          </a:prstGeom>
+          <a:noFill/>
+        </p:spPr>
+        <p:txBody>
+          <a:bodyPr wrap="square" lIns="0" rIns="0" tIns="0" bIns="0">
+            <a:spAutoFit/>
+          </a:bodyPr>
+          <a:lstStyle/>
+          <a:p>
+            <a:pPr>
+              <a:lnSpc>
+                <a:spcPct val="125000"/>
+              </a:lnSpc>
+              <a:spcBef>
+                <a:spcPts val="0"/>
+              </a:spcBef>
+              <a:spcAft>
+                <a:spcPts val="600"/>
+              </a:spcAft>
+            </a:pPr>
+            <a:r>
+              <a:rPr sz="2400" b="0" i="0">
+                <a:solidFill>
+                  <a:srgbClr val="0A0A0A"/>
+                </a:solidFill>
+                <a:latin typeface="Inknut Antiqua"/>
+              </a:rPr>
+              <a:t>el ciclo, siempre igual</a:t>
+            </a:r>
+          </a:p>
+        </p:txBody>
+      </p:sp>
+      <p:sp>
+        <p:nvSpPr>
+          <p:cNvPr id="5" name="Rectangle 4"/>
           <p:cNvSpPr/>
           <p:nvPr/>
         </p:nvSpPr>
         <p:spPr>
           <a:xfrm>
-            <a:off x="777240" y="1161288"/>
-            <a:ext cx="10637215" cy="9525"/>
+            <a:off x="777240" y="1874520"/>
+            <a:ext cx="10637215" cy="1051560"/>
           </a:xfrm>
           <a:prstGeom prst="rect">
             <a:avLst/>
           </a:prstGeom>
           <a:solidFill>
-            <a:srgbClr val="D8D8D8"/>
+            <a:srgbClr val="F6F6F3"/>
           </a:solidFill>
-          <a:ln>
-            <a:noFill/>
+          <a:ln w="9525">
+            <a:solidFill>
+              <a:srgbClr val="D8D8D8"/>
+            </a:solidFill>
           </a:ln>
           <a:effectLst/>
         </p:spPr>
@@ -6070,14 +6361,14 @@
       </p:sp>
       <p:sp>
         <p:nvSpPr>
-          <p:cNvPr id="5" name="TextBox 4"/>
+          <p:cNvPr id="6" name="TextBox 5"/>
           <p:cNvSpPr txBox="1"/>
           <p:nvPr/>
         </p:nvSpPr>
         <p:spPr>
           <a:xfrm>
-            <a:off x="777240" y="1417320"/>
-            <a:ext cx="10637215" cy="822960"/>
+            <a:off x="1033272" y="2075688"/>
+            <a:ext cx="10125151" cy="649224"/>
           </a:xfrm>
           <a:prstGeom prst="rect">
             <a:avLst/>
@@ -6092,420 +6383,45 @@
           <a:p>
             <a:pPr>
               <a:lnSpc>
-                <a:spcPct val="112000"/>
-              </a:lnSpc>
-              <a:spcBef>
-                <a:spcPts val="0"/>
-              </a:spcBef>
-              <a:spcAft>
-                <a:spcPts val="600"/>
-              </a:spcAft>
-            </a:pPr>
-            <a:r>
-              <a:rPr sz="2700" b="0" i="0">
+                <a:spcPct val="132000"/>
+              </a:lnSpc>
+              <a:spcBef>
+                <a:spcPts val="0"/>
+              </a:spcBef>
+              <a:spcAft>
+                <a:spcPts val="0"/>
+              </a:spcAft>
+            </a:pPr>
+            <a:r>
+              <a:rPr sz="1600" b="0" i="0">
                 <a:solidFill>
                   <a:srgbClr val="0A0A0A"/>
                 </a:solidFill>
-                <a:latin typeface="Inknut Antiqua"/>
-              </a:rPr>
-              <a:t>cambiar algo y volver a subirlo</a:t>
-            </a:r>
-          </a:p>
-        </p:txBody>
-      </p:sp>
-      <p:sp>
-        <p:nvSpPr>
-          <p:cNvPr id="6" name="TextBox 5"/>
-          <p:cNvSpPr txBox="1"/>
-          <p:nvPr/>
-        </p:nvSpPr>
-        <p:spPr>
-          <a:xfrm>
-            <a:off x="777240" y="2057400"/>
-            <a:ext cx="10637215" cy="4251960"/>
-          </a:xfrm>
-          <a:prstGeom prst="rect">
-            <a:avLst/>
-          </a:prstGeom>
-          <a:noFill/>
-        </p:spPr>
-        <p:txBody>
-          <a:bodyPr wrap="square" lIns="0" rIns="0" tIns="0" bIns="0">
-            <a:spAutoFit/>
-          </a:bodyPr>
-          <a:lstStyle/>
-          <a:p>
-            <a:pPr>
-              <a:lnSpc>
-                <a:spcPct val="133480"/>
-              </a:lnSpc>
-              <a:spcBef>
-                <a:spcPts val="0"/>
-              </a:spcBef>
-              <a:spcAft>
-                <a:spcPts val="668"/>
-              </a:spcAft>
-            </a:pPr>
-            <a:r>
-              <a:rPr sz="1113" b="0" i="0">
-                <a:solidFill>
-                  <a:srgbClr val="444444"/>
-                </a:solidFill>
-                <a:latin typeface="Iowan Old Style"/>
-              </a:rPr>
-              <a:t>Publicar lo hace cualquiera una vez. Lo que hace que la web sea tuya es saber cambiarla dentro de seis meses. Hazlo tú sola, entera.</a:t>
-            </a:r>
-          </a:p>
-          <a:p>
-            <a:pPr>
-              <a:lnSpc>
-                <a:spcPct val="131600"/>
-              </a:lnSpc>
-              <a:spcBef>
-                <a:spcPts val="0"/>
-              </a:spcBef>
-              <a:spcAft>
-                <a:spcPts val="371"/>
-              </a:spcAft>
-            </a:pPr>
-            <a:r>
-              <a:rPr sz="1076" b="0" i="0">
-                <a:solidFill>
-                  <a:srgbClr val="444444"/>
-                </a:solidFill>
-                <a:latin typeface="Iowan Old Style"/>
-              </a:rPr>
-              <a:t>☐  En VS Code, cambia algo que se note: una frase, un color, una imagen.</a:t>
-            </a:r>
-          </a:p>
-          <a:p>
-            <a:pPr>
-              <a:lnSpc>
-                <a:spcPct val="131600"/>
-              </a:lnSpc>
-              <a:spcBef>
-                <a:spcPts val="0"/>
-              </a:spcBef>
-              <a:spcAft>
-                <a:spcPts val="371"/>
-              </a:spcAft>
-            </a:pPr>
-            <a:r>
-              <a:rPr sz="1076" b="0" i="0">
-                <a:solidFill>
-                  <a:srgbClr val="444444"/>
-                </a:solidFill>
-                <a:latin typeface="Iowan Old Style"/>
-              </a:rPr>
-              <a:t>☐  Guarda.</a:t>
-            </a:r>
-          </a:p>
-          <a:p>
-            <a:pPr>
-              <a:lnSpc>
-                <a:spcPct val="131600"/>
-              </a:lnSpc>
-              <a:spcBef>
-                <a:spcPts val="0"/>
-              </a:spcBef>
-              <a:spcAft>
-                <a:spcPts val="371"/>
-              </a:spcAft>
-            </a:pPr>
-            <a:r>
-              <a:rPr sz="1076" b="0" i="0">
-                <a:solidFill>
-                  <a:srgbClr val="444444"/>
-                </a:solidFill>
-                <a:latin typeface="Iowan Old Style"/>
-              </a:rPr>
-              <a:t>☐  Ábrelo en tu navegador en local y comprueba que está bien.</a:t>
-            </a:r>
-          </a:p>
-          <a:p>
-            <a:pPr>
-              <a:lnSpc>
-                <a:spcPct val="131600"/>
-              </a:lnSpc>
-              <a:spcBef>
-                <a:spcPts val="0"/>
-              </a:spcBef>
-              <a:spcAft>
-                <a:spcPts val="371"/>
-              </a:spcAft>
-            </a:pPr>
-            <a:r>
-              <a:rPr sz="1076" b="0" i="0">
-                <a:solidFill>
-                  <a:srgbClr val="444444"/>
-                </a:solidFill>
-                <a:latin typeface="Iowan Old Style"/>
-              </a:rPr>
-              <a:t>☐  En GitHub: Add file → Upload files.</a:t>
-            </a:r>
-          </a:p>
-          <a:p>
-            <a:pPr>
-              <a:lnSpc>
-                <a:spcPct val="131600"/>
-              </a:lnSpc>
-              <a:spcBef>
-                <a:spcPts val="0"/>
-              </a:spcBef>
-              <a:spcAft>
-                <a:spcPts val="371"/>
-              </a:spcAft>
-            </a:pPr>
-            <a:r>
-              <a:rPr sz="1076" b="0" i="0">
-                <a:solidFill>
-                  <a:srgbClr val="444444"/>
-                </a:solidFill>
-                <a:latin typeface="Iowan Old Style"/>
-              </a:rPr>
-              <a:t>☐  Arrastra el archivo cambiado encima del que ya estaba.</a:t>
-            </a:r>
-          </a:p>
-          <a:p>
-            <a:pPr>
-              <a:lnSpc>
-                <a:spcPct val="131600"/>
-              </a:lnSpc>
-              <a:spcBef>
-                <a:spcPts val="0"/>
-              </a:spcBef>
-              <a:spcAft>
-                <a:spcPts val="371"/>
-              </a:spcAft>
-            </a:pPr>
-            <a:r>
-              <a:rPr sz="1076" b="0" i="0">
-                <a:solidFill>
-                  <a:srgbClr val="444444"/>
-                </a:solidFill>
-                <a:latin typeface="Iowan Old Style"/>
-              </a:rPr>
-              <a:t>☐  Commit changes.</a:t>
-            </a:r>
-          </a:p>
-          <a:p>
-            <a:pPr>
-              <a:lnSpc>
-                <a:spcPct val="131600"/>
-              </a:lnSpc>
-              <a:spcBef>
-                <a:spcPts val="0"/>
-              </a:spcBef>
-              <a:spcAft>
-                <a:spcPts val="371"/>
-              </a:spcAft>
-            </a:pPr>
-            <a:r>
-              <a:rPr sz="1076" b="0" i="0">
-                <a:solidFill>
-                  <a:srgbClr val="444444"/>
-                </a:solidFill>
-                <a:latin typeface="Iowan Old Style"/>
-              </a:rPr>
-              <a:t>☐  Espera un minuto, recarga tu web publicada y comprueba el cambio.</a:t>
-            </a:r>
-          </a:p>
-          <a:p>
-            <a:pPr>
-              <a:lnSpc>
-                <a:spcPct val="131600"/>
-              </a:lnSpc>
-              <a:spcBef>
-                <a:spcPts val="0"/>
-              </a:spcBef>
-              <a:spcAft>
-                <a:spcPts val="371"/>
-              </a:spcAft>
-            </a:pPr>
-            <a:r>
-              <a:rPr sz="1076" b="0" i="0">
-                <a:solidFill>
-                  <a:srgbClr val="444444"/>
-                </a:solidFill>
-                <a:latin typeface="Iowan Old Style"/>
-              </a:rPr>
-              <a:t>☐  Añade un proyecto nuevo a proyectos.html.</a:t>
-            </a:r>
-          </a:p>
-          <a:p>
-            <a:pPr>
-              <a:lnSpc>
-                <a:spcPct val="131600"/>
-              </a:lnSpc>
-              <a:spcBef>
-                <a:spcPts val="0"/>
-              </a:spcBef>
-              <a:spcAft>
-                <a:spcPts val="371"/>
-              </a:spcAft>
-            </a:pPr>
-            <a:r>
-              <a:rPr sz="1076" b="0" i="0">
-                <a:solidFill>
-                  <a:srgbClr val="444444"/>
-                </a:solidFill>
-                <a:latin typeface="Iowan Old Style"/>
-              </a:rPr>
-              <a:t>☐  Súbelo tú sola, sin mirar los pasos de arriba.</a:t>
-            </a:r>
-          </a:p>
-          <a:p>
-            <a:pPr>
-              <a:lnSpc>
-                <a:spcPct val="131600"/>
-              </a:lnSpc>
-              <a:spcBef>
-                <a:spcPts val="0"/>
-              </a:spcBef>
-              <a:spcAft>
-                <a:spcPts val="371"/>
-              </a:spcAft>
-            </a:pPr>
-            <a:r>
-              <a:rPr sz="1076" b="0" i="0">
-                <a:solidFill>
-                  <a:srgbClr val="444444"/>
-                </a:solidFill>
-                <a:latin typeface="Iowan Old Style"/>
-              </a:rPr>
-              <a:t>☐  Tengo mi dirección apuntada en papel.</a:t>
-            </a:r>
-          </a:p>
-          <a:p>
-            <a:pPr>
-              <a:lnSpc>
-                <a:spcPct val="131600"/>
-              </a:lnSpc>
-              <a:spcBef>
-                <a:spcPts val="0"/>
-              </a:spcBef>
-              <a:spcAft>
-                <a:spcPts val="371"/>
-              </a:spcAft>
-            </a:pPr>
-            <a:r>
-              <a:rPr sz="1076" b="0" i="0">
-                <a:solidFill>
-                  <a:srgbClr val="444444"/>
-                </a:solidFill>
-                <a:latin typeface="Iowan Old Style"/>
-              </a:rPr>
-              <a:t>☐  Tengo la carpeta guardada en mi ordenador.</a:t>
-            </a:r>
-          </a:p>
-          <a:p>
-            <a:pPr>
-              <a:lnSpc>
-                <a:spcPct val="131600"/>
-              </a:lnSpc>
-              <a:spcBef>
-                <a:spcPts val="0"/>
-              </a:spcBef>
-              <a:spcAft>
-                <a:spcPts val="371"/>
-              </a:spcAft>
-            </a:pPr>
-            <a:r>
-              <a:rPr sz="1076" b="0" i="0">
-                <a:solidFill>
-                  <a:srgbClr val="444444"/>
-                </a:solidFill>
-                <a:latin typeface="Iowan Old Style"/>
-              </a:rPr>
-              <a:t>☐  Sé entrar en mi cuenta de GitHub.</a:t>
-            </a:r>
-          </a:p>
-          <a:p>
-            <a:pPr>
-              <a:lnSpc>
-                <a:spcPct val="131600"/>
-              </a:lnSpc>
-              <a:spcBef>
-                <a:spcPts val="0"/>
-              </a:spcBef>
-              <a:spcAft>
-                <a:spcPts val="371"/>
-              </a:spcAft>
-            </a:pPr>
-            <a:r>
-              <a:rPr sz="1076" b="0" i="0">
-                <a:solidFill>
-                  <a:srgbClr val="444444"/>
-                </a:solidFill>
-                <a:latin typeface="Iowan Old Style"/>
-              </a:rPr>
-              <a:t>☐  He hecho el ciclo completo yo sola, al menos dos veces.</a:t>
-            </a:r>
-          </a:p>
-          <a:p>
-            <a:pPr>
-              <a:lnSpc>
-                <a:spcPct val="131600"/>
-              </a:lnSpc>
-              <a:spcBef>
-                <a:spcPts val="0"/>
-              </a:spcBef>
-              <a:spcAft>
-                <a:spcPts val="371"/>
-              </a:spcAft>
-            </a:pPr>
-            <a:r>
-              <a:rPr sz="1076" b="0" i="0">
-                <a:solidFill>
-                  <a:srgbClr val="444444"/>
-                </a:solidFill>
-                <a:latin typeface="Iowan Old Style"/>
-              </a:rPr>
-              <a:t>☐  Me llevo la guía y la chuleta.</a:t>
-            </a:r>
-          </a:p>
-          <a:p>
-            <a:pPr>
-              <a:lnSpc>
-                <a:spcPct val="117500"/>
-              </a:lnSpc>
-              <a:spcBef>
-                <a:spcPts val="1000"/>
-              </a:spcBef>
-              <a:spcAft>
-                <a:spcPts val="222"/>
-              </a:spcAft>
-            </a:pPr>
-            <a:r>
-              <a:rPr sz="950" b="0" i="0" spc="300">
-                <a:solidFill>
-                  <a:srgbClr val="8A8A8A"/>
-                </a:solidFill>
                 <a:latin typeface="Menlo"/>
               </a:rPr>
-              <a:t>POR QUÉ ESTO Y NO OTRA COSA</a:t>
-            </a:r>
-          </a:p>
-          <a:p>
-            <a:pPr>
-              <a:lnSpc>
-                <a:spcPct val="131600"/>
-              </a:lnSpc>
-              <a:spcBef>
-                <a:spcPts val="0"/>
-              </a:spcBef>
-              <a:spcAft>
-                <a:spcPts val="593"/>
-              </a:spcAft>
-            </a:pPr>
-            <a:r>
-              <a:rPr sz="1039" b="0" i="0">
-                <a:solidFill>
-                  <a:srgbClr val="444444"/>
-                </a:solidFill>
-                <a:latin typeface="Iowan Old Style"/>
-              </a:rPr>
-              <a:t>Hasta que no lo has hecho sola una vez, no lo sabes hacer. Todo lo demás del taller se puede recuperar leyendo la guía; esto no.</a:t>
+              <a:t>1  Editas          2  Guardas y miras     3  Subes           4  Un minuto</a:t>
+            </a:r>
+          </a:p>
+          <a:p>
+            <a:pPr>
+              <a:lnSpc>
+                <a:spcPct val="132000"/>
+              </a:lnSpc>
+              <a:spcBef>
+                <a:spcPts val="0"/>
+              </a:spcBef>
+              <a:spcAft>
+                <a:spcPts val="0"/>
+              </a:spcAft>
+            </a:pPr>
+            <a:r>
+              <a:rPr sz="1600" b="0" i="0">
+                <a:solidFill>
+                  <a:srgbClr val="0A0A0A"/>
+                </a:solidFill>
+                <a:latin typeface="Menlo"/>
+              </a:rPr>
+              <a:t>   en VS Code   →     en local         →     a GitHub     →     y está online</a:t>
             </a:r>
           </a:p>
         </p:txBody>
@@ -6761,7 +6677,7 @@
                 </a:solidFill>
                 <a:latin typeface="Iowan Old Style"/>
               </a:rPr>
-              <a:t>publicar bien</a:t>
+              <a:t>checklist antes de publicar</a:t>
             </a:r>
             <a:r>
               <a:rPr sz="1100">
@@ -6770,7 +6686,7 @@
                 </a:solidFill>
                 <a:latin typeface="Menlo"/>
               </a:rPr>
-              <a:t>     30 min</a:t>
+              <a:t>     15 min</a:t>
             </a:r>
           </a:p>
         </p:txBody>
@@ -6853,7 +6769,7 @@
                 </a:solidFill>
                 <a:latin typeface="Menlo"/>
               </a:rPr>
-              <a:t>01:00     </a:t>
+              <a:t>00:45     </a:t>
             </a:r>
             <a:r>
               <a:rPr sz="1700">
@@ -6862,7 +6778,7 @@
                 </a:solidFill>
                 <a:latin typeface="Iowan Old Style"/>
               </a:rPr>
-              <a:t>un dominio propio</a:t>
+              <a:t>ejercicio 6 · subir y publicar</a:t>
             </a:r>
             <a:r>
               <a:rPr sz="1100">
@@ -6871,7 +6787,7 @@
                 </a:solidFill>
                 <a:latin typeface="Menlo"/>
               </a:rPr>
-              <a:t>     20 min</a:t>
+              <a:t>     30 min</a:t>
             </a:r>
           </a:p>
         </p:txBody>
@@ -6954,7 +6870,7 @@
                 </a:solidFill>
                 <a:latin typeface="Menlo"/>
               </a:rPr>
-              <a:t>01:20     </a:t>
+              <a:t>01:15     </a:t>
             </a:r>
             <a:r>
               <a:rPr sz="1700">
@@ -6963,7 +6879,7 @@
                 </a:solidFill>
                 <a:latin typeface="Iowan Old Style"/>
               </a:rPr>
-              <a:t>pausa</a:t>
+              <a:t>un dominio propio</a:t>
             </a:r>
             <a:r>
               <a:rPr sz="1100">
@@ -7055,7 +6971,7 @@
                 </a:solidFill>
                 <a:latin typeface="Menlo"/>
               </a:rPr>
-              <a:t>01:35     </a:t>
+              <a:t>01:30     </a:t>
             </a:r>
             <a:r>
               <a:rPr sz="1700">
@@ -7064,7 +6980,7 @@
                 </a:solidFill>
                 <a:latin typeface="Iowan Old Style"/>
               </a:rPr>
-              <a:t>actualizar tu web</a:t>
+              <a:t>pausa</a:t>
             </a:r>
             <a:r>
               <a:rPr sz="1100">
@@ -7073,7 +6989,7 @@
                 </a:solidFill>
                 <a:latin typeface="Menlo"/>
               </a:rPr>
-              <a:t>     40 min</a:t>
+              <a:t>     15 min</a:t>
             </a:r>
           </a:p>
         </p:txBody>
@@ -7156,7 +7072,7 @@
                 </a:solidFill>
                 <a:latin typeface="Menlo"/>
               </a:rPr>
-              <a:t>02:15     </a:t>
+              <a:t>01:45     </a:t>
             </a:r>
             <a:r>
               <a:rPr sz="1700">
@@ -7165,7 +7081,7 @@
                 </a:solidFill>
                 <a:latin typeface="Iowan Old Style"/>
               </a:rPr>
-              <a:t>remates y cómo seguir</a:t>
+              <a:t>el ciclo de mantenimiento</a:t>
             </a:r>
             <a:r>
               <a:rPr sz="1100">
@@ -7174,7 +7090,7 @@
                 </a:solidFill>
                 <a:latin typeface="Menlo"/>
               </a:rPr>
-              <a:t>     25 min</a:t>
+              <a:t>     10 min</a:t>
             </a:r>
           </a:p>
         </p:txBody>
@@ -7257,7 +7173,7 @@
                 </a:solidFill>
                 <a:latin typeface="Menlo"/>
               </a:rPr>
-              <a:t>02:40     </a:t>
+              <a:t>01:55     </a:t>
             </a:r>
             <a:r>
               <a:rPr sz="1700">
@@ -7266,7 +7182,7 @@
                 </a:solidFill>
                 <a:latin typeface="Iowan Old Style"/>
               </a:rPr>
-              <a:t>consultorio</a:t>
+              <a:t>ejercicio 7 · cambiar y volver a subir</a:t>
             </a:r>
             <a:r>
               <a:rPr sz="1100">
@@ -7275,7 +7191,7 @@
                 </a:solidFill>
                 <a:latin typeface="Menlo"/>
               </a:rPr>
-              <a:t>     20 min</a:t>
+              <a:t>     35 min</a:t>
             </a:r>
           </a:p>
         </p:txBody>
@@ -7289,6 +7205,208 @@
         <p:spPr>
           <a:xfrm>
             <a:off x="777240" y="4773168"/>
+            <a:ext cx="10637215" cy="9525"/>
+          </a:xfrm>
+          <a:prstGeom prst="rect">
+            <a:avLst/>
+          </a:prstGeom>
+          <a:solidFill>
+            <a:srgbClr val="D8D8D8"/>
+          </a:solidFill>
+          <a:ln>
+            <a:noFill/>
+          </a:ln>
+          <a:effectLst/>
+        </p:spPr>
+        <p:style>
+          <a:lnRef idx="1">
+            <a:schemeClr val="accent1"/>
+          </a:lnRef>
+          <a:fillRef idx="3">
+            <a:schemeClr val="accent1"/>
+          </a:fillRef>
+          <a:effectRef idx="2">
+            <a:schemeClr val="accent1"/>
+          </a:effectRef>
+          <a:fontRef idx="minor">
+            <a:schemeClr val="lt1"/>
+          </a:fontRef>
+        </p:style>
+        <p:txBody>
+          <a:bodyPr rtlCol="0" anchor="ctr"/>
+          <a:lstStyle/>
+          <a:p>
+            <a:pPr algn="ctr"/>
+          </a:p>
+        </p:txBody>
+      </p:sp>
+      <p:sp>
+        <p:nvSpPr>
+          <p:cNvPr id="18" name="TextBox 17"/>
+          <p:cNvSpPr txBox="1"/>
+          <p:nvPr/>
+        </p:nvSpPr>
+        <p:spPr>
+          <a:xfrm>
+            <a:off x="777240" y="4882896"/>
+            <a:ext cx="10637215" cy="384048"/>
+          </a:xfrm>
+          <a:prstGeom prst="rect">
+            <a:avLst/>
+          </a:prstGeom>
+          <a:noFill/>
+        </p:spPr>
+        <p:txBody>
+          <a:bodyPr wrap="square" lIns="0" rIns="0" tIns="0" bIns="0">
+            <a:spAutoFit/>
+          </a:bodyPr>
+          <a:lstStyle/>
+          <a:p>
+            <a:pPr>
+              <a:spcAft>
+                <a:spcPts val="0"/>
+              </a:spcAft>
+            </a:pPr>
+            <a:r>
+              <a:rPr sz="1300">
+                <a:solidFill>
+                  <a:srgbClr val="8A8A8A"/>
+                </a:solidFill>
+                <a:latin typeface="Menlo"/>
+              </a:rPr>
+              <a:t>02:30     </a:t>
+            </a:r>
+            <a:r>
+              <a:rPr sz="1700">
+                <a:solidFill>
+                  <a:srgbClr val="0A0A0A"/>
+                </a:solidFill>
+                <a:latin typeface="Iowan Old Style"/>
+              </a:rPr>
+              <a:t>remates y cómo seguir</a:t>
+            </a:r>
+            <a:r>
+              <a:rPr sz="1100">
+                <a:solidFill>
+                  <a:srgbClr val="8A8A8A"/>
+                </a:solidFill>
+                <a:latin typeface="Menlo"/>
+              </a:rPr>
+              <a:t>     20 min</a:t>
+            </a:r>
+          </a:p>
+        </p:txBody>
+      </p:sp>
+      <p:sp>
+        <p:nvSpPr>
+          <p:cNvPr id="19" name="Rectangle 18"/>
+          <p:cNvSpPr/>
+          <p:nvPr/>
+        </p:nvSpPr>
+        <p:spPr>
+          <a:xfrm>
+            <a:off x="777240" y="5248656"/>
+            <a:ext cx="10637215" cy="9525"/>
+          </a:xfrm>
+          <a:prstGeom prst="rect">
+            <a:avLst/>
+          </a:prstGeom>
+          <a:solidFill>
+            <a:srgbClr val="D8D8D8"/>
+          </a:solidFill>
+          <a:ln>
+            <a:noFill/>
+          </a:ln>
+          <a:effectLst/>
+        </p:spPr>
+        <p:style>
+          <a:lnRef idx="1">
+            <a:schemeClr val="accent1"/>
+          </a:lnRef>
+          <a:fillRef idx="3">
+            <a:schemeClr val="accent1"/>
+          </a:fillRef>
+          <a:effectRef idx="2">
+            <a:schemeClr val="accent1"/>
+          </a:effectRef>
+          <a:fontRef idx="minor">
+            <a:schemeClr val="lt1"/>
+          </a:fontRef>
+        </p:style>
+        <p:txBody>
+          <a:bodyPr rtlCol="0" anchor="ctr"/>
+          <a:lstStyle/>
+          <a:p>
+            <a:pPr algn="ctr"/>
+          </a:p>
+        </p:txBody>
+      </p:sp>
+      <p:sp>
+        <p:nvSpPr>
+          <p:cNvPr id="20" name="TextBox 19"/>
+          <p:cNvSpPr txBox="1"/>
+          <p:nvPr/>
+        </p:nvSpPr>
+        <p:spPr>
+          <a:xfrm>
+            <a:off x="777240" y="5358384"/>
+            <a:ext cx="10637215" cy="384048"/>
+          </a:xfrm>
+          <a:prstGeom prst="rect">
+            <a:avLst/>
+          </a:prstGeom>
+          <a:noFill/>
+        </p:spPr>
+        <p:txBody>
+          <a:bodyPr wrap="square" lIns="0" rIns="0" tIns="0" bIns="0">
+            <a:spAutoFit/>
+          </a:bodyPr>
+          <a:lstStyle/>
+          <a:p>
+            <a:pPr>
+              <a:spcAft>
+                <a:spcPts val="0"/>
+              </a:spcAft>
+            </a:pPr>
+            <a:r>
+              <a:rPr sz="1300">
+                <a:solidFill>
+                  <a:srgbClr val="8A8A8A"/>
+                </a:solidFill>
+                <a:latin typeface="Menlo"/>
+              </a:rPr>
+              <a:t>02:50     </a:t>
+            </a:r>
+            <a:r>
+              <a:rPr sz="1700">
+                <a:solidFill>
+                  <a:srgbClr val="0A0A0A"/>
+                </a:solidFill>
+                <a:latin typeface="Iowan Old Style"/>
+              </a:rPr>
+              <a:t>consultorio</a:t>
+            </a:r>
+            <a:r>
+              <a:rPr sz="1100">
+                <a:solidFill>
+                  <a:srgbClr val="8A8A8A"/>
+                </a:solidFill>
+                <a:latin typeface="Menlo"/>
+              </a:rPr>
+              <a:t>     10 min</a:t>
+            </a:r>
+          </a:p>
+        </p:txBody>
+      </p:sp>
+      <p:sp>
+        <p:nvSpPr>
+          <p:cNvPr id="21" name="Rectangle 20"/>
+          <p:cNvSpPr/>
+          <p:nvPr/>
+        </p:nvSpPr>
+        <p:spPr>
+          <a:xfrm>
+            <a:off x="777240" y="5724144"/>
             <a:ext cx="10637215" cy="9525"/>
           </a:xfrm>
           <a:prstGeom prst="rect">
@@ -7357,7 +7475,7 @@
             <a:avLst/>
           </a:prstGeom>
           <a:solidFill>
-            <a:srgbClr val="0A0A0A"/>
+            <a:srgbClr val="F2E94E"/>
           </a:solidFill>
           <a:ln>
             <a:noFill/>
@@ -7394,8 +7512,8 @@
         </p:nvSpPr>
         <p:spPr>
           <a:xfrm>
-            <a:off x="777240" y="2103120"/>
-            <a:ext cx="10637215" cy="2926080"/>
+            <a:off x="777240" y="1920240"/>
+            <a:ext cx="10637215" cy="3108960"/>
           </a:xfrm>
           <a:prstGeom prst="rect">
             <a:avLst/>
@@ -7416,17 +7534,39 @@
                 <a:spcPts val="0"/>
               </a:spcBef>
               <a:spcAft>
+                <a:spcPts val="1400"/>
+              </a:spcAft>
+            </a:pPr>
+            <a:r>
+              <a:rPr sz="1200" b="0" i="0" spc="600">
+                <a:solidFill>
+                  <a:srgbClr val="6A6418"/>
+                </a:solidFill>
+                <a:latin typeface="Menlo"/>
+              </a:rPr>
+              <a:t>PRÁCTICA · LO HACÉIS VOSOTRAS</a:t>
+            </a:r>
+          </a:p>
+          <a:p>
+            <a:pPr>
+              <a:lnSpc>
+                <a:spcPct val="125000"/>
+              </a:lnSpc>
+              <a:spcBef>
+                <a:spcPts val="0"/>
+              </a:spcBef>
+              <a:spcAft>
                 <a:spcPts val="2000"/>
               </a:spcAft>
             </a:pPr>
             <a:r>
               <a:rPr sz="1100" b="0" i="0" spc="300">
                 <a:solidFill>
-                  <a:srgbClr val="8A8A8A"/>
+                  <a:srgbClr val="6A6418"/>
                 </a:solidFill>
                 <a:latin typeface="Menlo"/>
               </a:rPr>
-              <a:t>02:15 · 25 MINUTOS</a:t>
+              <a:t>01:55 · 35 MINUTOS</a:t>
             </a:r>
           </a:p>
           <a:p>
@@ -7444,11 +7584,11 @@
             <a:r>
               <a:rPr sz="4000" b="0" i="0">
                 <a:solidFill>
-                  <a:srgbClr val="FFFFFF"/>
+                  <a:srgbClr val="0A0A0A"/>
                 </a:solidFill>
                 <a:latin typeface="Inknut Antiqua"/>
               </a:rPr>
-              <a:t>remates y cómo seguir</a:t>
+              <a:t>ejercicio 7 · cambiar y volver a subir</a:t>
             </a:r>
           </a:p>
           <a:p>
@@ -7466,11 +7606,11 @@
             <a:r>
               <a:rPr sz="1700" b="0" i="0">
                 <a:solidFill>
-                  <a:srgbClr val="BBBBBB"/>
+                  <a:srgbClr val="33300A"/>
                 </a:solidFill>
                 <a:latin typeface="Iowan Old Style"/>
               </a:rPr>
-              <a:t>Los detalles que faltan, dónde buscar, y cómo pedir ayuda sin perder tu web.</a:t>
+              <a:t>El ejercicio más importante del taller. Lo hace cada una, entera, sola, y yo no toco ningún teclado.</a:t>
             </a:r>
           </a:p>
         </p:txBody>
@@ -7508,7 +7648,7 @@
             <a:avLst/>
           </a:prstGeom>
           <a:solidFill>
-            <a:srgbClr val="FFFFFF"/>
+            <a:srgbClr val="FDFBE9"/>
           </a:solidFill>
           <a:ln>
             <a:noFill/>
@@ -7539,14 +7679,58 @@
       </p:sp>
       <p:sp>
         <p:nvSpPr>
-          <p:cNvPr id="3" name="TextBox 2"/>
+          <p:cNvPr id="3" name="Rectangle 2"/>
+          <p:cNvSpPr/>
+          <p:nvPr/>
+        </p:nvSpPr>
+        <p:spPr>
+          <a:xfrm>
+            <a:off x="0" y="0"/>
+            <a:ext cx="54864" cy="6858000"/>
+          </a:xfrm>
+          <a:prstGeom prst="rect">
+            <a:avLst/>
+          </a:prstGeom>
+          <a:solidFill>
+            <a:srgbClr val="E8DD58"/>
+          </a:solidFill>
+          <a:ln>
+            <a:noFill/>
+          </a:ln>
+          <a:effectLst/>
+        </p:spPr>
+        <p:style>
+          <a:lnRef idx="1">
+            <a:schemeClr val="accent1"/>
+          </a:lnRef>
+          <a:fillRef idx="3">
+            <a:schemeClr val="accent1"/>
+          </a:fillRef>
+          <a:effectRef idx="2">
+            <a:schemeClr val="accent1"/>
+          </a:effectRef>
+          <a:fontRef idx="minor">
+            <a:schemeClr val="lt1"/>
+          </a:fontRef>
+        </p:style>
+        <p:txBody>
+          <a:bodyPr rtlCol="0" anchor="ctr"/>
+          <a:lstStyle/>
+          <a:p>
+            <a:pPr algn="ctr"/>
+          </a:p>
+        </p:txBody>
+      </p:sp>
+      <p:sp>
+        <p:nvSpPr>
+          <p:cNvPr id="4" name="TextBox 3"/>
           <p:cNvSpPr txBox="1"/>
           <p:nvPr/>
         </p:nvSpPr>
         <p:spPr>
           <a:xfrm>
-            <a:off x="777240" y="777240"/>
-            <a:ext cx="10637215" cy="274320"/>
+            <a:off x="777240" y="310896"/>
+            <a:ext cx="10637215" cy="219456"/>
           </a:xfrm>
           <a:prstGeom prst="rect">
             <a:avLst/>
@@ -7571,20 +7755,65 @@
               </a:spcAft>
             </a:pPr>
             <a:r>
+              <a:rPr sz="950" b="0" i="0" spc="800">
+                <a:solidFill>
+                  <a:srgbClr val="8A7C14"/>
+                </a:solidFill>
+                <a:latin typeface="Menlo"/>
+              </a:rPr>
+              <a:t>PRÁCTICA</a:t>
+            </a:r>
+          </a:p>
+        </p:txBody>
+      </p:sp>
+      <p:sp>
+        <p:nvSpPr>
+          <p:cNvPr id="5" name="TextBox 4"/>
+          <p:cNvSpPr txBox="1"/>
+          <p:nvPr/>
+        </p:nvSpPr>
+        <p:spPr>
+          <a:xfrm>
+            <a:off x="777240" y="777240"/>
+            <a:ext cx="10637215" cy="274320"/>
+          </a:xfrm>
+          <a:prstGeom prst="rect">
+            <a:avLst/>
+          </a:prstGeom>
+          <a:noFill/>
+        </p:spPr>
+        <p:txBody>
+          <a:bodyPr wrap="square" lIns="0" rIns="0" tIns="0" bIns="0">
+            <a:spAutoFit/>
+          </a:bodyPr>
+          <a:lstStyle/>
+          <a:p>
+            <a:pPr>
+              <a:lnSpc>
+                <a:spcPct val="125000"/>
+              </a:lnSpc>
+              <a:spcBef>
+                <a:spcPts val="0"/>
+              </a:spcBef>
+              <a:spcAft>
+                <a:spcPts val="600"/>
+              </a:spcAft>
+            </a:pPr>
+            <a:r>
               <a:rPr sz="1000" b="0" i="0" spc="300">
                 <a:solidFill>
                   <a:srgbClr val="8A8A8A"/>
                 </a:solidFill>
                 <a:latin typeface="Menlo"/>
               </a:rPr>
-              <a:t>02:15</a:t>
-            </a:r>
-          </a:p>
-        </p:txBody>
-      </p:sp>
-      <p:sp>
-        <p:nvSpPr>
-          <p:cNvPr id="4" name="Rectangle 3"/>
+              <a:t>EJERCICIO 7   ·   30 MIN · EL MÁS IMPORTANTE DEL TALLER</a:t>
+            </a:r>
+          </a:p>
+        </p:txBody>
+      </p:sp>
+      <p:sp>
+        <p:nvSpPr>
+          <p:cNvPr id="6" name="Rectangle 5"/>
           <p:cNvSpPr/>
           <p:nvPr/>
         </p:nvSpPr>
@@ -7628,7 +7857,7 @@
       </p:sp>
       <p:sp>
         <p:nvSpPr>
-          <p:cNvPr id="5" name="TextBox 4"/>
+          <p:cNvPr id="7" name="TextBox 6"/>
           <p:cNvSpPr txBox="1"/>
           <p:nvPr/>
         </p:nvSpPr>
@@ -7666,14 +7895,14 @@
                 </a:solidFill>
                 <a:latin typeface="Inknut Antiqua"/>
               </a:rPr>
-              <a:t>cuando algo no funciona</a:t>
-            </a:r>
-          </a:p>
-        </p:txBody>
-      </p:sp>
-      <p:sp>
-        <p:nvSpPr>
-          <p:cNvPr id="6" name="TextBox 5"/>
+              <a:t>cambiar algo y volver a subirlo</a:t>
+            </a:r>
+          </a:p>
+        </p:txBody>
+      </p:sp>
+      <p:sp>
+        <p:nvSpPr>
+          <p:cNvPr id="8" name="TextBox 7"/>
           <p:cNvSpPr txBox="1"/>
           <p:nvPr/>
         </p:nvSpPr>
@@ -7695,133 +7924,375 @@
           <a:p>
             <a:pPr>
               <a:lnSpc>
-                <a:spcPct val="140000"/>
-              </a:lnSpc>
-              <a:spcBef>
-                <a:spcPts val="0"/>
-              </a:spcBef>
-              <a:spcAft>
-                <a:spcPts val="500"/>
-              </a:spcAft>
-            </a:pPr>
-            <a:r>
-              <a:rPr sz="1450" b="0" i="0">
+                <a:spcPct val="133480"/>
+              </a:lnSpc>
+              <a:spcBef>
+                <a:spcPts val="0"/>
+              </a:spcBef>
+              <a:spcAft>
+                <a:spcPts val="668"/>
+              </a:spcAft>
+            </a:pPr>
+            <a:r>
+              <a:rPr sz="1113" b="0" i="0">
                 <a:solidFill>
                   <a:srgbClr val="444444"/>
                 </a:solidFill>
                 <a:latin typeface="Iowan Old Style"/>
               </a:rPr>
-              <a:t>·  ¿Has guardado el archivo?</a:t>
-            </a:r>
-          </a:p>
-          <a:p>
-            <a:pPr>
-              <a:lnSpc>
-                <a:spcPct val="140000"/>
-              </a:lnSpc>
-              <a:spcBef>
-                <a:spcPts val="0"/>
-              </a:spcBef>
-              <a:spcAft>
-                <a:spcPts val="500"/>
-              </a:spcAft>
-            </a:pPr>
-            <a:r>
-              <a:rPr sz="1450" b="0" i="0">
+              <a:t>Publicar lo hace cualquiera una vez. Lo que hace que la web sea tuya es saber cambiarla dentro de seis meses. Hazlo tú sola, entera.</a:t>
+            </a:r>
+          </a:p>
+          <a:p>
+            <a:pPr>
+              <a:lnSpc>
+                <a:spcPct val="131600"/>
+              </a:lnSpc>
+              <a:spcBef>
+                <a:spcPts val="0"/>
+              </a:spcBef>
+              <a:spcAft>
+                <a:spcPts val="371"/>
+              </a:spcAft>
+            </a:pPr>
+            <a:r>
+              <a:rPr sz="1076" b="0" i="0">
                 <a:solidFill>
                   <a:srgbClr val="444444"/>
                 </a:solidFill>
                 <a:latin typeface="Iowan Old Style"/>
               </a:rPr>
-              <a:t>·  ¿Has recargado? Recarga forzada: Cmd+Shift+R o Ctrl+F5.</a:t>
-            </a:r>
-          </a:p>
-          <a:p>
-            <a:pPr>
-              <a:lnSpc>
-                <a:spcPct val="140000"/>
-              </a:lnSpc>
-              <a:spcBef>
-                <a:spcPts val="0"/>
-              </a:spcBef>
-              <a:spcAft>
-                <a:spcPts val="500"/>
-              </a:spcAft>
-            </a:pPr>
-            <a:r>
-              <a:rPr sz="1450" b="0" i="0">
+              <a:t>☐  En VS Code, cambia algo que se note: una frase, un color, una imagen.</a:t>
+            </a:r>
+          </a:p>
+          <a:p>
+            <a:pPr>
+              <a:lnSpc>
+                <a:spcPct val="131600"/>
+              </a:lnSpc>
+              <a:spcBef>
+                <a:spcPts val="0"/>
+              </a:spcBef>
+              <a:spcAft>
+                <a:spcPts val="371"/>
+              </a:spcAft>
+            </a:pPr>
+            <a:r>
+              <a:rPr sz="1076" b="0" i="0">
                 <a:solidFill>
                   <a:srgbClr val="444444"/>
                 </a:solidFill>
                 <a:latin typeface="Iowan Old Style"/>
               </a:rPr>
-              <a:t>·  ¿Falta cerrar una etiqueta, una comilla o un punto y coma? VS Code lo marca en color.</a:t>
-            </a:r>
-          </a:p>
-          <a:p>
-            <a:pPr>
-              <a:lnSpc>
-                <a:spcPct val="140000"/>
-              </a:lnSpc>
-              <a:spcBef>
-                <a:spcPts val="0"/>
-              </a:spcBef>
-              <a:spcAft>
-                <a:spcPts val="500"/>
-              </a:spcAft>
-            </a:pPr>
-            <a:r>
-              <a:rPr sz="1450" b="0" i="0">
+              <a:t>☐  Guarda.</a:t>
+            </a:r>
+          </a:p>
+          <a:p>
+            <a:pPr>
+              <a:lnSpc>
+                <a:spcPct val="131600"/>
+              </a:lnSpc>
+              <a:spcBef>
+                <a:spcPts val="0"/>
+              </a:spcBef>
+              <a:spcAft>
+                <a:spcPts val="371"/>
+              </a:spcAft>
+            </a:pPr>
+            <a:r>
+              <a:rPr sz="1076" b="0" i="0">
                 <a:solidFill>
                   <a:srgbClr val="444444"/>
                 </a:solidFill>
                 <a:latin typeface="Iowan Old Style"/>
               </a:rPr>
-              <a:t>·  ¿Una imagen no sale? El nombre del archivo y el src tienen que coincidir exactamente — mayúsculas y extensión incluidas. .JPG no es .jpg.</a:t>
-            </a:r>
-          </a:p>
-          <a:p>
-            <a:pPr>
-              <a:lnSpc>
-                <a:spcPct val="140000"/>
-              </a:lnSpc>
-              <a:spcBef>
-                <a:spcPts val="0"/>
-              </a:spcBef>
-              <a:spcAft>
-                <a:spcPts val="500"/>
-              </a:spcAft>
-            </a:pPr>
-            <a:r>
-              <a:rPr sz="1450" b="0" i="0">
+              <a:t>☐  Ábrelo en tu navegador en local y comprueba que está bien.</a:t>
+            </a:r>
+          </a:p>
+          <a:p>
+            <a:pPr>
+              <a:lnSpc>
+                <a:spcPct val="131600"/>
+              </a:lnSpc>
+              <a:spcBef>
+                <a:spcPts val="0"/>
+              </a:spcBef>
+              <a:spcAft>
+                <a:spcPts val="371"/>
+              </a:spcAft>
+            </a:pPr>
+            <a:r>
+              <a:rPr sz="1076" b="0" i="0">
                 <a:solidFill>
                   <a:srgbClr val="444444"/>
                 </a:solidFill>
                 <a:latin typeface="Iowan Old Style"/>
               </a:rPr>
-              <a:t>·  Botón derecho → Inspeccionar → pestaña Console. Si hay un error, está escrito ahí.</a:t>
-            </a:r>
-          </a:p>
-          <a:p>
-            <a:pPr>
-              <a:lnSpc>
-                <a:spcPct val="140000"/>
-              </a:lnSpc>
-              <a:spcBef>
-                <a:spcPts val="0"/>
-              </a:spcBef>
-              <a:spcAft>
-                <a:spcPts val="500"/>
-              </a:spcAft>
-            </a:pPr>
-            <a:r>
-              <a:rPr sz="1450" b="0" i="0">
+              <a:t>☐  En GitHub: Add file → Upload files.</a:t>
+            </a:r>
+          </a:p>
+          <a:p>
+            <a:pPr>
+              <a:lnSpc>
+                <a:spcPct val="131600"/>
+              </a:lnSpc>
+              <a:spcBef>
+                <a:spcPts val="0"/>
+              </a:spcBef>
+              <a:spcAft>
+                <a:spcPts val="371"/>
+              </a:spcAft>
+            </a:pPr>
+            <a:r>
+              <a:rPr sz="1076" b="0" i="0">
                 <a:solidFill>
                   <a:srgbClr val="444444"/>
                 </a:solidFill>
                 <a:latin typeface="Iowan Old Style"/>
               </a:rPr>
-              <a:t>·  Vuelve a la última copia que iba bien y avanza otra vez desde ahí.</a:t>
+              <a:t>☐  Arrastra el archivo cambiado encima del que ya estaba.</a:t>
+            </a:r>
+          </a:p>
+          <a:p>
+            <a:pPr>
+              <a:lnSpc>
+                <a:spcPct val="131600"/>
+              </a:lnSpc>
+              <a:spcBef>
+                <a:spcPts val="0"/>
+              </a:spcBef>
+              <a:spcAft>
+                <a:spcPts val="371"/>
+              </a:spcAft>
+            </a:pPr>
+            <a:r>
+              <a:rPr sz="1076" b="0" i="0">
+                <a:solidFill>
+                  <a:srgbClr val="444444"/>
+                </a:solidFill>
+                <a:latin typeface="Iowan Old Style"/>
+              </a:rPr>
+              <a:t>☐  Commit changes.</a:t>
+            </a:r>
+          </a:p>
+          <a:p>
+            <a:pPr>
+              <a:lnSpc>
+                <a:spcPct val="131600"/>
+              </a:lnSpc>
+              <a:spcBef>
+                <a:spcPts val="0"/>
+              </a:spcBef>
+              <a:spcAft>
+                <a:spcPts val="371"/>
+              </a:spcAft>
+            </a:pPr>
+            <a:r>
+              <a:rPr sz="1076" b="0" i="0">
+                <a:solidFill>
+                  <a:srgbClr val="444444"/>
+                </a:solidFill>
+                <a:latin typeface="Iowan Old Style"/>
+              </a:rPr>
+              <a:t>☐  Espera un minuto, recarga tu web publicada y comprueba el cambio.</a:t>
+            </a:r>
+          </a:p>
+          <a:p>
+            <a:pPr>
+              <a:lnSpc>
+                <a:spcPct val="131600"/>
+              </a:lnSpc>
+              <a:spcBef>
+                <a:spcPts val="0"/>
+              </a:spcBef>
+              <a:spcAft>
+                <a:spcPts val="371"/>
+              </a:spcAft>
+            </a:pPr>
+            <a:r>
+              <a:rPr sz="1076" b="0" i="0">
+                <a:solidFill>
+                  <a:srgbClr val="444444"/>
+                </a:solidFill>
+                <a:latin typeface="Iowan Old Style"/>
+              </a:rPr>
+              <a:t>☐  Añade un proyecto nuevo a proyectos.html.</a:t>
+            </a:r>
+          </a:p>
+          <a:p>
+            <a:pPr>
+              <a:lnSpc>
+                <a:spcPct val="131600"/>
+              </a:lnSpc>
+              <a:spcBef>
+                <a:spcPts val="0"/>
+              </a:spcBef>
+              <a:spcAft>
+                <a:spcPts val="371"/>
+              </a:spcAft>
+            </a:pPr>
+            <a:r>
+              <a:rPr sz="1076" b="0" i="0">
+                <a:solidFill>
+                  <a:srgbClr val="444444"/>
+                </a:solidFill>
+                <a:latin typeface="Iowan Old Style"/>
+              </a:rPr>
+              <a:t>☐  Súbelo tú sola, sin mirar los pasos de arriba.</a:t>
+            </a:r>
+          </a:p>
+          <a:p>
+            <a:pPr>
+              <a:lnSpc>
+                <a:spcPct val="131600"/>
+              </a:lnSpc>
+              <a:spcBef>
+                <a:spcPts val="0"/>
+              </a:spcBef>
+              <a:spcAft>
+                <a:spcPts val="371"/>
+              </a:spcAft>
+            </a:pPr>
+            <a:r>
+              <a:rPr sz="1076" b="0" i="0">
+                <a:solidFill>
+                  <a:srgbClr val="444444"/>
+                </a:solidFill>
+                <a:latin typeface="Iowan Old Style"/>
+              </a:rPr>
+              <a:t>☐  Tengo mi dirección apuntada en papel.</a:t>
+            </a:r>
+          </a:p>
+          <a:p>
+            <a:pPr>
+              <a:lnSpc>
+                <a:spcPct val="131600"/>
+              </a:lnSpc>
+              <a:spcBef>
+                <a:spcPts val="0"/>
+              </a:spcBef>
+              <a:spcAft>
+                <a:spcPts val="371"/>
+              </a:spcAft>
+            </a:pPr>
+            <a:r>
+              <a:rPr sz="1076" b="0" i="0">
+                <a:solidFill>
+                  <a:srgbClr val="444444"/>
+                </a:solidFill>
+                <a:latin typeface="Iowan Old Style"/>
+              </a:rPr>
+              <a:t>☐  Tengo la carpeta guardada en mi ordenador.</a:t>
+            </a:r>
+          </a:p>
+          <a:p>
+            <a:pPr>
+              <a:lnSpc>
+                <a:spcPct val="131600"/>
+              </a:lnSpc>
+              <a:spcBef>
+                <a:spcPts val="0"/>
+              </a:spcBef>
+              <a:spcAft>
+                <a:spcPts val="371"/>
+              </a:spcAft>
+            </a:pPr>
+            <a:r>
+              <a:rPr sz="1076" b="0" i="0">
+                <a:solidFill>
+                  <a:srgbClr val="444444"/>
+                </a:solidFill>
+                <a:latin typeface="Iowan Old Style"/>
+              </a:rPr>
+              <a:t>☐  Sé entrar en mi cuenta de GitHub.</a:t>
+            </a:r>
+          </a:p>
+          <a:p>
+            <a:pPr>
+              <a:lnSpc>
+                <a:spcPct val="131600"/>
+              </a:lnSpc>
+              <a:spcBef>
+                <a:spcPts val="0"/>
+              </a:spcBef>
+              <a:spcAft>
+                <a:spcPts val="371"/>
+              </a:spcAft>
+            </a:pPr>
+            <a:r>
+              <a:rPr sz="1076" b="0" i="0">
+                <a:solidFill>
+                  <a:srgbClr val="444444"/>
+                </a:solidFill>
+                <a:latin typeface="Iowan Old Style"/>
+              </a:rPr>
+              <a:t>☐  He hecho el ciclo completo yo sola, al menos dos veces.</a:t>
+            </a:r>
+          </a:p>
+          <a:p>
+            <a:pPr>
+              <a:lnSpc>
+                <a:spcPct val="131600"/>
+              </a:lnSpc>
+              <a:spcBef>
+                <a:spcPts val="0"/>
+              </a:spcBef>
+              <a:spcAft>
+                <a:spcPts val="371"/>
+              </a:spcAft>
+            </a:pPr>
+            <a:r>
+              <a:rPr sz="1076" b="0" i="0">
+                <a:solidFill>
+                  <a:srgbClr val="444444"/>
+                </a:solidFill>
+                <a:latin typeface="Iowan Old Style"/>
+              </a:rPr>
+              <a:t>☐  Me llevo la guía y la chuleta.</a:t>
+            </a:r>
+          </a:p>
+          <a:p>
+            <a:pPr>
+              <a:lnSpc>
+                <a:spcPct val="117500"/>
+              </a:lnSpc>
+              <a:spcBef>
+                <a:spcPts val="1000"/>
+              </a:spcBef>
+              <a:spcAft>
+                <a:spcPts val="222"/>
+              </a:spcAft>
+            </a:pPr>
+            <a:r>
+              <a:rPr sz="950" b="0" i="0" spc="300">
+                <a:solidFill>
+                  <a:srgbClr val="8A8A8A"/>
+                </a:solidFill>
+                <a:latin typeface="Menlo"/>
+              </a:rPr>
+              <a:t>POR QUÉ ESTO Y NO OTRA COSA</a:t>
+            </a:r>
+          </a:p>
+          <a:p>
+            <a:pPr>
+              <a:lnSpc>
+                <a:spcPct val="131600"/>
+              </a:lnSpc>
+              <a:spcBef>
+                <a:spcPts val="0"/>
+              </a:spcBef>
+              <a:spcAft>
+                <a:spcPts val="593"/>
+              </a:spcAft>
+            </a:pPr>
+            <a:r>
+              <a:rPr sz="1039" b="0" i="0">
+                <a:solidFill>
+                  <a:srgbClr val="444444"/>
+                </a:solidFill>
+                <a:latin typeface="Iowan Old Style"/>
+              </a:rPr>
+              <a:t>Hasta que no lo has hecho sola una vez, no lo sabes hacer. Todo lo demás del taller se puede recuperar leyendo la guía; esto no.</a:t>
             </a:r>
           </a:p>
         </p:txBody>
@@ -7859,7 +8330,7 @@
             <a:avLst/>
           </a:prstGeom>
           <a:solidFill>
-            <a:srgbClr val="FFFFFF"/>
+            <a:srgbClr val="0A0A0A"/>
           </a:solidFill>
           <a:ln>
             <a:noFill/>
@@ -7896,8 +8367,8 @@
         </p:nvSpPr>
         <p:spPr>
           <a:xfrm>
-            <a:off x="777240" y="777240"/>
-            <a:ext cx="10637215" cy="274320"/>
+            <a:off x="777240" y="1920240"/>
+            <a:ext cx="10637215" cy="3108960"/>
           </a:xfrm>
           <a:prstGeom prst="rect">
             <a:avLst/>
@@ -7918,239 +8389,83 @@
                 <a:spcPts val="0"/>
               </a:spcBef>
               <a:spcAft>
+                <a:spcPts val="1400"/>
+              </a:spcAft>
+            </a:pPr>
+            <a:r>
+              <a:rPr sz="1200" b="0" i="0" spc="600">
+                <a:solidFill>
+                  <a:srgbClr val="8A8A8A"/>
+                </a:solidFill>
+                <a:latin typeface="Menlo"/>
+              </a:rPr>
+              <a:t>TEORÍA · LO EXPLICO YO</a:t>
+            </a:r>
+          </a:p>
+          <a:p>
+            <a:pPr>
+              <a:lnSpc>
+                <a:spcPct val="125000"/>
+              </a:lnSpc>
+              <a:spcBef>
+                <a:spcPts val="0"/>
+              </a:spcBef>
+              <a:spcAft>
+                <a:spcPts val="2000"/>
+              </a:spcAft>
+            </a:pPr>
+            <a:r>
+              <a:rPr sz="1100" b="0" i="0" spc="300">
+                <a:solidFill>
+                  <a:srgbClr val="8A8A8A"/>
+                </a:solidFill>
+                <a:latin typeface="Menlo"/>
+              </a:rPr>
+              <a:t>02:15 · 25 MINUTOS</a:t>
+            </a:r>
+          </a:p>
+          <a:p>
+            <a:pPr>
+              <a:lnSpc>
+                <a:spcPct val="110000"/>
+              </a:lnSpc>
+              <a:spcBef>
+                <a:spcPts val="0"/>
+              </a:spcBef>
+              <a:spcAft>
+                <a:spcPts val="1800"/>
+              </a:spcAft>
+            </a:pPr>
+            <a:r>
+              <a:rPr sz="4000" b="0" i="0">
+                <a:solidFill>
+                  <a:srgbClr val="FFFFFF"/>
+                </a:solidFill>
+                <a:latin typeface="Inknut Antiqua"/>
+              </a:rPr>
+              <a:t>remates y cómo seguir</a:t>
+            </a:r>
+          </a:p>
+          <a:p>
+            <a:pPr>
+              <a:lnSpc>
+                <a:spcPct val="140000"/>
+              </a:lnSpc>
+              <a:spcBef>
+                <a:spcPts val="0"/>
+              </a:spcBef>
+              <a:spcAft>
                 <a:spcPts val="600"/>
               </a:spcAft>
             </a:pPr>
             <a:r>
-              <a:rPr sz="1000" b="0" i="0" spc="300">
-                <a:solidFill>
-                  <a:srgbClr val="8A8A8A"/>
-                </a:solidFill>
-                <a:latin typeface="Menlo"/>
-              </a:rPr>
-              <a:t>02:15</a:t>
-            </a:r>
-          </a:p>
-        </p:txBody>
-      </p:sp>
-      <p:sp>
-        <p:nvSpPr>
-          <p:cNvPr id="4" name="Rectangle 3"/>
-          <p:cNvSpPr/>
-          <p:nvPr/>
-        </p:nvSpPr>
-        <p:spPr>
-          <a:xfrm>
-            <a:off x="777240" y="1161288"/>
-            <a:ext cx="10637215" cy="9525"/>
-          </a:xfrm>
-          <a:prstGeom prst="rect">
-            <a:avLst/>
-          </a:prstGeom>
-          <a:solidFill>
-            <a:srgbClr val="D8D8D8"/>
-          </a:solidFill>
-          <a:ln>
-            <a:noFill/>
-          </a:ln>
-          <a:effectLst/>
-        </p:spPr>
-        <p:style>
-          <a:lnRef idx="1">
-            <a:schemeClr val="accent1"/>
-          </a:lnRef>
-          <a:fillRef idx="3">
-            <a:schemeClr val="accent1"/>
-          </a:fillRef>
-          <a:effectRef idx="2">
-            <a:schemeClr val="accent1"/>
-          </a:effectRef>
-          <a:fontRef idx="minor">
-            <a:schemeClr val="lt1"/>
-          </a:fontRef>
-        </p:style>
-        <p:txBody>
-          <a:bodyPr rtlCol="0" anchor="ctr"/>
-          <a:lstStyle/>
-          <a:p>
-            <a:pPr algn="ctr"/>
-          </a:p>
-        </p:txBody>
-      </p:sp>
-      <p:sp>
-        <p:nvSpPr>
-          <p:cNvPr id="5" name="TextBox 4"/>
-          <p:cNvSpPr txBox="1"/>
-          <p:nvPr/>
-        </p:nvSpPr>
-        <p:spPr>
-          <a:xfrm>
-            <a:off x="777240" y="1417320"/>
-            <a:ext cx="10637215" cy="822960"/>
-          </a:xfrm>
-          <a:prstGeom prst="rect">
-            <a:avLst/>
-          </a:prstGeom>
-          <a:noFill/>
-        </p:spPr>
-        <p:txBody>
-          <a:bodyPr wrap="square" lIns="0" rIns="0" tIns="0" bIns="0">
-            <a:spAutoFit/>
-          </a:bodyPr>
-          <a:lstStyle/>
-          <a:p>
-            <a:pPr>
-              <a:lnSpc>
-                <a:spcPct val="112000"/>
-              </a:lnSpc>
-              <a:spcBef>
-                <a:spcPts val="0"/>
-              </a:spcBef>
-              <a:spcAft>
-                <a:spcPts val="600"/>
-              </a:spcAft>
-            </a:pPr>
-            <a:r>
-              <a:rPr sz="2700" b="0" i="0">
-                <a:solidFill>
-                  <a:srgbClr val="0A0A0A"/>
-                </a:solidFill>
-                <a:latin typeface="Inknut Antiqua"/>
-              </a:rPr>
-              <a:t>pedirle ayuda a una inteligencia artificial</a:t>
-            </a:r>
-          </a:p>
-        </p:txBody>
-      </p:sp>
-      <p:sp>
-        <p:nvSpPr>
-          <p:cNvPr id="6" name="TextBox 5"/>
-          <p:cNvSpPr txBox="1"/>
-          <p:nvPr/>
-        </p:nvSpPr>
-        <p:spPr>
-          <a:xfrm>
-            <a:off x="777240" y="2057400"/>
-            <a:ext cx="10637215" cy="4251960"/>
-          </a:xfrm>
-          <a:prstGeom prst="rect">
-            <a:avLst/>
-          </a:prstGeom>
-          <a:noFill/>
-        </p:spPr>
-        <p:txBody>
-          <a:bodyPr wrap="square" lIns="0" rIns="0" tIns="0" bIns="0">
-            <a:spAutoFit/>
-          </a:bodyPr>
-          <a:lstStyle/>
-          <a:p>
-            <a:pPr>
-              <a:lnSpc>
-                <a:spcPct val="140000"/>
-              </a:lnSpc>
-              <a:spcBef>
-                <a:spcPts val="0"/>
-              </a:spcBef>
-              <a:spcAft>
-                <a:spcPts val="500"/>
-              </a:spcAft>
-            </a:pPr>
-            <a:r>
-              <a:rPr sz="1450" b="0" i="0">
-                <a:solidFill>
-                  <a:srgbClr val="444444"/>
+              <a:rPr sz="1700" b="0" i="0">
+                <a:solidFill>
+                  <a:srgbClr val="BBBBBB"/>
                 </a:solidFill>
                 <a:latin typeface="Iowan Old Style"/>
               </a:rPr>
-              <a:t>·  Pega solo el trozo que falla, no la web entera.</a:t>
-            </a:r>
-          </a:p>
-          <a:p>
-            <a:pPr>
-              <a:lnSpc>
-                <a:spcPct val="140000"/>
-              </a:lnSpc>
-              <a:spcBef>
-                <a:spcPts val="0"/>
-              </a:spcBef>
-              <a:spcAft>
-                <a:spcPts val="500"/>
-              </a:spcAft>
-            </a:pPr>
-            <a:r>
-              <a:rPr sz="1450" b="0" i="0">
-                <a:solidFill>
-                  <a:srgbClr val="444444"/>
-                </a:solidFill>
-                <a:latin typeface="Iowan Old Style"/>
-              </a:rPr>
-              <a:t>·  Pídele que te explique el cambio, no solo el código.</a:t>
-            </a:r>
-          </a:p>
-          <a:p>
-            <a:pPr>
-              <a:lnSpc>
-                <a:spcPct val="140000"/>
-              </a:lnSpc>
-              <a:spcBef>
-                <a:spcPts val="0"/>
-              </a:spcBef>
-              <a:spcAft>
-                <a:spcPts val="500"/>
-              </a:spcAft>
-            </a:pPr>
-            <a:r>
-              <a:rPr sz="1450" b="0" i="0">
-                <a:solidFill>
-                  <a:srgbClr val="444444"/>
-                </a:solidFill>
-                <a:latin typeface="Iowan Old Style"/>
-              </a:rPr>
-              <a:t>·  No aceptes una reescritura completa.</a:t>
-            </a:r>
-          </a:p>
-          <a:p>
-            <a:pPr>
-              <a:lnSpc>
-                <a:spcPct val="125000"/>
-              </a:lnSpc>
-              <a:spcBef>
-                <a:spcPts val="1000"/>
-              </a:spcBef>
-              <a:spcAft>
-                <a:spcPts val="300"/>
-              </a:spcAft>
-            </a:pPr>
-            <a:r>
-              <a:rPr sz="1000" b="0" i="0" spc="300">
-                <a:solidFill>
-                  <a:srgbClr val="887000"/>
-                </a:solidFill>
-                <a:latin typeface="Menlo"/>
-              </a:rPr>
-              <a:t>POR QUÉ IMPORTA</a:t>
-            </a:r>
-          </a:p>
-          <a:p>
-            <a:pPr>
-              <a:lnSpc>
-                <a:spcPct val="140000"/>
-              </a:lnSpc>
-              <a:spcBef>
-                <a:spcPts val="0"/>
-              </a:spcBef>
-              <a:spcAft>
-                <a:spcPts val="800"/>
-              </a:spcAft>
-            </a:pPr>
-            <a:r>
-              <a:rPr sz="1400" b="1" i="0">
-                <a:solidFill>
-                  <a:srgbClr val="0A0A0A"/>
-                </a:solidFill>
-                <a:latin typeface="Iowan Old Style"/>
-              </a:rPr>
-              <a:t>Si le das la web entera te la devuelve reescrita de arriba abajo. Funcionará, pero ya no sabrás dónde tocar — y eso es justo lo que has venido a aprender.</a:t>
+              <a:t>Los detalles que faltan, dónde buscar, y cómo pedir ayuda sin perder tu web.</a:t>
             </a:r>
           </a:p>
         </p:txBody>
@@ -8188,7 +8503,7 @@
             <a:avLst/>
           </a:prstGeom>
           <a:solidFill>
-            <a:srgbClr val="FAFAFA"/>
+            <a:srgbClr val="FFFFFF"/>
           </a:solidFill>
           <a:ln>
             <a:noFill/>
@@ -8225,8 +8540,8 @@
         </p:nvSpPr>
         <p:spPr>
           <a:xfrm>
-            <a:off x="777240" y="777240"/>
-            <a:ext cx="10637215" cy="274320"/>
+            <a:off x="777240" y="310896"/>
+            <a:ext cx="10637215" cy="219456"/>
           </a:xfrm>
           <a:prstGeom prst="rect">
             <a:avLst/>
@@ -8251,20 +8566,65 @@
               </a:spcAft>
             </a:pPr>
             <a:r>
+              <a:rPr sz="950" b="0" i="0" spc="800">
+                <a:solidFill>
+                  <a:srgbClr val="8A8A8A"/>
+                </a:solidFill>
+                <a:latin typeface="Menlo"/>
+              </a:rPr>
+              <a:t>TEORÍA</a:t>
+            </a:r>
+          </a:p>
+        </p:txBody>
+      </p:sp>
+      <p:sp>
+        <p:nvSpPr>
+          <p:cNvPr id="4" name="TextBox 3"/>
+          <p:cNvSpPr txBox="1"/>
+          <p:nvPr/>
+        </p:nvSpPr>
+        <p:spPr>
+          <a:xfrm>
+            <a:off x="777240" y="777240"/>
+            <a:ext cx="10637215" cy="274320"/>
+          </a:xfrm>
+          <a:prstGeom prst="rect">
+            <a:avLst/>
+          </a:prstGeom>
+          <a:noFill/>
+        </p:spPr>
+        <p:txBody>
+          <a:bodyPr wrap="square" lIns="0" rIns="0" tIns="0" bIns="0">
+            <a:spAutoFit/>
+          </a:bodyPr>
+          <a:lstStyle/>
+          <a:p>
+            <a:pPr>
+              <a:lnSpc>
+                <a:spcPct val="125000"/>
+              </a:lnSpc>
+              <a:spcBef>
+                <a:spcPts val="0"/>
+              </a:spcBef>
+              <a:spcAft>
+                <a:spcPts val="600"/>
+              </a:spcAft>
+            </a:pPr>
+            <a:r>
               <a:rPr sz="1000" b="0" i="0" spc="300">
                 <a:solidFill>
                   <a:srgbClr val="8A8A8A"/>
                 </a:solidFill>
                 <a:latin typeface="Menlo"/>
               </a:rPr>
-              <a:t>02:15   ·   SEGUIR POR TU CUENTA</a:t>
-            </a:r>
-          </a:p>
-        </p:txBody>
-      </p:sp>
-      <p:sp>
-        <p:nvSpPr>
-          <p:cNvPr id="4" name="Rectangle 3"/>
+              <a:t>02:15</a:t>
+            </a:r>
+          </a:p>
+        </p:txBody>
+      </p:sp>
+      <p:sp>
+        <p:nvSpPr>
+          <p:cNvPr id="5" name="Rectangle 4"/>
           <p:cNvSpPr/>
           <p:nvPr/>
         </p:nvSpPr>
@@ -8308,7 +8668,7 @@
       </p:sp>
       <p:sp>
         <p:nvSpPr>
-          <p:cNvPr id="5" name="TextBox 4"/>
+          <p:cNvPr id="6" name="TextBox 5"/>
           <p:cNvSpPr txBox="1"/>
           <p:nvPr/>
         </p:nvSpPr>
@@ -8346,14 +8706,14 @@
                 </a:solidFill>
                 <a:latin typeface="Inknut Antiqua"/>
               </a:rPr>
-              <a:t>dónde buscar</a:t>
-            </a:r>
-          </a:p>
-        </p:txBody>
-      </p:sp>
-      <p:sp>
-        <p:nvSpPr>
-          <p:cNvPr id="6" name="TextBox 5"/>
+              <a:t>cuando algo no funciona</a:t>
+            </a:r>
+          </a:p>
+        </p:txBody>
+      </p:sp>
+      <p:sp>
+        <p:nvSpPr>
+          <p:cNvPr id="7" name="TextBox 6"/>
           <p:cNvSpPr txBox="1"/>
           <p:nvPr/>
         </p:nvSpPr>
@@ -8375,175 +8735,133 @@
           <a:p>
             <a:pPr>
               <a:lnSpc>
-                <a:spcPct val="132000"/>
-              </a:lnSpc>
-              <a:spcAft>
-                <a:spcPts val="600"/>
-              </a:spcAft>
-            </a:pPr>
-            <a:r>
-              <a:rPr sz="1300">
-                <a:solidFill>
-                  <a:srgbClr val="0A0A0A"/>
-                </a:solidFill>
-                <a:latin typeface="Inknut Antiqua"/>
-                <a:hlinkClick r:id="rId2"/>
-              </a:rPr>
-              <a:t>→ mdn   </a:t>
-            </a:r>
-            <a:r>
-              <a:rPr sz="1250">
-                <a:solidFill>
-                  <a:srgbClr val="8A8A8A"/>
+                <a:spcPct val="140000"/>
+              </a:lnSpc>
+              <a:spcBef>
+                <a:spcPts val="0"/>
+              </a:spcBef>
+              <a:spcAft>
+                <a:spcPts val="500"/>
+              </a:spcAft>
+            </a:pPr>
+            <a:r>
+              <a:rPr sz="1450" b="0" i="0">
+                <a:solidFill>
+                  <a:srgbClr val="444444"/>
                 </a:solidFill>
                 <a:latin typeface="Iowan Old Style"/>
               </a:rPr>
-              <a:t>La documentación de referencia de HTML y CSS. Es lo que consulta quien se dedica a esto.</a:t>
-            </a:r>
-          </a:p>
-          <a:p>
-            <a:pPr>
-              <a:lnSpc>
-                <a:spcPct val="132000"/>
-              </a:lnSpc>
-              <a:spcAft>
-                <a:spcPts val="600"/>
-              </a:spcAft>
-            </a:pPr>
-            <a:r>
-              <a:rPr sz="1300">
-                <a:solidFill>
-                  <a:srgbClr val="0A0A0A"/>
-                </a:solidFill>
-                <a:latin typeface="Inknut Antiqua"/>
-                <a:hlinkClick r:id="rId3"/>
-              </a:rPr>
-              <a:t>→ neocities   </a:t>
-            </a:r>
-            <a:r>
-              <a:rPr sz="1250">
-                <a:solidFill>
-                  <a:srgbClr val="8A8A8A"/>
+              <a:t>·  ¿Has guardado el archivo?</a:t>
+            </a:r>
+          </a:p>
+          <a:p>
+            <a:pPr>
+              <a:lnSpc>
+                <a:spcPct val="140000"/>
+              </a:lnSpc>
+              <a:spcBef>
+                <a:spcPts val="0"/>
+              </a:spcBef>
+              <a:spcAft>
+                <a:spcPts val="500"/>
+              </a:spcAft>
+            </a:pPr>
+            <a:r>
+              <a:rPr sz="1450" b="0" i="0">
+                <a:solidFill>
+                  <a:srgbClr val="444444"/>
                 </a:solidFill>
                 <a:latin typeface="Iowan Old Style"/>
               </a:rPr>
-              <a:t>Miles de webs personales hechas a mano. Para mirar cómo están hechas y para no sentirse sola.</a:t>
-            </a:r>
-          </a:p>
-          <a:p>
-            <a:pPr>
-              <a:lnSpc>
-                <a:spcPct val="132000"/>
-              </a:lnSpc>
-              <a:spcAft>
-                <a:spcPts val="600"/>
-              </a:spcAft>
-            </a:pPr>
-            <a:r>
-              <a:rPr sz="1300">
-                <a:solidFill>
-                  <a:srgbClr val="0A0A0A"/>
-                </a:solidFill>
-                <a:latin typeface="Inknut Antiqua"/>
-                <a:hlinkClick r:id="rId4"/>
-              </a:rPr>
-              <a:t>→ p5.js   </a:t>
-            </a:r>
-            <a:r>
-              <a:rPr sz="1250">
-                <a:solidFill>
-                  <a:srgbClr val="8A8A8A"/>
+              <a:t>·  ¿Has recargado? Recarga forzada: Cmd+Shift+R o Ctrl+F5.</a:t>
+            </a:r>
+          </a:p>
+          <a:p>
+            <a:pPr>
+              <a:lnSpc>
+                <a:spcPct val="140000"/>
+              </a:lnSpc>
+              <a:spcBef>
+                <a:spcPts val="0"/>
+              </a:spcBef>
+              <a:spcAft>
+                <a:spcPts val="500"/>
+              </a:spcAft>
+            </a:pPr>
+            <a:r>
+              <a:rPr sz="1450" b="0" i="0">
+                <a:solidFill>
+                  <a:srgbClr val="444444"/>
                 </a:solidFill>
                 <a:latin typeface="Iowan Old Style"/>
               </a:rPr>
-              <a:t>Dibujo y animación con código, con editor online.</a:t>
-            </a:r>
-          </a:p>
-          <a:p>
-            <a:pPr>
-              <a:lnSpc>
-                <a:spcPct val="132000"/>
-              </a:lnSpc>
-              <a:spcAft>
-                <a:spcPts val="600"/>
-              </a:spcAft>
-            </a:pPr>
-            <a:r>
-              <a:rPr sz="1300">
-                <a:solidFill>
-                  <a:srgbClr val="0A0A0A"/>
-                </a:solidFill>
-                <a:latin typeface="Inknut Antiqua"/>
-                <a:hlinkClick r:id="rId5"/>
-              </a:rPr>
-              <a:t>→ caniuse   </a:t>
-            </a:r>
-            <a:r>
-              <a:rPr sz="1250">
-                <a:solidFill>
-                  <a:srgbClr val="8A8A8A"/>
+              <a:t>·  ¿Falta cerrar una etiqueta, una comilla o un punto y coma? VS Code lo marca en color.</a:t>
+            </a:r>
+          </a:p>
+          <a:p>
+            <a:pPr>
+              <a:lnSpc>
+                <a:spcPct val="140000"/>
+              </a:lnSpc>
+              <a:spcBef>
+                <a:spcPts val="0"/>
+              </a:spcBef>
+              <a:spcAft>
+                <a:spcPts val="500"/>
+              </a:spcAft>
+            </a:pPr>
+            <a:r>
+              <a:rPr sz="1450" b="0" i="0">
+                <a:solidFill>
+                  <a:srgbClr val="444444"/>
                 </a:solidFill>
                 <a:latin typeface="Iowan Old Style"/>
               </a:rPr>
-              <a:t>Comprobar si algo funciona en todos los navegadores.</a:t>
-            </a:r>
-          </a:p>
-          <a:p>
-            <a:pPr>
-              <a:lnSpc>
-                <a:spcPct val="132000"/>
-              </a:lnSpc>
-              <a:spcAft>
-                <a:spcPts val="600"/>
-              </a:spcAft>
-            </a:pPr>
-            <a:r>
-              <a:rPr sz="1300">
-                <a:solidFill>
-                  <a:srgbClr val="0A0A0A"/>
-                </a:solidFill>
-                <a:latin typeface="Inknut Antiqua"/>
-                <a:hlinkClick r:id="rId6"/>
-              </a:rPr>
-              <a:t>→ squoosh   </a:t>
-            </a:r>
-            <a:r>
-              <a:rPr sz="1250">
-                <a:solidFill>
-                  <a:srgbClr val="8A8A8A"/>
+              <a:t>·  ¿Una imagen no sale? El nombre del archivo y el src tienen que coincidir exactamente — mayúsculas y extensión incluidas. .JPG no es .jpg.</a:t>
+            </a:r>
+          </a:p>
+          <a:p>
+            <a:pPr>
+              <a:lnSpc>
+                <a:spcPct val="140000"/>
+              </a:lnSpc>
+              <a:spcBef>
+                <a:spcPts val="0"/>
+              </a:spcBef>
+              <a:spcAft>
+                <a:spcPts val="500"/>
+              </a:spcAft>
+            </a:pPr>
+            <a:r>
+              <a:rPr sz="1450" b="0" i="0">
+                <a:solidFill>
+                  <a:srgbClr val="444444"/>
                 </a:solidFill>
                 <a:latin typeface="Iowan Old Style"/>
               </a:rPr>
-              <a:t>Reducir imágenes en el navegador, sin instalar nada.</a:t>
-            </a:r>
-          </a:p>
-          <a:p>
-            <a:pPr>
-              <a:lnSpc>
-                <a:spcPct val="132000"/>
-              </a:lnSpc>
-              <a:spcAft>
-                <a:spcPts val="600"/>
-              </a:spcAft>
-            </a:pPr>
-            <a:r>
-              <a:rPr sz="1300">
-                <a:solidFill>
-                  <a:srgbClr val="0A0A0A"/>
-                </a:solidFill>
-                <a:latin typeface="Inknut Antiqua"/>
-                <a:hlinkClick r:id="rId7"/>
-              </a:rPr>
-              <a:t>→ coolors   </a:t>
-            </a:r>
-            <a:r>
-              <a:rPr sz="1250">
-                <a:solidFill>
-                  <a:srgbClr val="8A8A8A"/>
+              <a:t>·  Botón derecho → Inspeccionar → pestaña Console. Si hay un error, está escrito ahí.</a:t>
+            </a:r>
+          </a:p>
+          <a:p>
+            <a:pPr>
+              <a:lnSpc>
+                <a:spcPct val="140000"/>
+              </a:lnSpc>
+              <a:spcBef>
+                <a:spcPts val="0"/>
+              </a:spcBef>
+              <a:spcAft>
+                <a:spcPts val="500"/>
+              </a:spcAft>
+            </a:pPr>
+            <a:r>
+              <a:rPr sz="1450" b="0" i="0">
+                <a:solidFill>
+                  <a:srgbClr val="444444"/>
                 </a:solidFill>
                 <a:latin typeface="Iowan Old Style"/>
               </a:rPr>
-              <a:t>Generador de paletas de color.</a:t>
+              <a:t>·  Vuelve a la última copia que iba bien y avanza otra vez desde ahí.</a:t>
             </a:r>
           </a:p>
         </p:txBody>
@@ -8618,8 +8936,8 @@
         </p:nvSpPr>
         <p:spPr>
           <a:xfrm>
-            <a:off x="777240" y="777240"/>
-            <a:ext cx="10637215" cy="274320"/>
+            <a:off x="777240" y="310896"/>
+            <a:ext cx="10637215" cy="219456"/>
           </a:xfrm>
           <a:prstGeom prst="rect">
             <a:avLst/>
@@ -8644,20 +8962,65 @@
               </a:spcAft>
             </a:pPr>
             <a:r>
+              <a:rPr sz="950" b="0" i="0" spc="800">
+                <a:solidFill>
+                  <a:srgbClr val="8A8A8A"/>
+                </a:solidFill>
+                <a:latin typeface="Menlo"/>
+              </a:rPr>
+              <a:t>TEORÍA</a:t>
+            </a:r>
+          </a:p>
+        </p:txBody>
+      </p:sp>
+      <p:sp>
+        <p:nvSpPr>
+          <p:cNvPr id="4" name="TextBox 3"/>
+          <p:cNvSpPr txBox="1"/>
+          <p:nvPr/>
+        </p:nvSpPr>
+        <p:spPr>
+          <a:xfrm>
+            <a:off x="777240" y="777240"/>
+            <a:ext cx="10637215" cy="274320"/>
+          </a:xfrm>
+          <a:prstGeom prst="rect">
+            <a:avLst/>
+          </a:prstGeom>
+          <a:noFill/>
+        </p:spPr>
+        <p:txBody>
+          <a:bodyPr wrap="square" lIns="0" rIns="0" tIns="0" bIns="0">
+            <a:spAutoFit/>
+          </a:bodyPr>
+          <a:lstStyle/>
+          <a:p>
+            <a:pPr>
+              <a:lnSpc>
+                <a:spcPct val="125000"/>
+              </a:lnSpc>
+              <a:spcBef>
+                <a:spcPts val="0"/>
+              </a:spcBef>
+              <a:spcAft>
+                <a:spcPts val="600"/>
+              </a:spcAft>
+            </a:pPr>
+            <a:r>
               <a:rPr sz="1000" b="0" i="0" spc="300">
                 <a:solidFill>
                   <a:srgbClr val="8A8A8A"/>
                 </a:solidFill>
                 <a:latin typeface="Menlo"/>
               </a:rPr>
-              <a:t>02:40   ·   CONSULTORIO</a:t>
-            </a:r>
-          </a:p>
-        </p:txBody>
-      </p:sp>
-      <p:sp>
-        <p:nvSpPr>
-          <p:cNvPr id="4" name="Rectangle 3"/>
+              <a:t>02:15</a:t>
+            </a:r>
+          </a:p>
+        </p:txBody>
+      </p:sp>
+      <p:sp>
+        <p:nvSpPr>
+          <p:cNvPr id="5" name="Rectangle 4"/>
           <p:cNvSpPr/>
           <p:nvPr/>
         </p:nvSpPr>
@@ -8701,7 +9064,7 @@
       </p:sp>
       <p:sp>
         <p:nvSpPr>
-          <p:cNvPr id="5" name="TextBox 4"/>
+          <p:cNvPr id="6" name="TextBox 5"/>
           <p:cNvSpPr txBox="1"/>
           <p:nvPr/>
         </p:nvSpPr>
@@ -8739,14 +9102,14 @@
                 </a:solidFill>
                 <a:latin typeface="Inknut Antiqua"/>
               </a:rPr>
-              <a:t>las preguntas de siempre</a:t>
-            </a:r>
-          </a:p>
-        </p:txBody>
-      </p:sp>
-      <p:sp>
-        <p:nvSpPr>
-          <p:cNvPr id="6" name="TextBox 5"/>
+              <a:t>pedirle ayuda a una inteligencia artificial</a:t>
+            </a:r>
+          </a:p>
+        </p:txBody>
+      </p:sp>
+      <p:sp>
+        <p:nvSpPr>
+          <p:cNvPr id="7" name="TextBox 6"/>
           <p:cNvSpPr txBox="1"/>
           <p:nvPr/>
         </p:nvSpPr>
@@ -8768,169 +9131,111 @@
           <a:p>
             <a:pPr>
               <a:lnSpc>
-                <a:spcPct val="126900"/>
-              </a:lnSpc>
-              <a:spcAft>
-                <a:spcPts val="332"/>
-              </a:spcAft>
-            </a:pPr>
-            <a:r>
-              <a:rPr sz="950">
+                <a:spcPct val="140000"/>
+              </a:lnSpc>
+              <a:spcBef>
+                <a:spcPts val="0"/>
+              </a:spcBef>
+              <a:spcAft>
+                <a:spcPts val="500"/>
+              </a:spcAft>
+            </a:pPr>
+            <a:r>
+              <a:rPr sz="1450" b="0" i="0">
+                <a:solidFill>
+                  <a:srgbClr val="444444"/>
+                </a:solidFill>
+                <a:latin typeface="Iowan Old Style"/>
+              </a:rPr>
+              <a:t>·  Pega solo el trozo que falla, no la web entera.</a:t>
+            </a:r>
+          </a:p>
+          <a:p>
+            <a:pPr>
+              <a:lnSpc>
+                <a:spcPct val="140000"/>
+              </a:lnSpc>
+              <a:spcBef>
+                <a:spcPts val="0"/>
+              </a:spcBef>
+              <a:spcAft>
+                <a:spcPts val="500"/>
+              </a:spcAft>
+            </a:pPr>
+            <a:r>
+              <a:rPr sz="1450" b="0" i="0">
+                <a:solidFill>
+                  <a:srgbClr val="444444"/>
+                </a:solidFill>
+                <a:latin typeface="Iowan Old Style"/>
+              </a:rPr>
+              <a:t>·  Pídele que te explique el cambio, no solo el código.</a:t>
+            </a:r>
+          </a:p>
+          <a:p>
+            <a:pPr>
+              <a:lnSpc>
+                <a:spcPct val="140000"/>
+              </a:lnSpc>
+              <a:spcBef>
+                <a:spcPts val="0"/>
+              </a:spcBef>
+              <a:spcAft>
+                <a:spcPts val="500"/>
+              </a:spcAft>
+            </a:pPr>
+            <a:r>
+              <a:rPr sz="1450" b="0" i="0">
+                <a:solidFill>
+                  <a:srgbClr val="444444"/>
+                </a:solidFill>
+                <a:latin typeface="Iowan Old Style"/>
+              </a:rPr>
+              <a:t>·  No aceptes una reescritura completa.</a:t>
+            </a:r>
+          </a:p>
+          <a:p>
+            <a:pPr>
+              <a:lnSpc>
+                <a:spcPct val="125000"/>
+              </a:lnSpc>
+              <a:spcBef>
+                <a:spcPts val="1000"/>
+              </a:spcBef>
+              <a:spcAft>
+                <a:spcPts val="300"/>
+              </a:spcAft>
+            </a:pPr>
+            <a:r>
+              <a:rPr sz="1000" b="0" i="0" spc="300">
+                <a:solidFill>
+                  <a:srgbClr val="887000"/>
+                </a:solidFill>
+                <a:latin typeface="Menlo"/>
+              </a:rPr>
+              <a:t>POR QUÉ IMPORTA</a:t>
+            </a:r>
+          </a:p>
+          <a:p>
+            <a:pPr>
+              <a:lnSpc>
+                <a:spcPct val="140000"/>
+              </a:lnSpc>
+              <a:spcBef>
+                <a:spcPts val="0"/>
+              </a:spcBef>
+              <a:spcAft>
+                <a:spcPts val="800"/>
+              </a:spcAft>
+            </a:pPr>
+            <a:r>
+              <a:rPr sz="1400" b="1" i="0">
                 <a:solidFill>
                   <a:srgbClr val="0A0A0A"/>
                 </a:solidFill>
-                <a:latin typeface="Menlo"/>
-              </a:rPr>
-              <a:t>¿un formulario de contacto?    </a:t>
-            </a:r>
-            <a:r>
-              <a:rPr sz="950">
-                <a:solidFill>
-                  <a:srgbClr val="444444"/>
-                </a:solidFill>
                 <a:latin typeface="Iowan Old Style"/>
               </a:rPr>
-              <a:t>Necesita un servidor. Hay servicios que lo resuelven pegando unas líneas (Formspree, Tally). El consejo honesto: pon tu correo con mailto:. No se rompe nunca y a nadie le ha costado nunca un encargo.</a:t>
-            </a:r>
-          </a:p>
-          <a:p>
-            <a:pPr>
-              <a:lnSpc>
-                <a:spcPct val="126900"/>
-              </a:lnSpc>
-              <a:spcAft>
-                <a:spcPts val="332"/>
-              </a:spcAft>
-            </a:pPr>
-            <a:r>
-              <a:rPr sz="950">
-                <a:solidFill>
-                  <a:srgbClr val="0A0A0A"/>
-                </a:solidFill>
-                <a:latin typeface="Menlo"/>
-              </a:rPr>
-              <a:t>¿un blog?    </a:t>
-            </a:r>
-            <a:r>
-              <a:rPr sz="950">
-                <a:solidFill>
-                  <a:srgbClr val="444444"/>
-                </a:solidFill>
-                <a:latin typeface="Iowan Old Style"/>
-              </a:rPr>
-              <a:t>Sí, con una limitación: cada entrada es un archivo que creas a mano. Para tres o cuatro al año, perfecto. Para escribir cada semana, cansa.</a:t>
-            </a:r>
-          </a:p>
-          <a:p>
-            <a:pPr>
-              <a:lnSpc>
-                <a:spcPct val="126900"/>
-              </a:lnSpc>
-              <a:spcAft>
-                <a:spcPts val="332"/>
-              </a:spcAft>
-            </a:pPr>
-            <a:r>
-              <a:rPr sz="950">
-                <a:solidFill>
-                  <a:srgbClr val="0A0A0A"/>
-                </a:solidFill>
-                <a:latin typeface="Menlo"/>
-              </a:rPr>
-              <a:t>¿mejor que wordpress o cargo?    </a:t>
-            </a:r>
-            <a:r>
-              <a:rPr sz="950">
-                <a:solidFill>
-                  <a:srgbClr val="444444"/>
-                </a:solidFill>
-                <a:latin typeface="Iowan Old Style"/>
-              </a:rPr>
-              <a:t>Depende. Ganas: no pagas al mes, nadie puede cerrarte la web, carga rápido y dentro de diez años seguirá igual. Pierdes: no hay panel bonito, ni tienda, ni comentarios.</a:t>
-            </a:r>
-          </a:p>
-          <a:p>
-            <a:pPr>
-              <a:lnSpc>
-                <a:spcPct val="126900"/>
-              </a:lnSpc>
-              <a:spcAft>
-                <a:spcPts val="332"/>
-              </a:spcAft>
-            </a:pPr>
-            <a:r>
-              <a:rPr sz="950">
-                <a:solidFill>
-                  <a:srgbClr val="0A0A0A"/>
-                </a:solidFill>
-                <a:latin typeface="Menlo"/>
-              </a:rPr>
-              <a:t>¿puedo vender?    </a:t>
-            </a:r>
-            <a:r>
-              <a:rPr sz="950">
-                <a:solidFill>
-                  <a:srgbClr val="444444"/>
-                </a:solidFill>
-                <a:latin typeface="Iowan Old Style"/>
-              </a:rPr>
-              <a:t>No con esto. Enlaza a Bandcamp o Big Cartel, que es lo que hace mucha gente.</a:t>
-            </a:r>
-          </a:p>
-          <a:p>
-            <a:pPr>
-              <a:lnSpc>
-                <a:spcPct val="126900"/>
-              </a:lnSpc>
-              <a:spcAft>
-                <a:spcPts val="332"/>
-              </a:spcAft>
-            </a:pPr>
-            <a:r>
-              <a:rPr sz="950">
-                <a:solidFill>
-                  <a:srgbClr val="0A0A0A"/>
-                </a:solidFill>
-                <a:latin typeface="Menlo"/>
-              </a:rPr>
-              <a:t>¿cómo salgo en google?    </a:t>
-            </a:r>
-            <a:r>
-              <a:rPr sz="950">
-                <a:solidFill>
-                  <a:srgbClr val="444444"/>
-                </a:solidFill>
-                <a:latin typeface="Iowan Old Style"/>
-              </a:rPr>
-              <a:t>Tres cosas gratis: un &lt;title&gt; propio por página, los textos como texto y no dentro de imágenes, y que otras webs te enlacen. Lo demás que te vendan sobre SEO, para una web de artista, es humo.</a:t>
-            </a:r>
-          </a:p>
-          <a:p>
-            <a:pPr>
-              <a:lnSpc>
-                <a:spcPct val="126900"/>
-              </a:lnSpc>
-              <a:spcAft>
-                <a:spcPts val="332"/>
-              </a:spcAft>
-            </a:pPr>
-            <a:r>
-              <a:rPr sz="950">
-                <a:solidFill>
-                  <a:srgbClr val="0A0A0A"/>
-                </a:solidFill>
-                <a:latin typeface="Menlo"/>
-              </a:rPr>
-              <a:t>¿cuánta gente entra?    </a:t>
-            </a:r>
-            <a:r>
-              <a:rPr sz="950">
-                <a:solidFill>
-                  <a:srgbClr val="444444"/>
-                </a:solidFill>
-                <a:latin typeface="Iowan Old Style"/>
-              </a:rPr>
-              <a:t>Hay contadores que respetan la privacidad. Pero pregúntate primero si el dato te va a servir para algo.</a:t>
+              <a:t>Si le das la web entera te la devuelve reescrita de arriba abajo. Funcionará, pero ya no sabrás dónde tocar — y eso es justo lo que has venido a aprender.</a:t>
             </a:r>
           </a:p>
         </p:txBody>
@@ -9005,8 +9310,8 @@
         </p:nvSpPr>
         <p:spPr>
           <a:xfrm>
-            <a:off x="777240" y="777240"/>
-            <a:ext cx="10637215" cy="274320"/>
+            <a:off x="777240" y="310896"/>
+            <a:ext cx="10637215" cy="219456"/>
           </a:xfrm>
           <a:prstGeom prst="rect">
             <a:avLst/>
@@ -9031,20 +9336,65 @@
               </a:spcAft>
             </a:pPr>
             <a:r>
+              <a:rPr sz="950" b="0" i="0" spc="800">
+                <a:solidFill>
+                  <a:srgbClr val="8A8A8A"/>
+                </a:solidFill>
+                <a:latin typeface="Menlo"/>
+              </a:rPr>
+              <a:t>TEORÍA</a:t>
+            </a:r>
+          </a:p>
+        </p:txBody>
+      </p:sp>
+      <p:sp>
+        <p:nvSpPr>
+          <p:cNvPr id="4" name="TextBox 3"/>
+          <p:cNvSpPr txBox="1"/>
+          <p:nvPr/>
+        </p:nvSpPr>
+        <p:spPr>
+          <a:xfrm>
+            <a:off x="777240" y="777240"/>
+            <a:ext cx="10637215" cy="274320"/>
+          </a:xfrm>
+          <a:prstGeom prst="rect">
+            <a:avLst/>
+          </a:prstGeom>
+          <a:noFill/>
+        </p:spPr>
+        <p:txBody>
+          <a:bodyPr wrap="square" lIns="0" rIns="0" tIns="0" bIns="0">
+            <a:spAutoFit/>
+          </a:bodyPr>
+          <a:lstStyle/>
+          <a:p>
+            <a:pPr>
+              <a:lnSpc>
+                <a:spcPct val="125000"/>
+              </a:lnSpc>
+              <a:spcBef>
+                <a:spcPts val="0"/>
+              </a:spcBef>
+              <a:spcAft>
+                <a:spcPts val="600"/>
+              </a:spcAft>
+            </a:pPr>
+            <a:r>
               <a:rPr sz="1000" b="0" i="0" spc="300">
                 <a:solidFill>
                   <a:srgbClr val="8A8A8A"/>
                 </a:solidFill>
                 <a:latin typeface="Menlo"/>
               </a:rPr>
-              <a:t>MUESTRARIO   ·   SI TE QUEDAS CON GANAS</a:t>
-            </a:r>
-          </a:p>
-        </p:txBody>
-      </p:sp>
-      <p:sp>
-        <p:nvSpPr>
-          <p:cNvPr id="4" name="Rectangle 3"/>
+              <a:t>02:15   ·   SEGUIR POR TU CUENTA</a:t>
+            </a:r>
+          </a:p>
+        </p:txBody>
+      </p:sp>
+      <p:sp>
+        <p:nvSpPr>
+          <p:cNvPr id="5" name="Rectangle 4"/>
           <p:cNvSpPr/>
           <p:nvPr/>
         </p:nvSpPr>
@@ -9088,7 +9438,7 @@
       </p:sp>
       <p:sp>
         <p:nvSpPr>
-          <p:cNvPr id="5" name="TextBox 4"/>
+          <p:cNvPr id="6" name="TextBox 5"/>
           <p:cNvSpPr txBox="1"/>
           <p:nvPr/>
         </p:nvSpPr>
@@ -9126,14 +9476,14 @@
                 </a:solidFill>
                 <a:latin typeface="Inknut Antiqua"/>
               </a:rPr>
-              <a:t>hasta dónde se puede llegar</a:t>
-            </a:r>
-          </a:p>
-        </p:txBody>
-      </p:sp>
-      <p:sp>
-        <p:nvSpPr>
-          <p:cNvPr id="6" name="TextBox 5"/>
+              <a:t>dónde buscar</a:t>
+            </a:r>
+          </a:p>
+        </p:txBody>
+      </p:sp>
+      <p:sp>
+        <p:nvSpPr>
+          <p:cNvPr id="7" name="TextBox 6"/>
           <p:cNvSpPr txBox="1"/>
           <p:nvPr/>
         </p:nvSpPr>
@@ -9155,28 +9505,6 @@
           <a:p>
             <a:pPr>
               <a:lnSpc>
-                <a:spcPct val="142000"/>
-              </a:lnSpc>
-              <a:spcBef>
-                <a:spcPts val="0"/>
-              </a:spcBef>
-              <a:spcAft>
-                <a:spcPts val="900"/>
-              </a:spcAft>
-            </a:pPr>
-            <a:r>
-              <a:rPr sz="1500" b="0" i="0">
-                <a:solidFill>
-                  <a:srgbClr val="444444"/>
-                </a:solidFill>
-                <a:latin typeface="Iowan Old Style"/>
-              </a:rPr>
-              <a:t>Todo esto son archivos sueltos que se publican igual que tu web: los subes y ya está.</a:t>
-            </a:r>
-          </a:p>
-          <a:p>
-            <a:pPr>
-              <a:lnSpc>
                 <a:spcPct val="132000"/>
               </a:lnSpc>
               <a:spcAft>
@@ -9191,7 +9519,7 @@
                 <a:latin typeface="Inknut Antiqua"/>
                 <a:hlinkClick r:id="rId2"/>
               </a:rPr>
-              <a:t>→ save the date   </a:t>
+              <a:t>→ mdn   </a:t>
             </a:r>
             <a:r>
               <a:rPr sz="1250">
@@ -9200,7 +9528,7 @@
                 </a:solidFill>
                 <a:latin typeface="Iowan Old Style"/>
               </a:rPr>
-              <a:t>Cuenta atrás en vivo y botón «añadir al calendario».</a:t>
+              <a:t>La documentación de referencia de HTML y CSS. Es lo que consulta quien se dedica a esto.</a:t>
             </a:r>
           </a:p>
           <a:p>
@@ -9220,7 +9548,7 @@
                 <a:latin typeface="Inknut Antiqua"/>
                 <a:hlinkClick r:id="rId3"/>
               </a:rPr>
-              <a:t>→ cuaderno p5   </a:t>
+              <a:t>→ neocities   </a:t>
             </a:r>
             <a:r>
               <a:rPr sz="1250">
@@ -9229,7 +9557,7 @@
                 </a:solidFill>
                 <a:latin typeface="Iowan Old Style"/>
               </a:rPr>
-              <a:t>Dibujar con código dentro de tu propia web.</a:t>
+              <a:t>Miles de webs personales hechas a mano. Para mirar cómo están hechas y para no sentirse sola.</a:t>
             </a:r>
           </a:p>
           <a:p>
@@ -9249,7 +9577,7 @@
                 <a:latin typeface="Inknut Antiqua"/>
                 <a:hlinkClick r:id="rId4"/>
               </a:rPr>
-              <a:t>→ mesa de trabajo   </a:t>
+              <a:t>→ p5.js   </a:t>
             </a:r>
             <a:r>
               <a:rPr sz="1250">
@@ -9258,7 +9586,7 @@
                 </a:solidFill>
                 <a:latin typeface="Iowan Old Style"/>
               </a:rPr>
-              <a:t>Moodboard con memoria: añades notas e imágenes y guarda el resultado.</a:t>
+              <a:t>Dibujo y animación con código, con editor online.</a:t>
             </a:r>
           </a:p>
           <a:p>
@@ -9278,7 +9606,7 @@
                 <a:latin typeface="Inknut Antiqua"/>
                 <a:hlinkClick r:id="rId5"/>
               </a:rPr>
-              <a:t>→ hydra   </a:t>
+              <a:t>→ caniuse   </a:t>
             </a:r>
             <a:r>
               <a:rPr sz="1250">
@@ -9287,7 +9615,7 @@
                 </a:solidFill>
                 <a:latin typeface="Iowan Old Style"/>
               </a:rPr>
-              <a:t>Visuales en vivo, escritos en código, dentro de una página.</a:t>
+              <a:t>Comprobar si algo funciona en todos los navegadores.</a:t>
             </a:r>
           </a:p>
           <a:p>
@@ -9307,7 +9635,7 @@
                 <a:latin typeface="Inknut Antiqua"/>
                 <a:hlinkClick r:id="rId6"/>
               </a:rPr>
-              <a:t>→ cajita de música   </a:t>
+              <a:t>→ squoosh   </a:t>
             </a:r>
             <a:r>
               <a:rPr sz="1250">
@@ -9316,7 +9644,7 @@
                 </a:solidFill>
                 <a:latin typeface="Iowan Old Style"/>
               </a:rPr>
-              <a:t>Sonido generado en el navegador.</a:t>
+              <a:t>Reducir imágenes en el navegador, sin instalar nada.</a:t>
             </a:r>
           </a:p>
           <a:p>
@@ -9336,7 +9664,7 @@
                 <a:latin typeface="Inknut Antiqua"/>
                 <a:hlinkClick r:id="rId7"/>
               </a:rPr>
-              <a:t>→ ver las 26   </a:t>
+              <a:t>→ coolors   </a:t>
             </a:r>
             <a:r>
               <a:rPr sz="1250">
@@ -9345,7 +9673,7 @@
                 </a:solidFill>
                 <a:latin typeface="Iowan Old Style"/>
               </a:rPr>
-              <a:t>El muestrario entero, ordenado por tipo.</a:t>
+              <a:t>Generador de paletas de color.</a:t>
             </a:r>
           </a:p>
         </p:txBody>
@@ -9383,7 +9711,7 @@
             <a:avLst/>
           </a:prstGeom>
           <a:solidFill>
-            <a:srgbClr val="0A0A0A"/>
+            <a:srgbClr val="FFFFFF"/>
           </a:solidFill>
           <a:ln>
             <a:noFill/>
@@ -9420,8 +9748,8 @@
         </p:nvSpPr>
         <p:spPr>
           <a:xfrm>
-            <a:off x="777240" y="2103120"/>
-            <a:ext cx="10637215" cy="2926080"/>
+            <a:off x="777240" y="310896"/>
+            <a:ext cx="10637215" cy="219456"/>
           </a:xfrm>
           <a:prstGeom prst="rect">
             <a:avLst/>
@@ -9442,61 +9770,342 @@
                 <a:spcPts val="0"/>
               </a:spcBef>
               <a:spcAft>
-                <a:spcPts val="2000"/>
-              </a:spcAft>
-            </a:pPr>
-            <a:r>
-              <a:rPr sz="1100" b="0" i="0" spc="300">
+                <a:spcPts val="600"/>
+              </a:spcAft>
+            </a:pPr>
+            <a:r>
+              <a:rPr sz="950" b="0" i="0" spc="800">
                 <a:solidFill>
                   <a:srgbClr val="8A8A8A"/>
                 </a:solidFill>
                 <a:latin typeface="Menlo"/>
               </a:rPr>
-              <a:t>02:40 · 20 MINUTOS</a:t>
-            </a:r>
-          </a:p>
-          <a:p>
-            <a:pPr>
-              <a:lnSpc>
-                <a:spcPct val="110000"/>
-              </a:lnSpc>
-              <a:spcBef>
-                <a:spcPts val="0"/>
-              </a:spcBef>
-              <a:spcAft>
-                <a:spcPts val="1800"/>
-              </a:spcAft>
-            </a:pPr>
-            <a:r>
-              <a:rPr sz="4000" b="0" i="0">
-                <a:solidFill>
-                  <a:srgbClr val="FFFFFF"/>
+              <a:t>TEORÍA</a:t>
+            </a:r>
+          </a:p>
+        </p:txBody>
+      </p:sp>
+      <p:sp>
+        <p:nvSpPr>
+          <p:cNvPr id="4" name="TextBox 3"/>
+          <p:cNvSpPr txBox="1"/>
+          <p:nvPr/>
+        </p:nvSpPr>
+        <p:spPr>
+          <a:xfrm>
+            <a:off x="777240" y="777240"/>
+            <a:ext cx="10637215" cy="274320"/>
+          </a:xfrm>
+          <a:prstGeom prst="rect">
+            <a:avLst/>
+          </a:prstGeom>
+          <a:noFill/>
+        </p:spPr>
+        <p:txBody>
+          <a:bodyPr wrap="square" lIns="0" rIns="0" tIns="0" bIns="0">
+            <a:spAutoFit/>
+          </a:bodyPr>
+          <a:lstStyle/>
+          <a:p>
+            <a:pPr>
+              <a:lnSpc>
+                <a:spcPct val="125000"/>
+              </a:lnSpc>
+              <a:spcBef>
+                <a:spcPts val="0"/>
+              </a:spcBef>
+              <a:spcAft>
+                <a:spcPts val="600"/>
+              </a:spcAft>
+            </a:pPr>
+            <a:r>
+              <a:rPr sz="1000" b="0" i="0" spc="300">
+                <a:solidFill>
+                  <a:srgbClr val="8A8A8A"/>
+                </a:solidFill>
+                <a:latin typeface="Menlo"/>
+              </a:rPr>
+              <a:t>02:40   ·   CONSULTORIO</a:t>
+            </a:r>
+          </a:p>
+        </p:txBody>
+      </p:sp>
+      <p:sp>
+        <p:nvSpPr>
+          <p:cNvPr id="5" name="Rectangle 4"/>
+          <p:cNvSpPr/>
+          <p:nvPr/>
+        </p:nvSpPr>
+        <p:spPr>
+          <a:xfrm>
+            <a:off x="777240" y="1161288"/>
+            <a:ext cx="10637215" cy="9525"/>
+          </a:xfrm>
+          <a:prstGeom prst="rect">
+            <a:avLst/>
+          </a:prstGeom>
+          <a:solidFill>
+            <a:srgbClr val="D8D8D8"/>
+          </a:solidFill>
+          <a:ln>
+            <a:noFill/>
+          </a:ln>
+          <a:effectLst/>
+        </p:spPr>
+        <p:style>
+          <a:lnRef idx="1">
+            <a:schemeClr val="accent1"/>
+          </a:lnRef>
+          <a:fillRef idx="3">
+            <a:schemeClr val="accent1"/>
+          </a:fillRef>
+          <a:effectRef idx="2">
+            <a:schemeClr val="accent1"/>
+          </a:effectRef>
+          <a:fontRef idx="minor">
+            <a:schemeClr val="lt1"/>
+          </a:fontRef>
+        </p:style>
+        <p:txBody>
+          <a:bodyPr rtlCol="0" anchor="ctr"/>
+          <a:lstStyle/>
+          <a:p>
+            <a:pPr algn="ctr"/>
+          </a:p>
+        </p:txBody>
+      </p:sp>
+      <p:sp>
+        <p:nvSpPr>
+          <p:cNvPr id="6" name="TextBox 5"/>
+          <p:cNvSpPr txBox="1"/>
+          <p:nvPr/>
+        </p:nvSpPr>
+        <p:spPr>
+          <a:xfrm>
+            <a:off x="777240" y="1417320"/>
+            <a:ext cx="10637215" cy="822960"/>
+          </a:xfrm>
+          <a:prstGeom prst="rect">
+            <a:avLst/>
+          </a:prstGeom>
+          <a:noFill/>
+        </p:spPr>
+        <p:txBody>
+          <a:bodyPr wrap="square" lIns="0" rIns="0" tIns="0" bIns="0">
+            <a:spAutoFit/>
+          </a:bodyPr>
+          <a:lstStyle/>
+          <a:p>
+            <a:pPr>
+              <a:lnSpc>
+                <a:spcPct val="112000"/>
+              </a:lnSpc>
+              <a:spcBef>
+                <a:spcPts val="0"/>
+              </a:spcBef>
+              <a:spcAft>
+                <a:spcPts val="600"/>
+              </a:spcAft>
+            </a:pPr>
+            <a:r>
+              <a:rPr sz="2700" b="0" i="0">
+                <a:solidFill>
+                  <a:srgbClr val="0A0A0A"/>
                 </a:solidFill>
                 <a:latin typeface="Inknut Antiqua"/>
               </a:rPr>
-              <a:t>lo que te llevas</a:t>
-            </a:r>
-          </a:p>
-          <a:p>
-            <a:pPr>
-              <a:lnSpc>
-                <a:spcPct val="140000"/>
-              </a:lnSpc>
-              <a:spcBef>
-                <a:spcPts val="0"/>
-              </a:spcBef>
-              <a:spcAft>
-                <a:spcPts val="600"/>
-              </a:spcAft>
-            </a:pPr>
-            <a:r>
-              <a:rPr sz="1700" b="0" i="0">
-                <a:solidFill>
-                  <a:srgbClr val="BBBBBB"/>
+              <a:t>las preguntas de siempre</a:t>
+            </a:r>
+          </a:p>
+        </p:txBody>
+      </p:sp>
+      <p:sp>
+        <p:nvSpPr>
+          <p:cNvPr id="7" name="TextBox 6"/>
+          <p:cNvSpPr txBox="1"/>
+          <p:nvPr/>
+        </p:nvSpPr>
+        <p:spPr>
+          <a:xfrm>
+            <a:off x="777240" y="2057400"/>
+            <a:ext cx="10637215" cy="4251960"/>
+          </a:xfrm>
+          <a:prstGeom prst="rect">
+            <a:avLst/>
+          </a:prstGeom>
+          <a:noFill/>
+        </p:spPr>
+        <p:txBody>
+          <a:bodyPr wrap="square" lIns="0" rIns="0" tIns="0" bIns="0">
+            <a:spAutoFit/>
+          </a:bodyPr>
+          <a:lstStyle/>
+          <a:p>
+            <a:pPr>
+              <a:lnSpc>
+                <a:spcPct val="126900"/>
+              </a:lnSpc>
+              <a:spcAft>
+                <a:spcPts val="332"/>
+              </a:spcAft>
+            </a:pPr>
+            <a:r>
+              <a:rPr sz="950">
+                <a:solidFill>
+                  <a:srgbClr val="0A0A0A"/>
+                </a:solidFill>
+                <a:latin typeface="Menlo"/>
+              </a:rPr>
+              <a:t>¿un formulario de contacto?    </a:t>
+            </a:r>
+            <a:r>
+              <a:rPr sz="950">
+                <a:solidFill>
+                  <a:srgbClr val="444444"/>
                 </a:solidFill>
                 <a:latin typeface="Iowan Old Style"/>
               </a:rPr>
-              <a:t>Y el correo de dudas de las dos semanas siguientes.</a:t>
+              <a:t>Necesita un servidor. Hay servicios que lo resuelven pegando unas líneas (Formspree, Tally). El consejo honesto: pon tu correo con mailto:. No se rompe nunca y a nadie le ha costado nunca un encargo.</a:t>
+            </a:r>
+          </a:p>
+          <a:p>
+            <a:pPr>
+              <a:lnSpc>
+                <a:spcPct val="126900"/>
+              </a:lnSpc>
+              <a:spcAft>
+                <a:spcPts val="332"/>
+              </a:spcAft>
+            </a:pPr>
+            <a:r>
+              <a:rPr sz="950">
+                <a:solidFill>
+                  <a:srgbClr val="0A0A0A"/>
+                </a:solidFill>
+                <a:latin typeface="Menlo"/>
+              </a:rPr>
+              <a:t>¿un blog?    </a:t>
+            </a:r>
+            <a:r>
+              <a:rPr sz="950">
+                <a:solidFill>
+                  <a:srgbClr val="444444"/>
+                </a:solidFill>
+                <a:latin typeface="Iowan Old Style"/>
+              </a:rPr>
+              <a:t>Sí, con una limitación: cada entrada es un archivo que creas a mano. Para tres o cuatro al año, perfecto. Para escribir cada semana, cansa.</a:t>
+            </a:r>
+          </a:p>
+          <a:p>
+            <a:pPr>
+              <a:lnSpc>
+                <a:spcPct val="126900"/>
+              </a:lnSpc>
+              <a:spcAft>
+                <a:spcPts val="332"/>
+              </a:spcAft>
+            </a:pPr>
+            <a:r>
+              <a:rPr sz="950">
+                <a:solidFill>
+                  <a:srgbClr val="0A0A0A"/>
+                </a:solidFill>
+                <a:latin typeface="Menlo"/>
+              </a:rPr>
+              <a:t>¿mejor que wordpress o cargo?    </a:t>
+            </a:r>
+            <a:r>
+              <a:rPr sz="950">
+                <a:solidFill>
+                  <a:srgbClr val="444444"/>
+                </a:solidFill>
+                <a:latin typeface="Iowan Old Style"/>
+              </a:rPr>
+              <a:t>Depende. Ganas: no pagas al mes, nadie puede cerrarte la web, carga rápido y dentro de diez años seguirá igual. Pierdes: no hay panel bonito, ni tienda, ni comentarios.</a:t>
+            </a:r>
+          </a:p>
+          <a:p>
+            <a:pPr>
+              <a:lnSpc>
+                <a:spcPct val="126900"/>
+              </a:lnSpc>
+              <a:spcAft>
+                <a:spcPts val="332"/>
+              </a:spcAft>
+            </a:pPr>
+            <a:r>
+              <a:rPr sz="950">
+                <a:solidFill>
+                  <a:srgbClr val="0A0A0A"/>
+                </a:solidFill>
+                <a:latin typeface="Menlo"/>
+              </a:rPr>
+              <a:t>¿puedo vender?    </a:t>
+            </a:r>
+            <a:r>
+              <a:rPr sz="950">
+                <a:solidFill>
+                  <a:srgbClr val="444444"/>
+                </a:solidFill>
+                <a:latin typeface="Iowan Old Style"/>
+              </a:rPr>
+              <a:t>No con esto. Enlaza a Bandcamp o Big Cartel, que es lo que hace mucha gente.</a:t>
+            </a:r>
+          </a:p>
+          <a:p>
+            <a:pPr>
+              <a:lnSpc>
+                <a:spcPct val="126900"/>
+              </a:lnSpc>
+              <a:spcAft>
+                <a:spcPts val="332"/>
+              </a:spcAft>
+            </a:pPr>
+            <a:r>
+              <a:rPr sz="950">
+                <a:solidFill>
+                  <a:srgbClr val="0A0A0A"/>
+                </a:solidFill>
+                <a:latin typeface="Menlo"/>
+              </a:rPr>
+              <a:t>¿cómo salgo en google?    </a:t>
+            </a:r>
+            <a:r>
+              <a:rPr sz="950">
+                <a:solidFill>
+                  <a:srgbClr val="444444"/>
+                </a:solidFill>
+                <a:latin typeface="Iowan Old Style"/>
+              </a:rPr>
+              <a:t>Tres cosas gratis: un &lt;title&gt; propio por página, los textos como texto y no dentro de imágenes, y que otras webs te enlacen. Lo demás que te vendan sobre SEO, para una web de artista, es humo.</a:t>
+            </a:r>
+          </a:p>
+          <a:p>
+            <a:pPr>
+              <a:lnSpc>
+                <a:spcPct val="126900"/>
+              </a:lnSpc>
+              <a:spcAft>
+                <a:spcPts val="332"/>
+              </a:spcAft>
+            </a:pPr>
+            <a:r>
+              <a:rPr sz="950">
+                <a:solidFill>
+                  <a:srgbClr val="0A0A0A"/>
+                </a:solidFill>
+                <a:latin typeface="Menlo"/>
+              </a:rPr>
+              <a:t>¿cuánta gente entra?    </a:t>
+            </a:r>
+            <a:r>
+              <a:rPr sz="950">
+                <a:solidFill>
+                  <a:srgbClr val="444444"/>
+                </a:solidFill>
+                <a:latin typeface="Iowan Old Style"/>
+              </a:rPr>
+              <a:t>Hay contadores que respetan la privacidad. Pero pregúntate primero si el dato te va a servir para algo.</a:t>
             </a:r>
           </a:p>
         </p:txBody>
@@ -9534,6 +10143,639 @@
             <a:avLst/>
           </a:prstGeom>
           <a:solidFill>
+            <a:srgbClr val="FAFAFA"/>
+          </a:solidFill>
+          <a:ln>
+            <a:noFill/>
+          </a:ln>
+          <a:effectLst/>
+        </p:spPr>
+        <p:style>
+          <a:lnRef idx="1">
+            <a:schemeClr val="accent1"/>
+          </a:lnRef>
+          <a:fillRef idx="3">
+            <a:schemeClr val="accent1"/>
+          </a:fillRef>
+          <a:effectRef idx="2">
+            <a:schemeClr val="accent1"/>
+          </a:effectRef>
+          <a:fontRef idx="minor">
+            <a:schemeClr val="lt1"/>
+          </a:fontRef>
+        </p:style>
+        <p:txBody>
+          <a:bodyPr rtlCol="0" anchor="ctr"/>
+          <a:lstStyle/>
+          <a:p>
+            <a:pPr algn="ctr"/>
+          </a:p>
+        </p:txBody>
+      </p:sp>
+      <p:sp>
+        <p:nvSpPr>
+          <p:cNvPr id="3" name="TextBox 2"/>
+          <p:cNvSpPr txBox="1"/>
+          <p:nvPr/>
+        </p:nvSpPr>
+        <p:spPr>
+          <a:xfrm>
+            <a:off x="777240" y="310896"/>
+            <a:ext cx="10637215" cy="219456"/>
+          </a:xfrm>
+          <a:prstGeom prst="rect">
+            <a:avLst/>
+          </a:prstGeom>
+          <a:noFill/>
+        </p:spPr>
+        <p:txBody>
+          <a:bodyPr wrap="square" lIns="0" rIns="0" tIns="0" bIns="0">
+            <a:spAutoFit/>
+          </a:bodyPr>
+          <a:lstStyle/>
+          <a:p>
+            <a:pPr>
+              <a:lnSpc>
+                <a:spcPct val="125000"/>
+              </a:lnSpc>
+              <a:spcBef>
+                <a:spcPts val="0"/>
+              </a:spcBef>
+              <a:spcAft>
+                <a:spcPts val="600"/>
+              </a:spcAft>
+            </a:pPr>
+            <a:r>
+              <a:rPr sz="950" b="0" i="0" spc="800">
+                <a:solidFill>
+                  <a:srgbClr val="8A8A8A"/>
+                </a:solidFill>
+                <a:latin typeface="Menlo"/>
+              </a:rPr>
+              <a:t>TEORÍA</a:t>
+            </a:r>
+          </a:p>
+        </p:txBody>
+      </p:sp>
+      <p:sp>
+        <p:nvSpPr>
+          <p:cNvPr id="4" name="TextBox 3"/>
+          <p:cNvSpPr txBox="1"/>
+          <p:nvPr/>
+        </p:nvSpPr>
+        <p:spPr>
+          <a:xfrm>
+            <a:off x="777240" y="777240"/>
+            <a:ext cx="10637215" cy="274320"/>
+          </a:xfrm>
+          <a:prstGeom prst="rect">
+            <a:avLst/>
+          </a:prstGeom>
+          <a:noFill/>
+        </p:spPr>
+        <p:txBody>
+          <a:bodyPr wrap="square" lIns="0" rIns="0" tIns="0" bIns="0">
+            <a:spAutoFit/>
+          </a:bodyPr>
+          <a:lstStyle/>
+          <a:p>
+            <a:pPr>
+              <a:lnSpc>
+                <a:spcPct val="125000"/>
+              </a:lnSpc>
+              <a:spcBef>
+                <a:spcPts val="0"/>
+              </a:spcBef>
+              <a:spcAft>
+                <a:spcPts val="600"/>
+              </a:spcAft>
+            </a:pPr>
+            <a:r>
+              <a:rPr sz="1000" b="0" i="0" spc="300">
+                <a:solidFill>
+                  <a:srgbClr val="8A8A8A"/>
+                </a:solidFill>
+                <a:latin typeface="Menlo"/>
+              </a:rPr>
+              <a:t>MUESTRARIO   ·   SI TE QUEDAS CON GANAS</a:t>
+            </a:r>
+          </a:p>
+        </p:txBody>
+      </p:sp>
+      <p:sp>
+        <p:nvSpPr>
+          <p:cNvPr id="5" name="Rectangle 4"/>
+          <p:cNvSpPr/>
+          <p:nvPr/>
+        </p:nvSpPr>
+        <p:spPr>
+          <a:xfrm>
+            <a:off x="777240" y="1161288"/>
+            <a:ext cx="10637215" cy="9525"/>
+          </a:xfrm>
+          <a:prstGeom prst="rect">
+            <a:avLst/>
+          </a:prstGeom>
+          <a:solidFill>
+            <a:srgbClr val="D8D8D8"/>
+          </a:solidFill>
+          <a:ln>
+            <a:noFill/>
+          </a:ln>
+          <a:effectLst/>
+        </p:spPr>
+        <p:style>
+          <a:lnRef idx="1">
+            <a:schemeClr val="accent1"/>
+          </a:lnRef>
+          <a:fillRef idx="3">
+            <a:schemeClr val="accent1"/>
+          </a:fillRef>
+          <a:effectRef idx="2">
+            <a:schemeClr val="accent1"/>
+          </a:effectRef>
+          <a:fontRef idx="minor">
+            <a:schemeClr val="lt1"/>
+          </a:fontRef>
+        </p:style>
+        <p:txBody>
+          <a:bodyPr rtlCol="0" anchor="ctr"/>
+          <a:lstStyle/>
+          <a:p>
+            <a:pPr algn="ctr"/>
+          </a:p>
+        </p:txBody>
+      </p:sp>
+      <p:sp>
+        <p:nvSpPr>
+          <p:cNvPr id="6" name="TextBox 5"/>
+          <p:cNvSpPr txBox="1"/>
+          <p:nvPr/>
+        </p:nvSpPr>
+        <p:spPr>
+          <a:xfrm>
+            <a:off x="777240" y="1417320"/>
+            <a:ext cx="10637215" cy="822960"/>
+          </a:xfrm>
+          <a:prstGeom prst="rect">
+            <a:avLst/>
+          </a:prstGeom>
+          <a:noFill/>
+        </p:spPr>
+        <p:txBody>
+          <a:bodyPr wrap="square" lIns="0" rIns="0" tIns="0" bIns="0">
+            <a:spAutoFit/>
+          </a:bodyPr>
+          <a:lstStyle/>
+          <a:p>
+            <a:pPr>
+              <a:lnSpc>
+                <a:spcPct val="112000"/>
+              </a:lnSpc>
+              <a:spcBef>
+                <a:spcPts val="0"/>
+              </a:spcBef>
+              <a:spcAft>
+                <a:spcPts val="600"/>
+              </a:spcAft>
+            </a:pPr>
+            <a:r>
+              <a:rPr sz="2700" b="0" i="0">
+                <a:solidFill>
+                  <a:srgbClr val="0A0A0A"/>
+                </a:solidFill>
+                <a:latin typeface="Inknut Antiqua"/>
+              </a:rPr>
+              <a:t>hasta dónde se puede llegar</a:t>
+            </a:r>
+          </a:p>
+        </p:txBody>
+      </p:sp>
+      <p:sp>
+        <p:nvSpPr>
+          <p:cNvPr id="7" name="TextBox 6"/>
+          <p:cNvSpPr txBox="1"/>
+          <p:nvPr/>
+        </p:nvSpPr>
+        <p:spPr>
+          <a:xfrm>
+            <a:off x="777240" y="2057400"/>
+            <a:ext cx="10637215" cy="4251960"/>
+          </a:xfrm>
+          <a:prstGeom prst="rect">
+            <a:avLst/>
+          </a:prstGeom>
+          <a:noFill/>
+        </p:spPr>
+        <p:txBody>
+          <a:bodyPr wrap="square" lIns="0" rIns="0" tIns="0" bIns="0">
+            <a:spAutoFit/>
+          </a:bodyPr>
+          <a:lstStyle/>
+          <a:p>
+            <a:pPr>
+              <a:lnSpc>
+                <a:spcPct val="142000"/>
+              </a:lnSpc>
+              <a:spcBef>
+                <a:spcPts val="0"/>
+              </a:spcBef>
+              <a:spcAft>
+                <a:spcPts val="900"/>
+              </a:spcAft>
+            </a:pPr>
+            <a:r>
+              <a:rPr sz="1500" b="0" i="0">
+                <a:solidFill>
+                  <a:srgbClr val="444444"/>
+                </a:solidFill>
+                <a:latin typeface="Iowan Old Style"/>
+              </a:rPr>
+              <a:t>Todo esto son archivos sueltos que se publican igual que tu web: los subes y ya está.</a:t>
+            </a:r>
+          </a:p>
+          <a:p>
+            <a:pPr>
+              <a:lnSpc>
+                <a:spcPct val="132000"/>
+              </a:lnSpc>
+              <a:spcAft>
+                <a:spcPts val="600"/>
+              </a:spcAft>
+            </a:pPr>
+            <a:r>
+              <a:rPr sz="1300">
+                <a:solidFill>
+                  <a:srgbClr val="0A0A0A"/>
+                </a:solidFill>
+                <a:latin typeface="Inknut Antiqua"/>
+                <a:hlinkClick r:id="rId2"/>
+              </a:rPr>
+              <a:t>→ save the date   </a:t>
+            </a:r>
+            <a:r>
+              <a:rPr sz="1250">
+                <a:solidFill>
+                  <a:srgbClr val="8A8A8A"/>
+                </a:solidFill>
+                <a:latin typeface="Iowan Old Style"/>
+              </a:rPr>
+              <a:t>Cuenta atrás en vivo y botón «añadir al calendario».</a:t>
+            </a:r>
+          </a:p>
+          <a:p>
+            <a:pPr>
+              <a:lnSpc>
+                <a:spcPct val="132000"/>
+              </a:lnSpc>
+              <a:spcAft>
+                <a:spcPts val="600"/>
+              </a:spcAft>
+            </a:pPr>
+            <a:r>
+              <a:rPr sz="1300">
+                <a:solidFill>
+                  <a:srgbClr val="0A0A0A"/>
+                </a:solidFill>
+                <a:latin typeface="Inknut Antiqua"/>
+                <a:hlinkClick r:id="rId3"/>
+              </a:rPr>
+              <a:t>→ cuaderno p5   </a:t>
+            </a:r>
+            <a:r>
+              <a:rPr sz="1250">
+                <a:solidFill>
+                  <a:srgbClr val="8A8A8A"/>
+                </a:solidFill>
+                <a:latin typeface="Iowan Old Style"/>
+              </a:rPr>
+              <a:t>Dibujar con código dentro de tu propia web.</a:t>
+            </a:r>
+          </a:p>
+          <a:p>
+            <a:pPr>
+              <a:lnSpc>
+                <a:spcPct val="132000"/>
+              </a:lnSpc>
+              <a:spcAft>
+                <a:spcPts val="600"/>
+              </a:spcAft>
+            </a:pPr>
+            <a:r>
+              <a:rPr sz="1300">
+                <a:solidFill>
+                  <a:srgbClr val="0A0A0A"/>
+                </a:solidFill>
+                <a:latin typeface="Inknut Antiqua"/>
+                <a:hlinkClick r:id="rId4"/>
+              </a:rPr>
+              <a:t>→ mesa de trabajo   </a:t>
+            </a:r>
+            <a:r>
+              <a:rPr sz="1250">
+                <a:solidFill>
+                  <a:srgbClr val="8A8A8A"/>
+                </a:solidFill>
+                <a:latin typeface="Iowan Old Style"/>
+              </a:rPr>
+              <a:t>Moodboard con memoria: añades notas e imágenes y guarda el resultado.</a:t>
+            </a:r>
+          </a:p>
+          <a:p>
+            <a:pPr>
+              <a:lnSpc>
+                <a:spcPct val="132000"/>
+              </a:lnSpc>
+              <a:spcAft>
+                <a:spcPts val="600"/>
+              </a:spcAft>
+            </a:pPr>
+            <a:r>
+              <a:rPr sz="1300">
+                <a:solidFill>
+                  <a:srgbClr val="0A0A0A"/>
+                </a:solidFill>
+                <a:latin typeface="Inknut Antiqua"/>
+                <a:hlinkClick r:id="rId5"/>
+              </a:rPr>
+              <a:t>→ hydra   </a:t>
+            </a:r>
+            <a:r>
+              <a:rPr sz="1250">
+                <a:solidFill>
+                  <a:srgbClr val="8A8A8A"/>
+                </a:solidFill>
+                <a:latin typeface="Iowan Old Style"/>
+              </a:rPr>
+              <a:t>Visuales en vivo, escritos en código, dentro de una página.</a:t>
+            </a:r>
+          </a:p>
+          <a:p>
+            <a:pPr>
+              <a:lnSpc>
+                <a:spcPct val="132000"/>
+              </a:lnSpc>
+              <a:spcAft>
+                <a:spcPts val="600"/>
+              </a:spcAft>
+            </a:pPr>
+            <a:r>
+              <a:rPr sz="1300">
+                <a:solidFill>
+                  <a:srgbClr val="0A0A0A"/>
+                </a:solidFill>
+                <a:latin typeface="Inknut Antiqua"/>
+                <a:hlinkClick r:id="rId6"/>
+              </a:rPr>
+              <a:t>→ cajita de música   </a:t>
+            </a:r>
+            <a:r>
+              <a:rPr sz="1250">
+                <a:solidFill>
+                  <a:srgbClr val="8A8A8A"/>
+                </a:solidFill>
+                <a:latin typeface="Iowan Old Style"/>
+              </a:rPr>
+              <a:t>Sonido generado en el navegador.</a:t>
+            </a:r>
+          </a:p>
+          <a:p>
+            <a:pPr>
+              <a:lnSpc>
+                <a:spcPct val="132000"/>
+              </a:lnSpc>
+              <a:spcAft>
+                <a:spcPts val="600"/>
+              </a:spcAft>
+            </a:pPr>
+            <a:r>
+              <a:rPr sz="1300">
+                <a:solidFill>
+                  <a:srgbClr val="0A0A0A"/>
+                </a:solidFill>
+                <a:latin typeface="Inknut Antiqua"/>
+                <a:hlinkClick r:id="rId7"/>
+              </a:rPr>
+              <a:t>→ ver las 26   </a:t>
+            </a:r>
+            <a:r>
+              <a:rPr sz="1250">
+                <a:solidFill>
+                  <a:srgbClr val="8A8A8A"/>
+                </a:solidFill>
+                <a:latin typeface="Iowan Old Style"/>
+              </a:rPr>
+              <a:t>El muestrario entero, ordenado por tipo.</a:t>
+            </a:r>
+          </a:p>
+        </p:txBody>
+      </p:sp>
+    </p:spTree>
+  </p:cSld>
+  <p:clrMapOvr>
+    <a:masterClrMapping/>
+  </p:clrMapOvr>
+</p:sld>
+</file>
+
+<file path=ppt/slides/slide28.xml><?xml version="1.0" encoding="utf-8"?>
+<p:sld xmlns:a="http://schemas.openxmlformats.org/drawingml/2006/main" xmlns:p="http://schemas.openxmlformats.org/presentationml/2006/main" xmlns:r="http://schemas.openxmlformats.org/officeDocument/2006/relationships">
+  <p:cSld>
+    <p:spTree>
+      <p:nvGrpSpPr>
+        <p:cNvPr id="1" name=""/>
+        <p:cNvGrpSpPr/>
+        <p:nvPr/>
+      </p:nvGrpSpPr>
+      <p:grpSpPr/>
+      <p:sp>
+        <p:nvSpPr>
+          <p:cNvPr id="2" name="Rectangle 1"/>
+          <p:cNvSpPr/>
+          <p:nvPr/>
+        </p:nvSpPr>
+        <p:spPr>
+          <a:xfrm>
+            <a:off x="0" y="0"/>
+            <a:ext cx="12191695" cy="6858000"/>
+          </a:xfrm>
+          <a:prstGeom prst="rect">
+            <a:avLst/>
+          </a:prstGeom>
+          <a:solidFill>
+            <a:srgbClr val="F2E94E"/>
+          </a:solidFill>
+          <a:ln>
+            <a:noFill/>
+          </a:ln>
+          <a:effectLst/>
+        </p:spPr>
+        <p:style>
+          <a:lnRef idx="1">
+            <a:schemeClr val="accent1"/>
+          </a:lnRef>
+          <a:fillRef idx="3">
+            <a:schemeClr val="accent1"/>
+          </a:fillRef>
+          <a:effectRef idx="2">
+            <a:schemeClr val="accent1"/>
+          </a:effectRef>
+          <a:fontRef idx="minor">
+            <a:schemeClr val="lt1"/>
+          </a:fontRef>
+        </p:style>
+        <p:txBody>
+          <a:bodyPr rtlCol="0" anchor="ctr"/>
+          <a:lstStyle/>
+          <a:p>
+            <a:pPr algn="ctr"/>
+          </a:p>
+        </p:txBody>
+      </p:sp>
+      <p:sp>
+        <p:nvSpPr>
+          <p:cNvPr id="3" name="TextBox 2"/>
+          <p:cNvSpPr txBox="1"/>
+          <p:nvPr/>
+        </p:nvSpPr>
+        <p:spPr>
+          <a:xfrm>
+            <a:off x="777240" y="1920240"/>
+            <a:ext cx="10637215" cy="3108960"/>
+          </a:xfrm>
+          <a:prstGeom prst="rect">
+            <a:avLst/>
+          </a:prstGeom>
+          <a:noFill/>
+        </p:spPr>
+        <p:txBody>
+          <a:bodyPr wrap="square" lIns="0" rIns="0" tIns="0" bIns="0">
+            <a:spAutoFit/>
+          </a:bodyPr>
+          <a:lstStyle/>
+          <a:p>
+            <a:pPr>
+              <a:lnSpc>
+                <a:spcPct val="125000"/>
+              </a:lnSpc>
+              <a:spcBef>
+                <a:spcPts val="0"/>
+              </a:spcBef>
+              <a:spcAft>
+                <a:spcPts val="1400"/>
+              </a:spcAft>
+            </a:pPr>
+            <a:r>
+              <a:rPr sz="1200" b="0" i="0" spc="600">
+                <a:solidFill>
+                  <a:srgbClr val="6A6418"/>
+                </a:solidFill>
+                <a:latin typeface="Menlo"/>
+              </a:rPr>
+              <a:t>PRÁCTICA · LO HACÉIS VOSOTRAS</a:t>
+            </a:r>
+          </a:p>
+          <a:p>
+            <a:pPr>
+              <a:lnSpc>
+                <a:spcPct val="125000"/>
+              </a:lnSpc>
+              <a:spcBef>
+                <a:spcPts val="0"/>
+              </a:spcBef>
+              <a:spcAft>
+                <a:spcPts val="2000"/>
+              </a:spcAft>
+            </a:pPr>
+            <a:r>
+              <a:rPr sz="1100" b="0" i="0" spc="300">
+                <a:solidFill>
+                  <a:srgbClr val="6A6418"/>
+                </a:solidFill>
+                <a:latin typeface="Menlo"/>
+              </a:rPr>
+              <a:t>02:40 · 20 MINUTOS</a:t>
+            </a:r>
+          </a:p>
+          <a:p>
+            <a:pPr>
+              <a:lnSpc>
+                <a:spcPct val="110000"/>
+              </a:lnSpc>
+              <a:spcBef>
+                <a:spcPts val="0"/>
+              </a:spcBef>
+              <a:spcAft>
+                <a:spcPts val="1800"/>
+              </a:spcAft>
+            </a:pPr>
+            <a:r>
+              <a:rPr sz="4000" b="0" i="0">
+                <a:solidFill>
+                  <a:srgbClr val="0A0A0A"/>
+                </a:solidFill>
+                <a:latin typeface="Inknut Antiqua"/>
+              </a:rPr>
+              <a:t>lo que te llevas</a:t>
+            </a:r>
+          </a:p>
+          <a:p>
+            <a:pPr>
+              <a:lnSpc>
+                <a:spcPct val="140000"/>
+              </a:lnSpc>
+              <a:spcBef>
+                <a:spcPts val="0"/>
+              </a:spcBef>
+              <a:spcAft>
+                <a:spcPts val="600"/>
+              </a:spcAft>
+            </a:pPr>
+            <a:r>
+              <a:rPr sz="1700" b="0" i="0">
+                <a:solidFill>
+                  <a:srgbClr val="33300A"/>
+                </a:solidFill>
+                <a:latin typeface="Iowan Old Style"/>
+              </a:rPr>
+              <a:t>Y el correo de dudas de las dos semanas siguientes.</a:t>
+            </a:r>
+          </a:p>
+        </p:txBody>
+      </p:sp>
+    </p:spTree>
+  </p:cSld>
+  <p:clrMapOvr>
+    <a:masterClrMapping/>
+  </p:clrMapOvr>
+</p:sld>
+</file>
+
+<file path=ppt/slides/slide29.xml><?xml version="1.0" encoding="utf-8"?>
+<p:sld xmlns:a="http://schemas.openxmlformats.org/drawingml/2006/main" xmlns:p="http://schemas.openxmlformats.org/presentationml/2006/main" xmlns:r="http://schemas.openxmlformats.org/officeDocument/2006/relationships">
+  <p:cSld>
+    <p:spTree>
+      <p:nvGrpSpPr>
+        <p:cNvPr id="1" name=""/>
+        <p:cNvGrpSpPr/>
+        <p:nvPr/>
+      </p:nvGrpSpPr>
+      <p:grpSpPr/>
+      <p:sp>
+        <p:nvSpPr>
+          <p:cNvPr id="2" name="Rectangle 1"/>
+          <p:cNvSpPr/>
+          <p:nvPr/>
+        </p:nvSpPr>
+        <p:spPr>
+          <a:xfrm>
+            <a:off x="0" y="0"/>
+            <a:ext cx="12191695" cy="6858000"/>
+          </a:xfrm>
+          <a:prstGeom prst="rect">
+            <a:avLst/>
+          </a:prstGeom>
+          <a:solidFill>
             <a:srgbClr val="FFFFFF"/>
           </a:solidFill>
           <a:ln>
@@ -9566,6 +10808,51 @@
       <p:sp>
         <p:nvSpPr>
           <p:cNvPr id="3" name="TextBox 2"/>
+          <p:cNvSpPr txBox="1"/>
+          <p:nvPr/>
+        </p:nvSpPr>
+        <p:spPr>
+          <a:xfrm>
+            <a:off x="777240" y="310896"/>
+            <a:ext cx="10637215" cy="219456"/>
+          </a:xfrm>
+          <a:prstGeom prst="rect">
+            <a:avLst/>
+          </a:prstGeom>
+          <a:noFill/>
+        </p:spPr>
+        <p:txBody>
+          <a:bodyPr wrap="square" lIns="0" rIns="0" tIns="0" bIns="0">
+            <a:spAutoFit/>
+          </a:bodyPr>
+          <a:lstStyle/>
+          <a:p>
+            <a:pPr>
+              <a:lnSpc>
+                <a:spcPct val="125000"/>
+              </a:lnSpc>
+              <a:spcBef>
+                <a:spcPts val="0"/>
+              </a:spcBef>
+              <a:spcAft>
+                <a:spcPts val="600"/>
+              </a:spcAft>
+            </a:pPr>
+            <a:r>
+              <a:rPr sz="950" b="0" i="0" spc="800">
+                <a:solidFill>
+                  <a:srgbClr val="8A8A8A"/>
+                </a:solidFill>
+                <a:latin typeface="Menlo"/>
+              </a:rPr>
+              <a:t>TEORÍA</a:t>
+            </a:r>
+          </a:p>
+        </p:txBody>
+      </p:sp>
+      <p:sp>
+        <p:nvSpPr>
+          <p:cNvPr id="4" name="TextBox 3"/>
           <p:cNvSpPr txBox="1"/>
           <p:nvPr/>
         </p:nvSpPr>
@@ -9766,8 +11053,8 @@
         </p:nvSpPr>
         <p:spPr>
           <a:xfrm>
-            <a:off x="777240" y="2103120"/>
-            <a:ext cx="10637215" cy="2926080"/>
+            <a:off x="777240" y="1920240"/>
+            <a:ext cx="10637215" cy="3108960"/>
           </a:xfrm>
           <a:prstGeom prst="rect">
             <a:avLst/>
@@ -9779,6 +11066,28 @@
             <a:spAutoFit/>
           </a:bodyPr>
           <a:lstStyle/>
+          <a:p>
+            <a:pPr>
+              <a:lnSpc>
+                <a:spcPct val="125000"/>
+              </a:lnSpc>
+              <a:spcBef>
+                <a:spcPts val="0"/>
+              </a:spcBef>
+              <a:spcAft>
+                <a:spcPts val="1400"/>
+              </a:spcAft>
+            </a:pPr>
+            <a:r>
+              <a:rPr sz="1200" b="0" i="0" spc="600">
+                <a:solidFill>
+                  <a:srgbClr val="8A8A8A"/>
+                </a:solidFill>
+                <a:latin typeface="Menlo"/>
+              </a:rPr>
+              <a:t>TEORÍA · LO EXPLICO YO</a:t>
+            </a:r>
+          </a:p>
           <a:p>
             <a:pPr>
               <a:lnSpc>
@@ -9917,8 +11226,8 @@
         </p:nvSpPr>
         <p:spPr>
           <a:xfrm>
-            <a:off x="777240" y="777240"/>
-            <a:ext cx="10637215" cy="274320"/>
+            <a:off x="777240" y="310896"/>
+            <a:ext cx="10637215" cy="219456"/>
           </a:xfrm>
           <a:prstGeom prst="rect">
             <a:avLst/>
@@ -9943,6 +11252,51 @@
               </a:spcAft>
             </a:pPr>
             <a:r>
+              <a:rPr sz="950" b="0" i="0" spc="800">
+                <a:solidFill>
+                  <a:srgbClr val="8A8A8A"/>
+                </a:solidFill>
+                <a:latin typeface="Menlo"/>
+              </a:rPr>
+              <a:t>TEORÍA</a:t>
+            </a:r>
+          </a:p>
+        </p:txBody>
+      </p:sp>
+      <p:sp>
+        <p:nvSpPr>
+          <p:cNvPr id="4" name="TextBox 3"/>
+          <p:cNvSpPr txBox="1"/>
+          <p:nvPr/>
+        </p:nvSpPr>
+        <p:spPr>
+          <a:xfrm>
+            <a:off x="777240" y="777240"/>
+            <a:ext cx="10637215" cy="274320"/>
+          </a:xfrm>
+          <a:prstGeom prst="rect">
+            <a:avLst/>
+          </a:prstGeom>
+          <a:noFill/>
+        </p:spPr>
+        <p:txBody>
+          <a:bodyPr wrap="square" lIns="0" rIns="0" tIns="0" bIns="0">
+            <a:spAutoFit/>
+          </a:bodyPr>
+          <a:lstStyle/>
+          <a:p>
+            <a:pPr>
+              <a:lnSpc>
+                <a:spcPct val="125000"/>
+              </a:lnSpc>
+              <a:spcBef>
+                <a:spcPts val="0"/>
+              </a:spcBef>
+              <a:spcAft>
+                <a:spcPts val="600"/>
+              </a:spcAft>
+            </a:pPr>
+            <a:r>
               <a:rPr sz="1000" b="0" i="0" spc="300">
                 <a:solidFill>
                   <a:srgbClr val="8A8A8A"/>
@@ -9956,7 +11310,7 @@
       </p:sp>
       <p:sp>
         <p:nvSpPr>
-          <p:cNvPr id="4" name="Rectangle 3"/>
+          <p:cNvPr id="5" name="Rectangle 4"/>
           <p:cNvSpPr/>
           <p:nvPr/>
         </p:nvSpPr>
@@ -10000,7 +11354,7 @@
       </p:sp>
       <p:sp>
         <p:nvSpPr>
-          <p:cNvPr id="5" name="TextBox 4"/>
+          <p:cNvPr id="6" name="TextBox 5"/>
           <p:cNvSpPr txBox="1"/>
           <p:nvPr/>
         </p:nvSpPr>
@@ -10045,7 +11399,7 @@
       </p:sp>
       <p:sp>
         <p:nvSpPr>
-          <p:cNvPr id="6" name="TextBox 5"/>
+          <p:cNvPr id="7" name="TextBox 6"/>
           <p:cNvSpPr txBox="1"/>
           <p:nvPr/>
         </p:nvSpPr>
@@ -10489,8 +11843,8 @@
         </p:nvSpPr>
         <p:spPr>
           <a:xfrm>
-            <a:off x="777240" y="777240"/>
-            <a:ext cx="10637215" cy="274320"/>
+            <a:off x="777240" y="310896"/>
+            <a:ext cx="10637215" cy="219456"/>
           </a:xfrm>
           <a:prstGeom prst="rect">
             <a:avLst/>
@@ -10515,6 +11869,51 @@
               </a:spcAft>
             </a:pPr>
             <a:r>
+              <a:rPr sz="950" b="0" i="0" spc="800">
+                <a:solidFill>
+                  <a:srgbClr val="8A8A8A"/>
+                </a:solidFill>
+                <a:latin typeface="Menlo"/>
+              </a:rPr>
+              <a:t>TEORÍA</a:t>
+            </a:r>
+          </a:p>
+        </p:txBody>
+      </p:sp>
+      <p:sp>
+        <p:nvSpPr>
+          <p:cNvPr id="4" name="TextBox 3"/>
+          <p:cNvSpPr txBox="1"/>
+          <p:nvPr/>
+        </p:nvSpPr>
+        <p:spPr>
+          <a:xfrm>
+            <a:off x="777240" y="777240"/>
+            <a:ext cx="10637215" cy="274320"/>
+          </a:xfrm>
+          <a:prstGeom prst="rect">
+            <a:avLst/>
+          </a:prstGeom>
+          <a:noFill/>
+        </p:spPr>
+        <p:txBody>
+          <a:bodyPr wrap="square" lIns="0" rIns="0" tIns="0" bIns="0">
+            <a:spAutoFit/>
+          </a:bodyPr>
+          <a:lstStyle/>
+          <a:p>
+            <a:pPr>
+              <a:lnSpc>
+                <a:spcPct val="125000"/>
+              </a:lnSpc>
+              <a:spcBef>
+                <a:spcPts val="0"/>
+              </a:spcBef>
+              <a:spcAft>
+                <a:spcPts val="600"/>
+              </a:spcAft>
+            </a:pPr>
+            <a:r>
               <a:rPr sz="1000" b="0" i="0" spc="300">
                 <a:solidFill>
                   <a:srgbClr val="8A8A8A"/>
@@ -10528,7 +11927,7 @@
       </p:sp>
       <p:sp>
         <p:nvSpPr>
-          <p:cNvPr id="4" name="Rectangle 3"/>
+          <p:cNvPr id="5" name="Rectangle 4"/>
           <p:cNvSpPr/>
           <p:nvPr/>
         </p:nvSpPr>
@@ -10572,7 +11971,7 @@
       </p:sp>
       <p:sp>
         <p:nvSpPr>
-          <p:cNvPr id="5" name="TextBox 4"/>
+          <p:cNvPr id="6" name="TextBox 5"/>
           <p:cNvSpPr txBox="1"/>
           <p:nvPr/>
         </p:nvSpPr>
@@ -10617,7 +12016,7 @@
       </p:sp>
       <p:sp>
         <p:nvSpPr>
-          <p:cNvPr id="6" name="TextBox 5"/>
+          <p:cNvPr id="7" name="TextBox 6"/>
           <p:cNvSpPr txBox="1"/>
           <p:nvPr/>
         </p:nvSpPr>
@@ -10840,8 +12239,8 @@
         </p:nvSpPr>
         <p:spPr>
           <a:xfrm>
-            <a:off x="777240" y="777240"/>
-            <a:ext cx="10637215" cy="274320"/>
+            <a:off x="777240" y="310896"/>
+            <a:ext cx="10637215" cy="219456"/>
           </a:xfrm>
           <a:prstGeom prst="rect">
             <a:avLst/>
@@ -10866,6 +12265,51 @@
               </a:spcAft>
             </a:pPr>
             <a:r>
+              <a:rPr sz="950" b="0" i="0" spc="800">
+                <a:solidFill>
+                  <a:srgbClr val="8A8A8A"/>
+                </a:solidFill>
+                <a:latin typeface="Menlo"/>
+              </a:rPr>
+              <a:t>TEORÍA</a:t>
+            </a:r>
+          </a:p>
+        </p:txBody>
+      </p:sp>
+      <p:sp>
+        <p:nvSpPr>
+          <p:cNvPr id="4" name="TextBox 3"/>
+          <p:cNvSpPr txBox="1"/>
+          <p:nvPr/>
+        </p:nvSpPr>
+        <p:spPr>
+          <a:xfrm>
+            <a:off x="777240" y="777240"/>
+            <a:ext cx="10637215" cy="274320"/>
+          </a:xfrm>
+          <a:prstGeom prst="rect">
+            <a:avLst/>
+          </a:prstGeom>
+          <a:noFill/>
+        </p:spPr>
+        <p:txBody>
+          <a:bodyPr wrap="square" lIns="0" rIns="0" tIns="0" bIns="0">
+            <a:spAutoFit/>
+          </a:bodyPr>
+          <a:lstStyle/>
+          <a:p>
+            <a:pPr>
+              <a:lnSpc>
+                <a:spcPct val="125000"/>
+              </a:lnSpc>
+              <a:spcBef>
+                <a:spcPts val="0"/>
+              </a:spcBef>
+              <a:spcAft>
+                <a:spcPts val="600"/>
+              </a:spcAft>
+            </a:pPr>
+            <a:r>
               <a:rPr sz="1000" b="0" i="0" spc="300">
                 <a:solidFill>
                   <a:srgbClr val="8A8A8A"/>
@@ -10879,7 +12323,7 @@
       </p:sp>
       <p:sp>
         <p:nvSpPr>
-          <p:cNvPr id="4" name="Rectangle 3"/>
+          <p:cNvPr id="5" name="Rectangle 4"/>
           <p:cNvSpPr/>
           <p:nvPr/>
         </p:nvSpPr>
@@ -10923,7 +12367,7 @@
       </p:sp>
       <p:sp>
         <p:nvSpPr>
-          <p:cNvPr id="5" name="TextBox 4"/>
+          <p:cNvPr id="6" name="TextBox 5"/>
           <p:cNvSpPr txBox="1"/>
           <p:nvPr/>
         </p:nvSpPr>
@@ -10968,7 +12412,7 @@
       </p:sp>
       <p:sp>
         <p:nvSpPr>
-          <p:cNvPr id="6" name="TextBox 5"/>
+          <p:cNvPr id="7" name="TextBox 6"/>
           <p:cNvSpPr txBox="1"/>
           <p:nvPr/>
         </p:nvSpPr>
@@ -11237,8 +12681,8 @@
         </p:nvSpPr>
         <p:spPr>
           <a:xfrm>
-            <a:off x="777240" y="777240"/>
-            <a:ext cx="10637215" cy="274320"/>
+            <a:off x="777240" y="310896"/>
+            <a:ext cx="10637215" cy="219456"/>
           </a:xfrm>
           <a:prstGeom prst="rect">
             <a:avLst/>
@@ -11263,6 +12707,51 @@
               </a:spcAft>
             </a:pPr>
             <a:r>
+              <a:rPr sz="950" b="0" i="0" spc="800">
+                <a:solidFill>
+                  <a:srgbClr val="8A8A8A"/>
+                </a:solidFill>
+                <a:latin typeface="Menlo"/>
+              </a:rPr>
+              <a:t>TEORÍA</a:t>
+            </a:r>
+          </a:p>
+        </p:txBody>
+      </p:sp>
+      <p:sp>
+        <p:nvSpPr>
+          <p:cNvPr id="4" name="TextBox 3"/>
+          <p:cNvSpPr txBox="1"/>
+          <p:nvPr/>
+        </p:nvSpPr>
+        <p:spPr>
+          <a:xfrm>
+            <a:off x="777240" y="777240"/>
+            <a:ext cx="10637215" cy="274320"/>
+          </a:xfrm>
+          <a:prstGeom prst="rect">
+            <a:avLst/>
+          </a:prstGeom>
+          <a:noFill/>
+        </p:spPr>
+        <p:txBody>
+          <a:bodyPr wrap="square" lIns="0" rIns="0" tIns="0" bIns="0">
+            <a:spAutoFit/>
+          </a:bodyPr>
+          <a:lstStyle/>
+          <a:p>
+            <a:pPr>
+              <a:lnSpc>
+                <a:spcPct val="125000"/>
+              </a:lnSpc>
+              <a:spcBef>
+                <a:spcPts val="0"/>
+              </a:spcBef>
+              <a:spcAft>
+                <a:spcPts val="600"/>
+              </a:spcAft>
+            </a:pPr>
+            <a:r>
               <a:rPr sz="1000" b="0" i="0" spc="300">
                 <a:solidFill>
                   <a:srgbClr val="8A8A8A"/>
@@ -11276,7 +12765,7 @@
       </p:sp>
       <p:sp>
         <p:nvSpPr>
-          <p:cNvPr id="4" name="Rectangle 3"/>
+          <p:cNvPr id="5" name="Rectangle 4"/>
           <p:cNvSpPr/>
           <p:nvPr/>
         </p:nvSpPr>
@@ -11320,7 +12809,7 @@
       </p:sp>
       <p:sp>
         <p:nvSpPr>
-          <p:cNvPr id="5" name="TextBox 4"/>
+          <p:cNvPr id="6" name="TextBox 5"/>
           <p:cNvSpPr txBox="1"/>
           <p:nvPr/>
         </p:nvSpPr>
@@ -11365,7 +12854,7 @@
       </p:sp>
       <p:sp>
         <p:nvSpPr>
-          <p:cNvPr id="6" name="TextBox 5"/>
+          <p:cNvPr id="7" name="TextBox 6"/>
           <p:cNvSpPr txBox="1"/>
           <p:nvPr/>
         </p:nvSpPr>

--- a/presentaciones/Sesion-3-Publicar.pptx
+++ b/presentaciones/Sesion-3-Publicar.pptx
@@ -4675,193 +4675,391 @@
           <a:p>
             <a:pPr>
               <a:lnSpc>
-                <a:spcPct val="140000"/>
-              </a:lnSpc>
-              <a:spcBef>
-                <a:spcPts val="0"/>
-              </a:spcBef>
-              <a:spcAft>
-                <a:spcPts val="500"/>
-              </a:spcAft>
-            </a:pPr>
-            <a:r>
-              <a:rPr sz="1450" b="0" i="0">
+                <a:spcPct val="117500"/>
+              </a:lnSpc>
+              <a:spcBef>
+                <a:spcPts val="1000"/>
+              </a:spcBef>
+              <a:spcAft>
+                <a:spcPts val="328"/>
+              </a:spcAft>
+            </a:pPr>
+            <a:r>
+              <a:rPr sz="950" b="0" i="0" spc="500">
+                <a:solidFill>
+                  <a:srgbClr val="8A7C14"/>
+                </a:solidFill>
+                <a:latin typeface="Menlo"/>
+              </a:rPr>
+              <a:t>HAY QUE</a:t>
+            </a:r>
+          </a:p>
+          <a:p>
+            <a:pPr>
+              <a:lnSpc>
+                <a:spcPct val="126900"/>
+              </a:lnSpc>
+              <a:spcBef>
+                <a:spcPts val="0"/>
+              </a:spcBef>
+              <a:spcAft>
+                <a:spcPts val="246"/>
+              </a:spcAft>
+            </a:pPr>
+            <a:r>
+              <a:rPr sz="1110" b="0" i="0">
                 <a:solidFill>
                   <a:srgbClr val="444444"/>
                 </a:solidFill>
                 <a:latin typeface="Iowan Old Style"/>
               </a:rPr>
-              <a:t>·  github.com → New repository.</a:t>
-            </a:r>
-          </a:p>
-          <a:p>
-            <a:pPr>
-              <a:lnSpc>
-                <a:spcPct val="140000"/>
-              </a:lnSpc>
-              <a:spcBef>
-                <a:spcPts val="0"/>
-              </a:spcBef>
-              <a:spcAft>
-                <a:spcPts val="500"/>
-              </a:spcAft>
-            </a:pPr>
-            <a:r>
-              <a:rPr sz="1450" b="0" i="0">
+              <a:t>☐  La checklist repasada entera</a:t>
+            </a:r>
+          </a:p>
+          <a:p>
+            <a:pPr>
+              <a:lnSpc>
+                <a:spcPct val="126900"/>
+              </a:lnSpc>
+              <a:spcBef>
+                <a:spcPts val="0"/>
+              </a:spcBef>
+              <a:spcAft>
+                <a:spcPts val="246"/>
+              </a:spcAft>
+            </a:pPr>
+            <a:r>
+              <a:rPr sz="1110" b="0" i="0">
                 <a:solidFill>
                   <a:srgbClr val="444444"/>
                 </a:solidFill>
                 <a:latin typeface="Iowan Old Style"/>
               </a:rPr>
-              <a:t>·  Nombre mi-web, marcar Public, Create.</a:t>
-            </a:r>
-          </a:p>
-          <a:p>
-            <a:pPr>
-              <a:lnSpc>
-                <a:spcPct val="140000"/>
-              </a:lnSpc>
-              <a:spcBef>
-                <a:spcPts val="0"/>
-              </a:spcBef>
-              <a:spcAft>
-                <a:spcPts val="500"/>
-              </a:spcAft>
-            </a:pPr>
-            <a:r>
-              <a:rPr sz="1450" b="0" i="0">
+              <a:t>☐  New repository → nombre → Public</a:t>
+            </a:r>
+          </a:p>
+          <a:p>
+            <a:pPr>
+              <a:lnSpc>
+                <a:spcPct val="126900"/>
+              </a:lnSpc>
+              <a:spcBef>
+                <a:spcPts val="0"/>
+              </a:spcBef>
+              <a:spcAft>
+                <a:spcPts val="246"/>
+              </a:spcAft>
+            </a:pPr>
+            <a:r>
+              <a:rPr sz="1110" b="0" i="0">
                 <a:solidFill>
                   <a:srgbClr val="444444"/>
                 </a:solidFill>
                 <a:latin typeface="Iowan Old Style"/>
               </a:rPr>
-              <a:t>·  uploading an existing file.</a:t>
-            </a:r>
-          </a:p>
-          <a:p>
-            <a:pPr>
-              <a:lnSpc>
-                <a:spcPct val="140000"/>
-              </a:lnSpc>
-              <a:spcBef>
-                <a:spcPts val="0"/>
-              </a:spcBef>
-              <a:spcAft>
-                <a:spcPts val="500"/>
-              </a:spcAft>
-            </a:pPr>
-            <a:r>
-              <a:rPr sz="1450" b="0" i="0">
+              <a:t>☐  Arrastrar el contenido, no la carpeta</a:t>
+            </a:r>
+          </a:p>
+          <a:p>
+            <a:pPr>
+              <a:lnSpc>
+                <a:spcPct val="126900"/>
+              </a:lnSpc>
+              <a:spcBef>
+                <a:spcPts val="0"/>
+              </a:spcBef>
+              <a:spcAft>
+                <a:spcPts val="246"/>
+              </a:spcAft>
+            </a:pPr>
+            <a:r>
+              <a:rPr sz="1110" b="0" i="0">
                 <a:solidFill>
                   <a:srgbClr val="444444"/>
                 </a:solidFill>
                 <a:latin typeface="Iowan Old Style"/>
               </a:rPr>
-              <a:t>·  Arrastrar el contenido de la carpeta, no la carpeta.</a:t>
-            </a:r>
-          </a:p>
-          <a:p>
-            <a:pPr>
-              <a:lnSpc>
-                <a:spcPct val="140000"/>
-              </a:lnSpc>
-              <a:spcBef>
-                <a:spcPts val="0"/>
-              </a:spcBef>
-              <a:spcAft>
-                <a:spcPts val="500"/>
-              </a:spcAft>
-            </a:pPr>
-            <a:r>
-              <a:rPr sz="1450" b="0" i="0">
+              <a:t>☐  Commit changes</a:t>
+            </a:r>
+          </a:p>
+          <a:p>
+            <a:pPr>
+              <a:lnSpc>
+                <a:spcPct val="126900"/>
+              </a:lnSpc>
+              <a:spcBef>
+                <a:spcPts val="0"/>
+              </a:spcBef>
+              <a:spcAft>
+                <a:spcPts val="246"/>
+              </a:spcAft>
+            </a:pPr>
+            <a:r>
+              <a:rPr sz="1110" b="0" i="0">
                 <a:solidFill>
                   <a:srgbClr val="444444"/>
                 </a:solidFill>
                 <a:latin typeface="Iowan Old Style"/>
               </a:rPr>
-              <a:t>·  Commit changes.</a:t>
-            </a:r>
-          </a:p>
-          <a:p>
-            <a:pPr>
-              <a:lnSpc>
-                <a:spcPct val="140000"/>
-              </a:lnSpc>
-              <a:spcBef>
-                <a:spcPts val="0"/>
-              </a:spcBef>
-              <a:spcAft>
-                <a:spcPts val="500"/>
-              </a:spcAft>
-            </a:pPr>
-            <a:r>
-              <a:rPr sz="1450" b="0" i="0">
+              <a:t>☐  Settings → Pages → main → Save</a:t>
+            </a:r>
+          </a:p>
+          <a:p>
+            <a:pPr>
+              <a:lnSpc>
+                <a:spcPct val="126900"/>
+              </a:lnSpc>
+              <a:spcBef>
+                <a:spcPts val="0"/>
+              </a:spcBef>
+              <a:spcAft>
+                <a:spcPts val="246"/>
+              </a:spcAft>
+            </a:pPr>
+            <a:r>
+              <a:rPr sz="1110" b="0" i="0">
                 <a:solidFill>
                   <a:srgbClr val="444444"/>
                 </a:solidFill>
                 <a:latin typeface="Iowan Old Style"/>
               </a:rPr>
-              <a:t>·  Settings → Pages.</a:t>
-            </a:r>
-          </a:p>
-          <a:p>
-            <a:pPr>
-              <a:lnSpc>
-                <a:spcPct val="140000"/>
-              </a:lnSpc>
-              <a:spcBef>
-                <a:spcPts val="0"/>
-              </a:spcBef>
-              <a:spcAft>
-                <a:spcPts val="500"/>
-              </a:spcAft>
-            </a:pPr>
-            <a:r>
-              <a:rPr sz="1450" b="0" i="0">
+              <a:t>☐  La dirección apuntada en papel</a:t>
+            </a:r>
+          </a:p>
+          <a:p>
+            <a:pPr>
+              <a:lnSpc>
+                <a:spcPct val="117500"/>
+              </a:lnSpc>
+              <a:spcBef>
+                <a:spcPts val="1000"/>
+              </a:spcBef>
+              <a:spcAft>
+                <a:spcPts val="328"/>
+              </a:spcAft>
+            </a:pPr>
+            <a:r>
+              <a:rPr sz="950" b="0" i="0" spc="500">
+                <a:solidFill>
+                  <a:srgbClr val="8A7C14"/>
+                </a:solidFill>
+                <a:latin typeface="Menlo"/>
+              </a:rPr>
+              <a:t>PUEDES</a:t>
+            </a:r>
+          </a:p>
+          <a:p>
+            <a:pPr>
+              <a:lnSpc>
+                <a:spcPct val="126900"/>
+              </a:lnSpc>
+              <a:spcBef>
+                <a:spcPts val="0"/>
+              </a:spcBef>
+              <a:spcAft>
+                <a:spcPts val="246"/>
+              </a:spcAft>
+            </a:pPr>
+            <a:r>
+              <a:rPr sz="1110" b="0" i="0">
                 <a:solidFill>
                   <a:srgbClr val="444444"/>
                 </a:solidFill>
                 <a:latin typeface="Iowan Old Style"/>
               </a:rPr>
-              <a:t>·  Branch: main → Save.</a:t>
-            </a:r>
-          </a:p>
-          <a:p>
-            <a:pPr>
-              <a:lnSpc>
-                <a:spcPct val="140000"/>
-              </a:lnSpc>
-              <a:spcBef>
-                <a:spcPts val="0"/>
-              </a:spcBef>
-              <a:spcAft>
-                <a:spcPts val="500"/>
-              </a:spcAft>
-            </a:pPr>
-            <a:r>
-              <a:rPr sz="1450" b="0" i="0">
+              <a:t>☐  Abrirla en tu móvil</a:t>
+            </a:r>
+          </a:p>
+          <a:p>
+            <a:pPr>
+              <a:lnSpc>
+                <a:spcPct val="126900"/>
+              </a:lnSpc>
+              <a:spcBef>
+                <a:spcPts val="0"/>
+              </a:spcBef>
+              <a:spcAft>
+                <a:spcPts val="246"/>
+              </a:spcAft>
+            </a:pPr>
+            <a:r>
+              <a:rPr sz="1110" b="0" i="0">
                 <a:solidFill>
                   <a:srgbClr val="444444"/>
                 </a:solidFill>
                 <a:latin typeface="Iowan Old Style"/>
               </a:rPr>
-              <a:t>·  Esperar un minuto y recargar.</a:t>
-            </a:r>
-          </a:p>
-          <a:p>
-            <a:pPr>
-              <a:lnSpc>
-                <a:spcPct val="125000"/>
+              <a:t>☐  Comprobar que los enlaces funcionan publicados</a:t>
+            </a:r>
+          </a:p>
+          <a:p>
+            <a:pPr>
+              <a:lnSpc>
+                <a:spcPct val="126900"/>
+              </a:lnSpc>
+              <a:spcBef>
+                <a:spcPts val="0"/>
+              </a:spcBef>
+              <a:spcAft>
+                <a:spcPts val="246"/>
+              </a:spcAft>
+            </a:pPr>
+            <a:r>
+              <a:rPr sz="1110" b="0" i="0">
+                <a:solidFill>
+                  <a:srgbClr val="444444"/>
+                </a:solidFill>
+                <a:latin typeface="Iowan Old Style"/>
+              </a:rPr>
+              <a:t>☐  Comprobar que las imágenes se ven</a:t>
+            </a:r>
+          </a:p>
+          <a:p>
+            <a:pPr>
+              <a:lnSpc>
+                <a:spcPct val="126900"/>
+              </a:lnSpc>
+              <a:spcBef>
+                <a:spcPts val="0"/>
+              </a:spcBef>
+              <a:spcAft>
+                <a:spcPts val="246"/>
+              </a:spcAft>
+            </a:pPr>
+            <a:r>
+              <a:rPr sz="1110" b="0" i="0">
+                <a:solidFill>
+                  <a:srgbClr val="444444"/>
+                </a:solidFill>
+                <a:latin typeface="Iowan Old Style"/>
+              </a:rPr>
+              <a:t>☐  Poner un favicon</a:t>
+            </a:r>
+          </a:p>
+          <a:p>
+            <a:pPr>
+              <a:lnSpc>
+                <a:spcPct val="117500"/>
               </a:lnSpc>
               <a:spcBef>
                 <a:spcPts val="1000"/>
               </a:spcBef>
               <a:spcAft>
-                <a:spcPts val="300"/>
-              </a:spcAft>
-            </a:pPr>
-            <a:r>
-              <a:rPr sz="1000" b="0" i="0" spc="300">
+                <a:spcPts val="328"/>
+              </a:spcAft>
+            </a:pPr>
+            <a:r>
+              <a:rPr sz="950" b="0" i="0" spc="500">
+                <a:solidFill>
+                  <a:srgbClr val="8A7C14"/>
+                </a:solidFill>
+                <a:latin typeface="Menlo"/>
+              </a:rPr>
+              <a:t>PODRÍAS</a:t>
+            </a:r>
+          </a:p>
+          <a:p>
+            <a:pPr>
+              <a:lnSpc>
+                <a:spcPct val="126900"/>
+              </a:lnSpc>
+              <a:spcBef>
+                <a:spcPts val="0"/>
+              </a:spcBef>
+              <a:spcAft>
+                <a:spcPts val="246"/>
+              </a:spcAft>
+            </a:pPr>
+            <a:r>
+              <a:rPr sz="1110" b="0" i="0">
+                <a:solidFill>
+                  <a:srgbClr val="444444"/>
+                </a:solidFill>
+                <a:latin typeface="Iowan Old Style"/>
+              </a:rPr>
+              <a:t>☐  Una meta description por página</a:t>
+            </a:r>
+          </a:p>
+          <a:p>
+            <a:pPr>
+              <a:lnSpc>
+                <a:spcPct val="126900"/>
+              </a:lnSpc>
+              <a:spcBef>
+                <a:spcPts val="0"/>
+              </a:spcBef>
+              <a:spcAft>
+                <a:spcPts val="246"/>
+              </a:spcAft>
+            </a:pPr>
+            <a:r>
+              <a:rPr sz="1110" b="0" i="0">
+                <a:solidFill>
+                  <a:srgbClr val="444444"/>
+                </a:solidFill>
+                <a:latin typeface="Iowan Old Style"/>
+              </a:rPr>
+              <a:t>☐  Cloudflare Pages sobre el mismo repositorio</a:t>
+            </a:r>
+          </a:p>
+          <a:p>
+            <a:pPr>
+              <a:lnSpc>
+                <a:spcPct val="126900"/>
+              </a:lnSpc>
+              <a:spcBef>
+                <a:spcPts val="0"/>
+              </a:spcBef>
+              <a:spcAft>
+                <a:spcPts val="246"/>
+              </a:spcAft>
+            </a:pPr>
+            <a:r>
+              <a:rPr sz="1110" b="0" i="0">
+                <a:solidFill>
+                  <a:srgbClr val="444444"/>
+                </a:solidFill>
+                <a:latin typeface="Iowan Old Style"/>
+              </a:rPr>
+              <a:t>☐  Un dominio propio (en casa, con calma)</a:t>
+            </a:r>
+          </a:p>
+          <a:p>
+            <a:pPr>
+              <a:lnSpc>
+                <a:spcPct val="126900"/>
+              </a:lnSpc>
+              <a:spcBef>
+                <a:spcPts val="0"/>
+              </a:spcBef>
+              <a:spcAft>
+                <a:spcPts val="246"/>
+              </a:spcAft>
+            </a:pPr>
+            <a:r>
+              <a:rPr sz="1110" b="0" i="0">
+                <a:solidFill>
+                  <a:srgbClr val="444444"/>
+                </a:solidFill>
+                <a:latin typeface="Iowan Old Style"/>
+              </a:rPr>
+              <a:t>☐  Una página 404.html tuya</a:t>
+            </a:r>
+          </a:p>
+          <a:p>
+            <a:pPr>
+              <a:lnSpc>
+                <a:spcPct val="117500"/>
+              </a:lnSpc>
+              <a:spcBef>
+                <a:spcPts val="1000"/>
+              </a:spcBef>
+              <a:spcAft>
+                <a:spcPts val="246"/>
+              </a:spcAft>
+            </a:pPr>
+            <a:r>
+              <a:rPr sz="950" b="0" i="0" spc="300">
                 <a:solidFill>
                   <a:srgbClr val="8A8A8A"/>
                 </a:solidFill>
@@ -4873,17 +5071,17 @@
           <a:p>
             <a:pPr>
               <a:lnSpc>
-                <a:spcPct val="140000"/>
-              </a:lnSpc>
-              <a:spcBef>
-                <a:spcPts val="0"/>
-              </a:spcBef>
-              <a:spcAft>
-                <a:spcPts val="800"/>
-              </a:spcAft>
-            </a:pPr>
-            <a:r>
-              <a:rPr sz="1400" b="0" i="0">
+                <a:spcPct val="131600"/>
+              </a:lnSpc>
+              <a:spcBef>
+                <a:spcPts val="0"/>
+              </a:spcBef>
+              <a:spcAft>
+                <a:spcPts val="657"/>
+              </a:spcAft>
+            </a:pPr>
+            <a:r>
+              <a:rPr sz="1151" b="0" i="0">
                 <a:solidFill>
                   <a:srgbClr val="444444"/>
                 </a:solidFill>
@@ -4895,17 +5093,17 @@
           <a:p>
             <a:pPr>
               <a:lnSpc>
-                <a:spcPct val="125000"/>
+                <a:spcPct val="117500"/>
               </a:lnSpc>
               <a:spcBef>
                 <a:spcPts val="1000"/>
               </a:spcBef>
               <a:spcAft>
-                <a:spcPts val="300"/>
-              </a:spcAft>
-            </a:pPr>
-            <a:r>
-              <a:rPr sz="1000" b="0" i="0" spc="300">
+                <a:spcPts val="246"/>
+              </a:spcAft>
+            </a:pPr>
+            <a:r>
+              <a:rPr sz="950" b="0" i="0" spc="300">
                 <a:solidFill>
                   <a:srgbClr val="887000"/>
                 </a:solidFill>
@@ -4917,17 +5115,17 @@
           <a:p>
             <a:pPr>
               <a:lnSpc>
-                <a:spcPct val="140000"/>
-              </a:lnSpc>
-              <a:spcBef>
-                <a:spcPts val="0"/>
-              </a:spcBef>
-              <a:spcAft>
-                <a:spcPts val="800"/>
-              </a:spcAft>
-            </a:pPr>
-            <a:r>
-              <a:rPr sz="1400" b="1" i="0">
+                <a:spcPct val="131600"/>
+              </a:lnSpc>
+              <a:spcBef>
+                <a:spcPts val="0"/>
+              </a:spcBef>
+              <a:spcAft>
+                <a:spcPts val="657"/>
+              </a:spcAft>
+            </a:pPr>
+            <a:r>
+              <a:rPr sz="1151" b="1" i="0">
                 <a:solidFill>
                   <a:srgbClr val="0A0A0A"/>
                 </a:solidFill>
@@ -7930,11 +8128,11 @@
                 <a:spcPts val="0"/>
               </a:spcBef>
               <a:spcAft>
-                <a:spcPts val="668"/>
-              </a:spcAft>
-            </a:pPr>
-            <a:r>
-              <a:rPr sz="1113" b="0" i="0">
+                <a:spcPts val="780"/>
+              </a:spcAft>
+            </a:pPr>
+            <a:r>
+              <a:rPr sz="1301" b="0" i="0">
                 <a:solidFill>
                   <a:srgbClr val="444444"/>
                 </a:solidFill>
@@ -7946,347 +8144,369 @@
           <a:p>
             <a:pPr>
               <a:lnSpc>
+                <a:spcPct val="117500"/>
+              </a:lnSpc>
+              <a:spcBef>
+                <a:spcPts val="1000"/>
+              </a:spcBef>
+              <a:spcAft>
+                <a:spcPts val="346"/>
+              </a:spcAft>
+            </a:pPr>
+            <a:r>
+              <a:rPr sz="950" b="0" i="0" spc="500">
+                <a:solidFill>
+                  <a:srgbClr val="8A7C14"/>
+                </a:solidFill>
+                <a:latin typeface="Menlo"/>
+              </a:rPr>
+              <a:t>HAY QUE</a:t>
+            </a:r>
+          </a:p>
+          <a:p>
+            <a:pPr>
+              <a:lnSpc>
+                <a:spcPct val="126900"/>
+              </a:lnSpc>
+              <a:spcBef>
+                <a:spcPts val="0"/>
+              </a:spcBef>
+              <a:spcAft>
+                <a:spcPts val="260"/>
+              </a:spcAft>
+            </a:pPr>
+            <a:r>
+              <a:rPr sz="1170" b="0" i="0">
+                <a:solidFill>
+                  <a:srgbClr val="444444"/>
+                </a:solidFill>
+                <a:latin typeface="Iowan Old Style"/>
+              </a:rPr>
+              <a:t>☐  Cambiar algo que se note, en VS Code</a:t>
+            </a:r>
+          </a:p>
+          <a:p>
+            <a:pPr>
+              <a:lnSpc>
+                <a:spcPct val="126900"/>
+              </a:lnSpc>
+              <a:spcBef>
+                <a:spcPts val="0"/>
+              </a:spcBef>
+              <a:spcAft>
+                <a:spcPts val="260"/>
+              </a:spcAft>
+            </a:pPr>
+            <a:r>
+              <a:rPr sz="1170" b="0" i="0">
+                <a:solidFill>
+                  <a:srgbClr val="444444"/>
+                </a:solidFill>
+                <a:latin typeface="Iowan Old Style"/>
+              </a:rPr>
+              <a:t>☐  Guardar y comprobarlo en local</a:t>
+            </a:r>
+          </a:p>
+          <a:p>
+            <a:pPr>
+              <a:lnSpc>
+                <a:spcPct val="126900"/>
+              </a:lnSpc>
+              <a:spcBef>
+                <a:spcPts val="0"/>
+              </a:spcBef>
+              <a:spcAft>
+                <a:spcPts val="260"/>
+              </a:spcAft>
+            </a:pPr>
+            <a:r>
+              <a:rPr sz="1170" b="0" i="0">
+                <a:solidFill>
+                  <a:srgbClr val="444444"/>
+                </a:solidFill>
+                <a:latin typeface="Iowan Old Style"/>
+              </a:rPr>
+              <a:t>☐  Add file → Upload files</a:t>
+            </a:r>
+          </a:p>
+          <a:p>
+            <a:pPr>
+              <a:lnSpc>
+                <a:spcPct val="126900"/>
+              </a:lnSpc>
+              <a:spcBef>
+                <a:spcPts val="0"/>
+              </a:spcBef>
+              <a:spcAft>
+                <a:spcPts val="260"/>
+              </a:spcAft>
+            </a:pPr>
+            <a:r>
+              <a:rPr sz="1170" b="0" i="0">
+                <a:solidFill>
+                  <a:srgbClr val="444444"/>
+                </a:solidFill>
+                <a:latin typeface="Iowan Old Style"/>
+              </a:rPr>
+              <a:t>☐  Arrastrar el archivo encima del viejo</a:t>
+            </a:r>
+          </a:p>
+          <a:p>
+            <a:pPr>
+              <a:lnSpc>
+                <a:spcPct val="126900"/>
+              </a:lnSpc>
+              <a:spcBef>
+                <a:spcPts val="0"/>
+              </a:spcBef>
+              <a:spcAft>
+                <a:spcPts val="260"/>
+              </a:spcAft>
+            </a:pPr>
+            <a:r>
+              <a:rPr sz="1170" b="0" i="0">
+                <a:solidFill>
+                  <a:srgbClr val="444444"/>
+                </a:solidFill>
+                <a:latin typeface="Iowan Old Style"/>
+              </a:rPr>
+              <a:t>☐  Commit changes y ver el cambio online</a:t>
+            </a:r>
+          </a:p>
+          <a:p>
+            <a:pPr>
+              <a:lnSpc>
+                <a:spcPct val="126900"/>
+              </a:lnSpc>
+              <a:spcBef>
+                <a:spcPts val="0"/>
+              </a:spcBef>
+              <a:spcAft>
+                <a:spcPts val="260"/>
+              </a:spcAft>
+            </a:pPr>
+            <a:r>
+              <a:rPr sz="1170" b="0" i="0">
+                <a:solidFill>
+                  <a:srgbClr val="444444"/>
+                </a:solidFill>
+                <a:latin typeface="Iowan Old Style"/>
+              </a:rPr>
+              <a:t>☐  Repetirlo una segunda vez, sin mirar los pasos</a:t>
+            </a:r>
+          </a:p>
+          <a:p>
+            <a:pPr>
+              <a:lnSpc>
+                <a:spcPct val="117500"/>
+              </a:lnSpc>
+              <a:spcBef>
+                <a:spcPts val="1000"/>
+              </a:spcBef>
+              <a:spcAft>
+                <a:spcPts val="346"/>
+              </a:spcAft>
+            </a:pPr>
+            <a:r>
+              <a:rPr sz="950" b="0" i="0" spc="500">
+                <a:solidFill>
+                  <a:srgbClr val="8A7C14"/>
+                </a:solidFill>
+                <a:latin typeface="Menlo"/>
+              </a:rPr>
+              <a:t>PUEDES</a:t>
+            </a:r>
+          </a:p>
+          <a:p>
+            <a:pPr>
+              <a:lnSpc>
+                <a:spcPct val="126900"/>
+              </a:lnSpc>
+              <a:spcBef>
+                <a:spcPts val="0"/>
+              </a:spcBef>
+              <a:spcAft>
+                <a:spcPts val="260"/>
+              </a:spcAft>
+            </a:pPr>
+            <a:r>
+              <a:rPr sz="1170" b="0" i="0">
+                <a:solidFill>
+                  <a:srgbClr val="444444"/>
+                </a:solidFill>
+                <a:latin typeface="Iowan Old Style"/>
+              </a:rPr>
+              <a:t>☐  Añadir un proyecto nuevo entero</a:t>
+            </a:r>
+          </a:p>
+          <a:p>
+            <a:pPr>
+              <a:lnSpc>
+                <a:spcPct val="126900"/>
+              </a:lnSpc>
+              <a:spcBef>
+                <a:spcPts val="0"/>
+              </a:spcBef>
+              <a:spcAft>
+                <a:spcPts val="260"/>
+              </a:spcAft>
+            </a:pPr>
+            <a:r>
+              <a:rPr sz="1170" b="0" i="0">
+                <a:solidFill>
+                  <a:srgbClr val="444444"/>
+                </a:solidFill>
+                <a:latin typeface="Iowan Old Style"/>
+              </a:rPr>
+              <a:t>☐  Duplicar la carpeta con la fecha antes de tocar</a:t>
+            </a:r>
+          </a:p>
+          <a:p>
+            <a:pPr>
+              <a:lnSpc>
+                <a:spcPct val="126900"/>
+              </a:lnSpc>
+              <a:spcBef>
+                <a:spcPts val="0"/>
+              </a:spcBef>
+              <a:spcAft>
+                <a:spcPts val="260"/>
+              </a:spcAft>
+            </a:pPr>
+            <a:r>
+              <a:rPr sz="1170" b="0" i="0">
+                <a:solidFill>
+                  <a:srgbClr val="444444"/>
+                </a:solidFill>
+                <a:latin typeface="Iowan Old Style"/>
+              </a:rPr>
+              <a:t>☐  Mirar el History del archivo en GitHub</a:t>
+            </a:r>
+          </a:p>
+          <a:p>
+            <a:pPr>
+              <a:lnSpc>
+                <a:spcPct val="117500"/>
+              </a:lnSpc>
+              <a:spcBef>
+                <a:spcPts val="1000"/>
+              </a:spcBef>
+              <a:spcAft>
+                <a:spcPts val="346"/>
+              </a:spcAft>
+            </a:pPr>
+            <a:r>
+              <a:rPr sz="950" b="0" i="0" spc="500">
+                <a:solidFill>
+                  <a:srgbClr val="8A7C14"/>
+                </a:solidFill>
+                <a:latin typeface="Menlo"/>
+              </a:rPr>
+              <a:t>PODRÍAS</a:t>
+            </a:r>
+          </a:p>
+          <a:p>
+            <a:pPr>
+              <a:lnSpc>
+                <a:spcPct val="126900"/>
+              </a:lnSpc>
+              <a:spcBef>
+                <a:spcPts val="0"/>
+              </a:spcBef>
+              <a:spcAft>
+                <a:spcPts val="260"/>
+              </a:spcAft>
+            </a:pPr>
+            <a:r>
+              <a:rPr sz="1170" b="0" i="0">
+                <a:solidFill>
+                  <a:srgbClr val="444444"/>
+                </a:solidFill>
+                <a:latin typeface="Iowan Old Style"/>
+              </a:rPr>
+              <a:t>☐  Editar directamente en GitHub con el lápiz</a:t>
+            </a:r>
+          </a:p>
+          <a:p>
+            <a:pPr>
+              <a:lnSpc>
+                <a:spcPct val="126900"/>
+              </a:lnSpc>
+              <a:spcBef>
+                <a:spcPts val="0"/>
+              </a:spcBef>
+              <a:spcAft>
+                <a:spcPts val="260"/>
+              </a:spcAft>
+            </a:pPr>
+            <a:r>
+              <a:rPr sz="1170" b="0" i="0">
+                <a:solidFill>
+                  <a:srgbClr val="444444"/>
+                </a:solidFill>
+                <a:latin typeface="Iowan Old Style"/>
+              </a:rPr>
+              <a:t>☐  El panel Control de código fuente de VS Code</a:t>
+            </a:r>
+          </a:p>
+          <a:p>
+            <a:pPr>
+              <a:lnSpc>
+                <a:spcPct val="126900"/>
+              </a:lnSpc>
+              <a:spcBef>
+                <a:spcPts val="0"/>
+              </a:spcBef>
+              <a:spcAft>
+                <a:spcPts val="260"/>
+              </a:spcAft>
+            </a:pPr>
+            <a:r>
+              <a:rPr sz="1170" b="0" i="0">
+                <a:solidFill>
+                  <a:srgbClr val="444444"/>
+                </a:solidFill>
+                <a:latin typeface="Iowan Old Style"/>
+              </a:rPr>
+              <a:t>☐  Un README.md en el repositorio</a:t>
+            </a:r>
+          </a:p>
+          <a:p>
+            <a:pPr>
+              <a:lnSpc>
+                <a:spcPct val="117500"/>
+              </a:lnSpc>
+              <a:spcBef>
+                <a:spcPts val="1000"/>
+              </a:spcBef>
+              <a:spcAft>
+                <a:spcPts val="260"/>
+              </a:spcAft>
+            </a:pPr>
+            <a:r>
+              <a:rPr sz="950" b="0" i="0" spc="300">
+                <a:solidFill>
+                  <a:srgbClr val="8A8A8A"/>
+                </a:solidFill>
+                <a:latin typeface="Menlo"/>
+              </a:rPr>
+              <a:t>POR QUÉ ESTO Y NO OTRA COSA</a:t>
+            </a:r>
+          </a:p>
+          <a:p>
+            <a:pPr>
+              <a:lnSpc>
                 <a:spcPct val="131600"/>
               </a:lnSpc>
               <a:spcBef>
                 <a:spcPts val="0"/>
               </a:spcBef>
               <a:spcAft>
-                <a:spcPts val="371"/>
-              </a:spcAft>
-            </a:pPr>
-            <a:r>
-              <a:rPr sz="1076" b="0" i="0">
-                <a:solidFill>
-                  <a:srgbClr val="444444"/>
-                </a:solidFill>
-                <a:latin typeface="Iowan Old Style"/>
-              </a:rPr>
-              <a:t>☐  En VS Code, cambia algo que se note: una frase, un color, una imagen.</a:t>
-            </a:r>
-          </a:p>
-          <a:p>
-            <a:pPr>
-              <a:lnSpc>
-                <a:spcPct val="131600"/>
-              </a:lnSpc>
-              <a:spcBef>
-                <a:spcPts val="0"/>
-              </a:spcBef>
-              <a:spcAft>
-                <a:spcPts val="371"/>
-              </a:spcAft>
-            </a:pPr>
-            <a:r>
-              <a:rPr sz="1076" b="0" i="0">
-                <a:solidFill>
-                  <a:srgbClr val="444444"/>
-                </a:solidFill>
-                <a:latin typeface="Iowan Old Style"/>
-              </a:rPr>
-              <a:t>☐  Guarda.</a:t>
-            </a:r>
-          </a:p>
-          <a:p>
-            <a:pPr>
-              <a:lnSpc>
-                <a:spcPct val="131600"/>
-              </a:lnSpc>
-              <a:spcBef>
-                <a:spcPts val="0"/>
-              </a:spcBef>
-              <a:spcAft>
-                <a:spcPts val="371"/>
-              </a:spcAft>
-            </a:pPr>
-            <a:r>
-              <a:rPr sz="1076" b="0" i="0">
-                <a:solidFill>
-                  <a:srgbClr val="444444"/>
-                </a:solidFill>
-                <a:latin typeface="Iowan Old Style"/>
-              </a:rPr>
-              <a:t>☐  Ábrelo en tu navegador en local y comprueba que está bien.</a:t>
-            </a:r>
-          </a:p>
-          <a:p>
-            <a:pPr>
-              <a:lnSpc>
-                <a:spcPct val="131600"/>
-              </a:lnSpc>
-              <a:spcBef>
-                <a:spcPts val="0"/>
-              </a:spcBef>
-              <a:spcAft>
-                <a:spcPts val="371"/>
-              </a:spcAft>
-            </a:pPr>
-            <a:r>
-              <a:rPr sz="1076" b="0" i="0">
-                <a:solidFill>
-                  <a:srgbClr val="444444"/>
-                </a:solidFill>
-                <a:latin typeface="Iowan Old Style"/>
-              </a:rPr>
-              <a:t>☐  En GitHub: Add file → Upload files.</a:t>
-            </a:r>
-          </a:p>
-          <a:p>
-            <a:pPr>
-              <a:lnSpc>
-                <a:spcPct val="131600"/>
-              </a:lnSpc>
-              <a:spcBef>
-                <a:spcPts val="0"/>
-              </a:spcBef>
-              <a:spcAft>
-                <a:spcPts val="371"/>
-              </a:spcAft>
-            </a:pPr>
-            <a:r>
-              <a:rPr sz="1076" b="0" i="0">
-                <a:solidFill>
-                  <a:srgbClr val="444444"/>
-                </a:solidFill>
-                <a:latin typeface="Iowan Old Style"/>
-              </a:rPr>
-              <a:t>☐  Arrastra el archivo cambiado encima del que ya estaba.</a:t>
-            </a:r>
-          </a:p>
-          <a:p>
-            <a:pPr>
-              <a:lnSpc>
-                <a:spcPct val="131600"/>
-              </a:lnSpc>
-              <a:spcBef>
-                <a:spcPts val="0"/>
-              </a:spcBef>
-              <a:spcAft>
-                <a:spcPts val="371"/>
-              </a:spcAft>
-            </a:pPr>
-            <a:r>
-              <a:rPr sz="1076" b="0" i="0">
-                <a:solidFill>
-                  <a:srgbClr val="444444"/>
-                </a:solidFill>
-                <a:latin typeface="Iowan Old Style"/>
-              </a:rPr>
-              <a:t>☐  Commit changes.</a:t>
-            </a:r>
-          </a:p>
-          <a:p>
-            <a:pPr>
-              <a:lnSpc>
-                <a:spcPct val="131600"/>
-              </a:lnSpc>
-              <a:spcBef>
-                <a:spcPts val="0"/>
-              </a:spcBef>
-              <a:spcAft>
-                <a:spcPts val="371"/>
-              </a:spcAft>
-            </a:pPr>
-            <a:r>
-              <a:rPr sz="1076" b="0" i="0">
-                <a:solidFill>
-                  <a:srgbClr val="444444"/>
-                </a:solidFill>
-                <a:latin typeface="Iowan Old Style"/>
-              </a:rPr>
-              <a:t>☐  Espera un minuto, recarga tu web publicada y comprueba el cambio.</a:t>
-            </a:r>
-          </a:p>
-          <a:p>
-            <a:pPr>
-              <a:lnSpc>
-                <a:spcPct val="131600"/>
-              </a:lnSpc>
-              <a:spcBef>
-                <a:spcPts val="0"/>
-              </a:spcBef>
-              <a:spcAft>
-                <a:spcPts val="371"/>
-              </a:spcAft>
-            </a:pPr>
-            <a:r>
-              <a:rPr sz="1076" b="0" i="0">
-                <a:solidFill>
-                  <a:srgbClr val="444444"/>
-                </a:solidFill>
-                <a:latin typeface="Iowan Old Style"/>
-              </a:rPr>
-              <a:t>☐  Añade un proyecto nuevo a proyectos.html.</a:t>
-            </a:r>
-          </a:p>
-          <a:p>
-            <a:pPr>
-              <a:lnSpc>
-                <a:spcPct val="131600"/>
-              </a:lnSpc>
-              <a:spcBef>
-                <a:spcPts val="0"/>
-              </a:spcBef>
-              <a:spcAft>
-                <a:spcPts val="371"/>
-              </a:spcAft>
-            </a:pPr>
-            <a:r>
-              <a:rPr sz="1076" b="0" i="0">
-                <a:solidFill>
-                  <a:srgbClr val="444444"/>
-                </a:solidFill>
-                <a:latin typeface="Iowan Old Style"/>
-              </a:rPr>
-              <a:t>☐  Súbelo tú sola, sin mirar los pasos de arriba.</a:t>
-            </a:r>
-          </a:p>
-          <a:p>
-            <a:pPr>
-              <a:lnSpc>
-                <a:spcPct val="131600"/>
-              </a:lnSpc>
-              <a:spcBef>
-                <a:spcPts val="0"/>
-              </a:spcBef>
-              <a:spcAft>
-                <a:spcPts val="371"/>
-              </a:spcAft>
-            </a:pPr>
-            <a:r>
-              <a:rPr sz="1076" b="0" i="0">
-                <a:solidFill>
-                  <a:srgbClr val="444444"/>
-                </a:solidFill>
-                <a:latin typeface="Iowan Old Style"/>
-              </a:rPr>
-              <a:t>☐  Tengo mi dirección apuntada en papel.</a:t>
-            </a:r>
-          </a:p>
-          <a:p>
-            <a:pPr>
-              <a:lnSpc>
-                <a:spcPct val="131600"/>
-              </a:lnSpc>
-              <a:spcBef>
-                <a:spcPts val="0"/>
-              </a:spcBef>
-              <a:spcAft>
-                <a:spcPts val="371"/>
-              </a:spcAft>
-            </a:pPr>
-            <a:r>
-              <a:rPr sz="1076" b="0" i="0">
-                <a:solidFill>
-                  <a:srgbClr val="444444"/>
-                </a:solidFill>
-                <a:latin typeface="Iowan Old Style"/>
-              </a:rPr>
-              <a:t>☐  Tengo la carpeta guardada en mi ordenador.</a:t>
-            </a:r>
-          </a:p>
-          <a:p>
-            <a:pPr>
-              <a:lnSpc>
-                <a:spcPct val="131600"/>
-              </a:lnSpc>
-              <a:spcBef>
-                <a:spcPts val="0"/>
-              </a:spcBef>
-              <a:spcAft>
-                <a:spcPts val="371"/>
-              </a:spcAft>
-            </a:pPr>
-            <a:r>
-              <a:rPr sz="1076" b="0" i="0">
-                <a:solidFill>
-                  <a:srgbClr val="444444"/>
-                </a:solidFill>
-                <a:latin typeface="Iowan Old Style"/>
-              </a:rPr>
-              <a:t>☐  Sé entrar en mi cuenta de GitHub.</a:t>
-            </a:r>
-          </a:p>
-          <a:p>
-            <a:pPr>
-              <a:lnSpc>
-                <a:spcPct val="131600"/>
-              </a:lnSpc>
-              <a:spcBef>
-                <a:spcPts val="0"/>
-              </a:spcBef>
-              <a:spcAft>
-                <a:spcPts val="371"/>
-              </a:spcAft>
-            </a:pPr>
-            <a:r>
-              <a:rPr sz="1076" b="0" i="0">
-                <a:solidFill>
-                  <a:srgbClr val="444444"/>
-                </a:solidFill>
-                <a:latin typeface="Iowan Old Style"/>
-              </a:rPr>
-              <a:t>☐  He hecho el ciclo completo yo sola, al menos dos veces.</a:t>
-            </a:r>
-          </a:p>
-          <a:p>
-            <a:pPr>
-              <a:lnSpc>
-                <a:spcPct val="131600"/>
-              </a:lnSpc>
-              <a:spcBef>
-                <a:spcPts val="0"/>
-              </a:spcBef>
-              <a:spcAft>
-                <a:spcPts val="371"/>
-              </a:spcAft>
-            </a:pPr>
-            <a:r>
-              <a:rPr sz="1076" b="0" i="0">
-                <a:solidFill>
-                  <a:srgbClr val="444444"/>
-                </a:solidFill>
-                <a:latin typeface="Iowan Old Style"/>
-              </a:rPr>
-              <a:t>☐  Me llevo la guía y la chuleta.</a:t>
-            </a:r>
-          </a:p>
-          <a:p>
-            <a:pPr>
-              <a:lnSpc>
-                <a:spcPct val="117500"/>
-              </a:lnSpc>
-              <a:spcBef>
-                <a:spcPts val="1000"/>
-              </a:spcBef>
-              <a:spcAft>
-                <a:spcPts val="222"/>
-              </a:spcAft>
-            </a:pPr>
-            <a:r>
-              <a:rPr sz="950" b="0" i="0" spc="300">
-                <a:solidFill>
-                  <a:srgbClr val="8A8A8A"/>
-                </a:solidFill>
-                <a:latin typeface="Menlo"/>
-              </a:rPr>
-              <a:t>POR QUÉ ESTO Y NO OTRA COSA</a:t>
-            </a:r>
-          </a:p>
-          <a:p>
-            <a:pPr>
-              <a:lnSpc>
-                <a:spcPct val="131600"/>
-              </a:lnSpc>
-              <a:spcBef>
-                <a:spcPts val="0"/>
-              </a:spcBef>
-              <a:spcAft>
-                <a:spcPts val="593"/>
-              </a:spcAft>
-            </a:pPr>
-            <a:r>
-              <a:rPr sz="1039" b="0" i="0">
+                <a:spcPts val="693"/>
+              </a:spcAft>
+            </a:pPr>
+            <a:r>
+              <a:rPr sz="1214" b="0" i="0">
                 <a:solidFill>
                   <a:srgbClr val="444444"/>
                 </a:solidFill>
